--- a/NetWorks Presentation.pptx
+++ b/NetWorks Presentation.pptx
@@ -2,7 +2,7 @@
 <file path=ppt/presentation.xml><?xml version="1.0" encoding="utf-8"?>
 <p:presentation xmlns:a="http://schemas.openxmlformats.org/drawingml/2006/main" xmlns:r="http://schemas.openxmlformats.org/officeDocument/2006/relationships" xmlns:p="http://schemas.openxmlformats.org/presentationml/2006/main" saveSubsetFonts="1">
   <p:sldMasterIdLst>
-    <p:sldMasterId id="2147483648" r:id="rId1"/>
+    <p:sldMasterId id="2147483713" r:id="rId1"/>
   </p:sldMasterIdLst>
   <p:sldIdLst>
     <p:sldId id="256" r:id="rId2"/>
@@ -23,9 +23,9 @@
   <p:notesSz cx="6858000" cy="9144000"/>
   <p:defaultTextStyle>
     <a:defPPr>
-      <a:defRPr lang="hu-HU"/>
+      <a:defRPr lang="en-US"/>
     </a:defPPr>
-    <a:lvl1pPr marL="0" algn="l" defTabSz="914400" rtl="0" eaLnBrk="1" latinLnBrk="0" hangingPunct="1">
+    <a:lvl1pPr marL="0" algn="l" defTabSz="457200" rtl="0" eaLnBrk="1" latinLnBrk="0" hangingPunct="1">
       <a:defRPr sz="1800" kern="1200">
         <a:solidFill>
           <a:schemeClr val="tx1"/>
@@ -35,7 +35,7 @@
         <a:cs typeface="+mn-cs"/>
       </a:defRPr>
     </a:lvl1pPr>
-    <a:lvl2pPr marL="457200" algn="l" defTabSz="914400" rtl="0" eaLnBrk="1" latinLnBrk="0" hangingPunct="1">
+    <a:lvl2pPr marL="457200" algn="l" defTabSz="457200" rtl="0" eaLnBrk="1" latinLnBrk="0" hangingPunct="1">
       <a:defRPr sz="1800" kern="1200">
         <a:solidFill>
           <a:schemeClr val="tx1"/>
@@ -45,7 +45,7 @@
         <a:cs typeface="+mn-cs"/>
       </a:defRPr>
     </a:lvl2pPr>
-    <a:lvl3pPr marL="914400" algn="l" defTabSz="914400" rtl="0" eaLnBrk="1" latinLnBrk="0" hangingPunct="1">
+    <a:lvl3pPr marL="914400" algn="l" defTabSz="457200" rtl="0" eaLnBrk="1" latinLnBrk="0" hangingPunct="1">
       <a:defRPr sz="1800" kern="1200">
         <a:solidFill>
           <a:schemeClr val="tx1"/>
@@ -55,7 +55,7 @@
         <a:cs typeface="+mn-cs"/>
       </a:defRPr>
     </a:lvl3pPr>
-    <a:lvl4pPr marL="1371600" algn="l" defTabSz="914400" rtl="0" eaLnBrk="1" latinLnBrk="0" hangingPunct="1">
+    <a:lvl4pPr marL="1371600" algn="l" defTabSz="457200" rtl="0" eaLnBrk="1" latinLnBrk="0" hangingPunct="1">
       <a:defRPr sz="1800" kern="1200">
         <a:solidFill>
           <a:schemeClr val="tx1"/>
@@ -65,7 +65,7 @@
         <a:cs typeface="+mn-cs"/>
       </a:defRPr>
     </a:lvl4pPr>
-    <a:lvl5pPr marL="1828800" algn="l" defTabSz="914400" rtl="0" eaLnBrk="1" latinLnBrk="0" hangingPunct="1">
+    <a:lvl5pPr marL="1828800" algn="l" defTabSz="457200" rtl="0" eaLnBrk="1" latinLnBrk="0" hangingPunct="1">
       <a:defRPr sz="1800" kern="1200">
         <a:solidFill>
           <a:schemeClr val="tx1"/>
@@ -75,7 +75,7 @@
         <a:cs typeface="+mn-cs"/>
       </a:defRPr>
     </a:lvl5pPr>
-    <a:lvl6pPr marL="2286000" algn="l" defTabSz="914400" rtl="0" eaLnBrk="1" latinLnBrk="0" hangingPunct="1">
+    <a:lvl6pPr marL="2286000" algn="l" defTabSz="457200" rtl="0" eaLnBrk="1" latinLnBrk="0" hangingPunct="1">
       <a:defRPr sz="1800" kern="1200">
         <a:solidFill>
           <a:schemeClr val="tx1"/>
@@ -85,7 +85,7 @@
         <a:cs typeface="+mn-cs"/>
       </a:defRPr>
     </a:lvl6pPr>
-    <a:lvl7pPr marL="2743200" algn="l" defTabSz="914400" rtl="0" eaLnBrk="1" latinLnBrk="0" hangingPunct="1">
+    <a:lvl7pPr marL="2743200" algn="l" defTabSz="457200" rtl="0" eaLnBrk="1" latinLnBrk="0" hangingPunct="1">
       <a:defRPr sz="1800" kern="1200">
         <a:solidFill>
           <a:schemeClr val="tx1"/>
@@ -95,7 +95,7 @@
         <a:cs typeface="+mn-cs"/>
       </a:defRPr>
     </a:lvl7pPr>
-    <a:lvl8pPr marL="3200400" algn="l" defTabSz="914400" rtl="0" eaLnBrk="1" latinLnBrk="0" hangingPunct="1">
+    <a:lvl8pPr marL="3200400" algn="l" defTabSz="457200" rtl="0" eaLnBrk="1" latinLnBrk="0" hangingPunct="1">
       <a:defRPr sz="1800" kern="1200">
         <a:solidFill>
           <a:schemeClr val="tx1"/>
@@ -105,7 +105,7 @@
         <a:cs typeface="+mn-cs"/>
       </a:defRPr>
     </a:lvl8pPr>
-    <a:lvl9pPr marL="3657600" algn="l" defTabSz="914400" rtl="0" eaLnBrk="1" latinLnBrk="0" hangingPunct="1">
+    <a:lvl9pPr marL="3657600" algn="l" defTabSz="457200" rtl="0" eaLnBrk="1" latinLnBrk="0" hangingPunct="1">
       <a:defRPr sz="1800" kern="1200">
         <a:solidFill>
           <a:schemeClr val="tx1"/>
@@ -116,6 +116,11 @@
       </a:defRPr>
     </a:lvl9pPr>
   </p:defaultTextStyle>
+  <p:extLst>
+    <p:ext uri="{EFAFB233-063F-42B5-8137-9DF3F51BA10A}">
+      <p15:sldGuideLst xmlns:p15="http://schemas.microsoft.com/office/powerpoint/2012/main"/>
+    </p:ext>
+  </p:extLst>
 </p:presentation>
 </file>
 
@@ -132,7 +137,7 @@
 </file>
 
 <file path=ppt/slideLayouts/slideLayout1.xml><?xml version="1.0" encoding="utf-8"?>
-<p:sldLayout xmlns:a="http://schemas.openxmlformats.org/drawingml/2006/main" xmlns:r="http://schemas.openxmlformats.org/officeDocument/2006/relationships" xmlns:p="http://schemas.openxmlformats.org/presentationml/2006/main" type="title" preserve="1">
+<p:sldLayout xmlns:a="http://schemas.openxmlformats.org/drawingml/2006/main" xmlns:r="http://schemas.openxmlformats.org/officeDocument/2006/relationships" xmlns:p="http://schemas.openxmlformats.org/presentationml/2006/main" showMasterSp="0" type="title" preserve="1">
   <p:cSld name="Címdia">
     <p:spTree>
       <p:nvGrpSpPr>
@@ -148,15 +153,562 @@
           <a:chExt cx="0" cy="0"/>
         </a:xfrm>
       </p:grpSpPr>
-      <p:sp>
-        <p:nvSpPr>
-          <p:cNvPr id="2" name="Cím 1">
-            <a:extLst>
-              <a:ext uri="{FF2B5EF4-FFF2-40B4-BE49-F238E27FC236}">
-                <a16:creationId xmlns:a16="http://schemas.microsoft.com/office/drawing/2014/main" id="{2299AD21-92A1-144D-A7F8-45C84A3CDBC3}"/>
-              </a:ext>
-            </a:extLst>
-          </p:cNvPr>
+      <p:grpSp>
+        <p:nvGrpSpPr>
+          <p:cNvPr id="16" name="Group 15"/>
+          <p:cNvGrpSpPr/>
+          <p:nvPr/>
+        </p:nvGrpSpPr>
+        <p:grpSpPr>
+          <a:xfrm>
+            <a:off x="0" y="-8467"/>
+            <a:ext cx="12192000" cy="6866467"/>
+            <a:chOff x="0" y="-8467"/>
+            <a:chExt cx="12192000" cy="6866467"/>
+          </a:xfrm>
+        </p:grpSpPr>
+        <p:sp>
+          <p:nvSpPr>
+            <p:cNvPr id="15" name="Freeform 14"/>
+            <p:cNvSpPr/>
+            <p:nvPr/>
+          </p:nvSpPr>
+          <p:spPr>
+            <a:xfrm>
+              <a:off x="0" y="-7862"/>
+              <a:ext cx="863600" cy="5698067"/>
+            </a:xfrm>
+            <a:custGeom>
+              <a:avLst/>
+              <a:gdLst/>
+              <a:ahLst/>
+              <a:cxnLst/>
+              <a:rect l="l" t="t" r="r" b="b"/>
+              <a:pathLst>
+                <a:path w="863600" h="5698067">
+                  <a:moveTo>
+                    <a:pt x="0" y="8467"/>
+                  </a:moveTo>
+                  <a:lnTo>
+                    <a:pt x="863600" y="0"/>
+                  </a:lnTo>
+                  <a:lnTo>
+                    <a:pt x="863600" y="16934"/>
+                  </a:lnTo>
+                  <a:lnTo>
+                    <a:pt x="0" y="5698067"/>
+                  </a:lnTo>
+                  <a:lnTo>
+                    <a:pt x="0" y="8467"/>
+                  </a:lnTo>
+                  <a:close/>
+                </a:path>
+              </a:pathLst>
+            </a:custGeom>
+            <a:solidFill>
+              <a:schemeClr val="accent1">
+                <a:alpha val="70000"/>
+              </a:schemeClr>
+            </a:solidFill>
+            <a:ln>
+              <a:noFill/>
+            </a:ln>
+            <a:effectLst/>
+          </p:spPr>
+          <p:style>
+            <a:lnRef idx="1">
+              <a:schemeClr val="accent1"/>
+            </a:lnRef>
+            <a:fillRef idx="3">
+              <a:schemeClr val="accent1"/>
+            </a:fillRef>
+            <a:effectRef idx="2">
+              <a:schemeClr val="accent1"/>
+            </a:effectRef>
+            <a:fontRef idx="minor">
+              <a:schemeClr val="lt1"/>
+            </a:fontRef>
+          </p:style>
+        </p:sp>
+        <p:cxnSp>
+          <p:nvCxnSpPr>
+            <p:cNvPr id="19" name="Straight Connector 18"/>
+            <p:cNvCxnSpPr/>
+            <p:nvPr/>
+          </p:nvCxnSpPr>
+          <p:spPr>
+            <a:xfrm>
+              <a:off x="9371012" y="0"/>
+              <a:ext cx="1219200" cy="6858000"/>
+            </a:xfrm>
+            <a:prstGeom prst="line">
+              <a:avLst/>
+            </a:prstGeom>
+            <a:ln w="9525">
+              <a:solidFill>
+                <a:schemeClr val="accent1">
+                  <a:alpha val="70000"/>
+                </a:schemeClr>
+              </a:solidFill>
+            </a:ln>
+          </p:spPr>
+          <p:style>
+            <a:lnRef idx="2">
+              <a:schemeClr val="accent1"/>
+            </a:lnRef>
+            <a:fillRef idx="0">
+              <a:schemeClr val="accent1"/>
+            </a:fillRef>
+            <a:effectRef idx="1">
+              <a:schemeClr val="accent1"/>
+            </a:effectRef>
+            <a:fontRef idx="minor">
+              <a:schemeClr val="tx1"/>
+            </a:fontRef>
+          </p:style>
+        </p:cxnSp>
+        <p:cxnSp>
+          <p:nvCxnSpPr>
+            <p:cNvPr id="20" name="Straight Connector 19"/>
+            <p:cNvCxnSpPr/>
+            <p:nvPr/>
+          </p:nvCxnSpPr>
+          <p:spPr>
+            <a:xfrm flipH="1">
+              <a:off x="7425267" y="3681413"/>
+              <a:ext cx="4763558" cy="3176587"/>
+            </a:xfrm>
+            <a:prstGeom prst="line">
+              <a:avLst/>
+            </a:prstGeom>
+            <a:ln w="9525">
+              <a:solidFill>
+                <a:schemeClr val="accent1">
+                  <a:alpha val="70000"/>
+                </a:schemeClr>
+              </a:solidFill>
+            </a:ln>
+          </p:spPr>
+          <p:style>
+            <a:lnRef idx="2">
+              <a:schemeClr val="accent1"/>
+            </a:lnRef>
+            <a:fillRef idx="0">
+              <a:schemeClr val="accent1"/>
+            </a:fillRef>
+            <a:effectRef idx="1">
+              <a:schemeClr val="accent1"/>
+            </a:effectRef>
+            <a:fontRef idx="minor">
+              <a:schemeClr val="tx1"/>
+            </a:fontRef>
+          </p:style>
+        </p:cxnSp>
+        <p:sp>
+          <p:nvSpPr>
+            <p:cNvPr id="21" name="Rectangle 23"/>
+            <p:cNvSpPr/>
+            <p:nvPr/>
+          </p:nvSpPr>
+          <p:spPr>
+            <a:xfrm>
+              <a:off x="9181476" y="-8467"/>
+              <a:ext cx="3007349" cy="6866467"/>
+            </a:xfrm>
+            <a:custGeom>
+              <a:avLst/>
+              <a:gdLst/>
+              <a:ahLst/>
+              <a:cxnLst/>
+              <a:rect l="l" t="t" r="r" b="b"/>
+              <a:pathLst>
+                <a:path w="3007349" h="6866467">
+                  <a:moveTo>
+                    <a:pt x="2045532" y="0"/>
+                  </a:moveTo>
+                  <a:lnTo>
+                    <a:pt x="3007349" y="0"/>
+                  </a:lnTo>
+                  <a:lnTo>
+                    <a:pt x="3007349" y="6866467"/>
+                  </a:lnTo>
+                  <a:lnTo>
+                    <a:pt x="0" y="6866467"/>
+                  </a:lnTo>
+                  <a:lnTo>
+                    <a:pt x="2045532" y="0"/>
+                  </a:lnTo>
+                  <a:close/>
+                </a:path>
+              </a:pathLst>
+            </a:custGeom>
+            <a:solidFill>
+              <a:schemeClr val="accent1">
+                <a:alpha val="36000"/>
+              </a:schemeClr>
+            </a:solidFill>
+            <a:ln>
+              <a:noFill/>
+            </a:ln>
+            <a:effectLst/>
+          </p:spPr>
+          <p:style>
+            <a:lnRef idx="1">
+              <a:schemeClr val="accent1"/>
+            </a:lnRef>
+            <a:fillRef idx="3">
+              <a:schemeClr val="accent1"/>
+            </a:fillRef>
+            <a:effectRef idx="2">
+              <a:schemeClr val="accent1"/>
+            </a:effectRef>
+            <a:fontRef idx="minor">
+              <a:schemeClr val="lt1"/>
+            </a:fontRef>
+          </p:style>
+        </p:sp>
+        <p:sp>
+          <p:nvSpPr>
+            <p:cNvPr id="22" name="Rectangle 25"/>
+            <p:cNvSpPr/>
+            <p:nvPr/>
+          </p:nvSpPr>
+          <p:spPr>
+            <a:xfrm>
+              <a:off x="9603442" y="-8467"/>
+              <a:ext cx="2588558" cy="6866467"/>
+            </a:xfrm>
+            <a:custGeom>
+              <a:avLst/>
+              <a:gdLst/>
+              <a:ahLst/>
+              <a:cxnLst/>
+              <a:rect l="l" t="t" r="r" b="b"/>
+              <a:pathLst>
+                <a:path w="2573311" h="6866467">
+                  <a:moveTo>
+                    <a:pt x="0" y="0"/>
+                  </a:moveTo>
+                  <a:lnTo>
+                    <a:pt x="2573311" y="0"/>
+                  </a:lnTo>
+                  <a:lnTo>
+                    <a:pt x="2573311" y="6866467"/>
+                  </a:lnTo>
+                  <a:lnTo>
+                    <a:pt x="1202336" y="6866467"/>
+                  </a:lnTo>
+                  <a:lnTo>
+                    <a:pt x="0" y="0"/>
+                  </a:lnTo>
+                  <a:close/>
+                </a:path>
+              </a:pathLst>
+            </a:custGeom>
+            <a:solidFill>
+              <a:schemeClr val="accent1">
+                <a:alpha val="20000"/>
+              </a:schemeClr>
+            </a:solidFill>
+            <a:ln>
+              <a:noFill/>
+            </a:ln>
+            <a:effectLst/>
+          </p:spPr>
+          <p:style>
+            <a:lnRef idx="1">
+              <a:schemeClr val="accent1"/>
+            </a:lnRef>
+            <a:fillRef idx="3">
+              <a:schemeClr val="accent1"/>
+            </a:fillRef>
+            <a:effectRef idx="2">
+              <a:schemeClr val="accent1"/>
+            </a:effectRef>
+            <a:fontRef idx="minor">
+              <a:schemeClr val="lt1"/>
+            </a:fontRef>
+          </p:style>
+        </p:sp>
+        <p:sp>
+          <p:nvSpPr>
+            <p:cNvPr id="23" name="Isosceles Triangle 22"/>
+            <p:cNvSpPr/>
+            <p:nvPr/>
+          </p:nvSpPr>
+          <p:spPr>
+            <a:xfrm>
+              <a:off x="8932333" y="3048000"/>
+              <a:ext cx="3259667" cy="3810000"/>
+            </a:xfrm>
+            <a:prstGeom prst="triangle">
+              <a:avLst>
+                <a:gd name="adj" fmla="val 100000"/>
+              </a:avLst>
+            </a:prstGeom>
+            <a:solidFill>
+              <a:schemeClr val="accent1">
+                <a:lumMod val="75000"/>
+                <a:alpha val="66000"/>
+              </a:schemeClr>
+            </a:solidFill>
+            <a:ln>
+              <a:noFill/>
+            </a:ln>
+            <a:effectLst/>
+          </p:spPr>
+          <p:style>
+            <a:lnRef idx="1">
+              <a:schemeClr val="accent1"/>
+            </a:lnRef>
+            <a:fillRef idx="3">
+              <a:schemeClr val="accent1"/>
+            </a:fillRef>
+            <a:effectRef idx="2">
+              <a:schemeClr val="accent1"/>
+            </a:effectRef>
+            <a:fontRef idx="minor">
+              <a:schemeClr val="lt1"/>
+            </a:fontRef>
+          </p:style>
+        </p:sp>
+        <p:sp>
+          <p:nvSpPr>
+            <p:cNvPr id="24" name="Rectangle 27"/>
+            <p:cNvSpPr/>
+            <p:nvPr/>
+          </p:nvSpPr>
+          <p:spPr>
+            <a:xfrm>
+              <a:off x="9334500" y="-8467"/>
+              <a:ext cx="2854326" cy="6866467"/>
+            </a:xfrm>
+            <a:custGeom>
+              <a:avLst/>
+              <a:gdLst/>
+              <a:ahLst/>
+              <a:cxnLst/>
+              <a:rect l="l" t="t" r="r" b="b"/>
+              <a:pathLst>
+                <a:path w="2858013" h="6866467">
+                  <a:moveTo>
+                    <a:pt x="0" y="0"/>
+                  </a:moveTo>
+                  <a:lnTo>
+                    <a:pt x="2858013" y="0"/>
+                  </a:lnTo>
+                  <a:lnTo>
+                    <a:pt x="2858013" y="6866467"/>
+                  </a:lnTo>
+                  <a:lnTo>
+                    <a:pt x="2473942" y="6866467"/>
+                  </a:lnTo>
+                  <a:lnTo>
+                    <a:pt x="0" y="0"/>
+                  </a:lnTo>
+                  <a:close/>
+                </a:path>
+              </a:pathLst>
+            </a:custGeom>
+            <a:solidFill>
+              <a:schemeClr val="accent1">
+                <a:lumMod val="75000"/>
+                <a:alpha val="50000"/>
+              </a:schemeClr>
+            </a:solidFill>
+            <a:ln>
+              <a:noFill/>
+            </a:ln>
+            <a:effectLst/>
+          </p:spPr>
+          <p:style>
+            <a:lnRef idx="1">
+              <a:schemeClr val="accent1"/>
+            </a:lnRef>
+            <a:fillRef idx="3">
+              <a:schemeClr val="accent1"/>
+            </a:fillRef>
+            <a:effectRef idx="2">
+              <a:schemeClr val="accent1"/>
+            </a:effectRef>
+            <a:fontRef idx="minor">
+              <a:schemeClr val="lt1"/>
+            </a:fontRef>
+          </p:style>
+        </p:sp>
+        <p:sp>
+          <p:nvSpPr>
+            <p:cNvPr id="25" name="Rectangle 28"/>
+            <p:cNvSpPr/>
+            <p:nvPr/>
+          </p:nvSpPr>
+          <p:spPr>
+            <a:xfrm>
+              <a:off x="10898730" y="-8467"/>
+              <a:ext cx="1290094" cy="6866467"/>
+            </a:xfrm>
+            <a:custGeom>
+              <a:avLst/>
+              <a:gdLst/>
+              <a:ahLst/>
+              <a:cxnLst/>
+              <a:rect l="l" t="t" r="r" b="b"/>
+              <a:pathLst>
+                <a:path w="1290094" h="6858000">
+                  <a:moveTo>
+                    <a:pt x="1019735" y="0"/>
+                  </a:moveTo>
+                  <a:lnTo>
+                    <a:pt x="1290094" y="0"/>
+                  </a:lnTo>
+                  <a:lnTo>
+                    <a:pt x="1290094" y="6858000"/>
+                  </a:lnTo>
+                  <a:lnTo>
+                    <a:pt x="0" y="6858000"/>
+                  </a:lnTo>
+                  <a:lnTo>
+                    <a:pt x="1019735" y="0"/>
+                  </a:lnTo>
+                  <a:close/>
+                </a:path>
+              </a:pathLst>
+            </a:custGeom>
+            <a:solidFill>
+              <a:schemeClr val="accent2">
+                <a:alpha val="70000"/>
+              </a:schemeClr>
+            </a:solidFill>
+            <a:ln>
+              <a:noFill/>
+            </a:ln>
+            <a:effectLst/>
+          </p:spPr>
+          <p:style>
+            <a:lnRef idx="1">
+              <a:schemeClr val="accent1"/>
+            </a:lnRef>
+            <a:fillRef idx="3">
+              <a:schemeClr val="accent1"/>
+            </a:fillRef>
+            <a:effectRef idx="2">
+              <a:schemeClr val="accent1"/>
+            </a:effectRef>
+            <a:fontRef idx="minor">
+              <a:schemeClr val="lt1"/>
+            </a:fontRef>
+          </p:style>
+        </p:sp>
+        <p:sp>
+          <p:nvSpPr>
+            <p:cNvPr id="26" name="Rectangle 29"/>
+            <p:cNvSpPr/>
+            <p:nvPr/>
+          </p:nvSpPr>
+          <p:spPr>
+            <a:xfrm>
+              <a:off x="10938999" y="-8467"/>
+              <a:ext cx="1249825" cy="6866467"/>
+            </a:xfrm>
+            <a:custGeom>
+              <a:avLst/>
+              <a:gdLst/>
+              <a:ahLst/>
+              <a:cxnLst/>
+              <a:rect l="l" t="t" r="r" b="b"/>
+              <a:pathLst>
+                <a:path w="1249825" h="6858000">
+                  <a:moveTo>
+                    <a:pt x="0" y="0"/>
+                  </a:moveTo>
+                  <a:lnTo>
+                    <a:pt x="1249825" y="0"/>
+                  </a:lnTo>
+                  <a:lnTo>
+                    <a:pt x="1249825" y="6858000"/>
+                  </a:lnTo>
+                  <a:lnTo>
+                    <a:pt x="1109382" y="6858000"/>
+                  </a:lnTo>
+                  <a:lnTo>
+                    <a:pt x="0" y="0"/>
+                  </a:lnTo>
+                  <a:close/>
+                </a:path>
+              </a:pathLst>
+            </a:custGeom>
+            <a:solidFill>
+              <a:schemeClr val="accent2">
+                <a:lumMod val="75000"/>
+                <a:alpha val="80000"/>
+              </a:schemeClr>
+            </a:solidFill>
+            <a:ln>
+              <a:noFill/>
+            </a:ln>
+            <a:effectLst/>
+          </p:spPr>
+          <p:style>
+            <a:lnRef idx="1">
+              <a:schemeClr val="accent1"/>
+            </a:lnRef>
+            <a:fillRef idx="3">
+              <a:schemeClr val="accent1"/>
+            </a:fillRef>
+            <a:effectRef idx="2">
+              <a:schemeClr val="accent1"/>
+            </a:effectRef>
+            <a:fontRef idx="minor">
+              <a:schemeClr val="lt1"/>
+            </a:fontRef>
+          </p:style>
+        </p:sp>
+        <p:sp>
+          <p:nvSpPr>
+            <p:cNvPr id="27" name="Isosceles Triangle 26"/>
+            <p:cNvSpPr/>
+            <p:nvPr/>
+          </p:nvSpPr>
+          <p:spPr>
+            <a:xfrm>
+              <a:off x="10371666" y="3589867"/>
+              <a:ext cx="1817159" cy="3268133"/>
+            </a:xfrm>
+            <a:prstGeom prst="triangle">
+              <a:avLst>
+                <a:gd name="adj" fmla="val 100000"/>
+              </a:avLst>
+            </a:prstGeom>
+            <a:solidFill>
+              <a:schemeClr val="accent1">
+                <a:lumMod val="75000"/>
+                <a:alpha val="66000"/>
+              </a:schemeClr>
+            </a:solidFill>
+            <a:ln>
+              <a:noFill/>
+            </a:ln>
+            <a:effectLst/>
+          </p:spPr>
+          <p:style>
+            <a:lnRef idx="1">
+              <a:schemeClr val="accent1"/>
+            </a:lnRef>
+            <a:fillRef idx="3">
+              <a:schemeClr val="accent1"/>
+            </a:fillRef>
+            <a:effectRef idx="2">
+              <a:schemeClr val="accent1"/>
+            </a:effectRef>
+            <a:fontRef idx="minor">
+              <a:schemeClr val="lt1"/>
+            </a:fontRef>
+          </p:style>
+        </p:sp>
+      </p:grpSp>
+      <p:sp>
+        <p:nvSpPr>
+          <p:cNvPr id="2" name="Title 1"/>
           <p:cNvSpPr>
             <a:spLocks noGrp="1"/>
           </p:cNvSpPr>
@@ -166,15 +718,21 @@
         </p:nvSpPr>
         <p:spPr>
           <a:xfrm>
-            <a:off x="1524000" y="1122363"/>
-            <a:ext cx="9144000" cy="2387600"/>
+            <a:off x="1507067" y="2404534"/>
+            <a:ext cx="7766936" cy="1646302"/>
           </a:xfrm>
         </p:spPr>
         <p:txBody>
-          <a:bodyPr anchor="b"/>
+          <a:bodyPr anchor="b">
+            <a:noAutofit/>
+          </a:bodyPr>
           <a:lstStyle>
-            <a:lvl1pPr algn="ctr">
-              <a:defRPr sz="6000"/>
+            <a:lvl1pPr algn="r">
+              <a:defRPr sz="5400">
+                <a:solidFill>
+                  <a:schemeClr val="accent1"/>
+                </a:solidFill>
+              </a:defRPr>
             </a:lvl1pPr>
           </a:lstStyle>
           <a:p>
@@ -182,18 +740,13 @@
               <a:rPr lang="hu-HU"/>
               <a:t>Mintacím szerkesztése</a:t>
             </a:r>
-          </a:p>
-        </p:txBody>
-      </p:sp>
-      <p:sp>
-        <p:nvSpPr>
-          <p:cNvPr id="3" name="Alcím 2">
-            <a:extLst>
-              <a:ext uri="{FF2B5EF4-FFF2-40B4-BE49-F238E27FC236}">
-                <a16:creationId xmlns:a16="http://schemas.microsoft.com/office/drawing/2014/main" id="{44FC8591-0983-EB27-11FE-7DF693F65AC0}"/>
-              </a:ext>
-            </a:extLst>
-          </p:cNvPr>
+            <a:endParaRPr lang="en-US" dirty="0"/>
+          </a:p>
+        </p:txBody>
+      </p:sp>
+      <p:sp>
+        <p:nvSpPr>
+          <p:cNvPr id="3" name="Subtitle 2"/>
           <p:cNvSpPr>
             <a:spLocks noGrp="1"/>
           </p:cNvSpPr>
@@ -203,48 +756,103 @@
         </p:nvSpPr>
         <p:spPr>
           <a:xfrm>
-            <a:off x="1524000" y="3602038"/>
-            <a:ext cx="9144000" cy="1655762"/>
+            <a:off x="1507067" y="4050833"/>
+            <a:ext cx="7766936" cy="1096899"/>
           </a:xfrm>
         </p:spPr>
         <p:txBody>
-          <a:bodyPr/>
+          <a:bodyPr anchor="t"/>
           <a:lstStyle>
-            <a:lvl1pPr marL="0" indent="0" algn="ctr">
-              <a:buNone/>
-              <a:defRPr sz="2400"/>
+            <a:lvl1pPr marL="0" indent="0" algn="r">
+              <a:buNone/>
+              <a:defRPr>
+                <a:solidFill>
+                  <a:schemeClr val="tx1">
+                    <a:lumMod val="50000"/>
+                    <a:lumOff val="50000"/>
+                  </a:schemeClr>
+                </a:solidFill>
+              </a:defRPr>
             </a:lvl1pPr>
             <a:lvl2pPr marL="457200" indent="0" algn="ctr">
               <a:buNone/>
-              <a:defRPr sz="2000"/>
+              <a:defRPr>
+                <a:solidFill>
+                  <a:schemeClr val="tx1">
+                    <a:tint val="75000"/>
+                  </a:schemeClr>
+                </a:solidFill>
+              </a:defRPr>
             </a:lvl2pPr>
             <a:lvl3pPr marL="914400" indent="0" algn="ctr">
               <a:buNone/>
-              <a:defRPr sz="1800"/>
+              <a:defRPr>
+                <a:solidFill>
+                  <a:schemeClr val="tx1">
+                    <a:tint val="75000"/>
+                  </a:schemeClr>
+                </a:solidFill>
+              </a:defRPr>
             </a:lvl3pPr>
             <a:lvl4pPr marL="1371600" indent="0" algn="ctr">
               <a:buNone/>
-              <a:defRPr sz="1600"/>
+              <a:defRPr>
+                <a:solidFill>
+                  <a:schemeClr val="tx1">
+                    <a:tint val="75000"/>
+                  </a:schemeClr>
+                </a:solidFill>
+              </a:defRPr>
             </a:lvl4pPr>
             <a:lvl5pPr marL="1828800" indent="0" algn="ctr">
               <a:buNone/>
-              <a:defRPr sz="1600"/>
+              <a:defRPr>
+                <a:solidFill>
+                  <a:schemeClr val="tx1">
+                    <a:tint val="75000"/>
+                  </a:schemeClr>
+                </a:solidFill>
+              </a:defRPr>
             </a:lvl5pPr>
             <a:lvl6pPr marL="2286000" indent="0" algn="ctr">
               <a:buNone/>
-              <a:defRPr sz="1600"/>
+              <a:defRPr>
+                <a:solidFill>
+                  <a:schemeClr val="tx1">
+                    <a:tint val="75000"/>
+                  </a:schemeClr>
+                </a:solidFill>
+              </a:defRPr>
             </a:lvl6pPr>
             <a:lvl7pPr marL="2743200" indent="0" algn="ctr">
               <a:buNone/>
-              <a:defRPr sz="1600"/>
+              <a:defRPr>
+                <a:solidFill>
+                  <a:schemeClr val="tx1">
+                    <a:tint val="75000"/>
+                  </a:schemeClr>
+                </a:solidFill>
+              </a:defRPr>
             </a:lvl7pPr>
             <a:lvl8pPr marL="3200400" indent="0" algn="ctr">
               <a:buNone/>
-              <a:defRPr sz="1600"/>
+              <a:defRPr>
+                <a:solidFill>
+                  <a:schemeClr val="tx1">
+                    <a:tint val="75000"/>
+                  </a:schemeClr>
+                </a:solidFill>
+              </a:defRPr>
             </a:lvl8pPr>
             <a:lvl9pPr marL="3657600" indent="0" algn="ctr">
               <a:buNone/>
-              <a:defRPr sz="1600"/>
+              <a:defRPr>
+                <a:solidFill>
+                  <a:schemeClr val="tx1">
+                    <a:tint val="75000"/>
+                  </a:schemeClr>
+                </a:solidFill>
+              </a:defRPr>
             </a:lvl9pPr>
           </a:lstStyle>
           <a:p>
@@ -252,18 +860,13 @@
               <a:rPr lang="hu-HU"/>
               <a:t>Kattintson ide az alcím mintájának szerkesztéséhez</a:t>
             </a:r>
-          </a:p>
-        </p:txBody>
-      </p:sp>
-      <p:sp>
-        <p:nvSpPr>
-          <p:cNvPr id="4" name="Dátum helye 3">
-            <a:extLst>
-              <a:ext uri="{FF2B5EF4-FFF2-40B4-BE49-F238E27FC236}">
-                <a16:creationId xmlns:a16="http://schemas.microsoft.com/office/drawing/2014/main" id="{BF9691D6-EDAC-5623-2976-158CF4B54D25}"/>
-              </a:ext>
-            </a:extLst>
-          </p:cNvPr>
+            <a:endParaRPr lang="en-US" dirty="0"/>
+          </a:p>
+        </p:txBody>
+      </p:sp>
+      <p:sp>
+        <p:nvSpPr>
+          <p:cNvPr id="4" name="Date Placeholder 3"/>
           <p:cNvSpPr>
             <a:spLocks noGrp="1"/>
           </p:cNvSpPr>
@@ -278,7 +881,7 @@
           <a:p>
             <a:fld id="{0D24984B-60F3-4F71-B66E-41FD97B97414}" type="datetimeFigureOut">
               <a:rPr lang="hu-HU" smtClean="0"/>
-              <a:t>2026. 02. 22.</a:t>
+              <a:t>2026. 02. 28.</a:t>
             </a:fld>
             <a:endParaRPr lang="hu-HU"/>
           </a:p>
@@ -286,13 +889,7 @@
       </p:sp>
       <p:sp>
         <p:nvSpPr>
-          <p:cNvPr id="5" name="Élőláb helye 4">
-            <a:extLst>
-              <a:ext uri="{FF2B5EF4-FFF2-40B4-BE49-F238E27FC236}">
-                <a16:creationId xmlns:a16="http://schemas.microsoft.com/office/drawing/2014/main" id="{8A21DB23-F5A6-207D-9797-9F73A032624F}"/>
-              </a:ext>
-            </a:extLst>
-          </p:cNvPr>
+          <p:cNvPr id="5" name="Footer Placeholder 4"/>
           <p:cNvSpPr>
             <a:spLocks noGrp="1"/>
           </p:cNvSpPr>
@@ -311,13 +908,7 @@
       </p:sp>
       <p:sp>
         <p:nvSpPr>
-          <p:cNvPr id="6" name="Dia számának helye 5">
-            <a:extLst>
-              <a:ext uri="{FF2B5EF4-FFF2-40B4-BE49-F238E27FC236}">
-                <a16:creationId xmlns:a16="http://schemas.microsoft.com/office/drawing/2014/main" id="{1A46FDE9-7D14-C114-45D9-2E0B2B0AB315}"/>
-              </a:ext>
-            </a:extLst>
-          </p:cNvPr>
+          <p:cNvPr id="6" name="Slide Number Placeholder 5"/>
           <p:cNvSpPr>
             <a:spLocks noGrp="1"/>
           </p:cNvSpPr>
@@ -341,7 +932,7 @@
     </p:spTree>
     <p:extLst>
       <p:ext uri="{BB962C8B-B14F-4D97-AF65-F5344CB8AC3E}">
-        <p14:creationId xmlns:p14="http://schemas.microsoft.com/office/powerpoint/2010/main" val="3172111449"/>
+        <p14:creationId xmlns:p14="http://schemas.microsoft.com/office/powerpoint/2010/main" val="1006226950"/>
       </p:ext>
     </p:extLst>
   </p:cSld>
@@ -352,6 +943,1611 @@
 </file>
 
 <file path=ppt/slideLayouts/slideLayout10.xml><?xml version="1.0" encoding="utf-8"?>
+<p:sldLayout xmlns:a="http://schemas.openxmlformats.org/drawingml/2006/main" xmlns:r="http://schemas.openxmlformats.org/officeDocument/2006/relationships" xmlns:p="http://schemas.openxmlformats.org/presentationml/2006/main" preserve="1">
+  <p:cSld name="Cím és képaláírás">
+    <p:spTree>
+      <p:nvGrpSpPr>
+        <p:cNvPr id="1" name=""/>
+        <p:cNvGrpSpPr/>
+        <p:nvPr/>
+      </p:nvGrpSpPr>
+      <p:grpSpPr>
+        <a:xfrm>
+          <a:off x="0" y="0"/>
+          <a:ext cx="0" cy="0"/>
+          <a:chOff x="0" y="0"/>
+          <a:chExt cx="0" cy="0"/>
+        </a:xfrm>
+      </p:grpSpPr>
+      <p:sp>
+        <p:nvSpPr>
+          <p:cNvPr id="2" name="Title 1"/>
+          <p:cNvSpPr>
+            <a:spLocks noGrp="1"/>
+          </p:cNvSpPr>
+          <p:nvPr>
+            <p:ph type="title"/>
+          </p:nvPr>
+        </p:nvSpPr>
+        <p:spPr>
+          <a:xfrm>
+            <a:off x="677335" y="609600"/>
+            <a:ext cx="8596668" cy="3403600"/>
+          </a:xfrm>
+        </p:spPr>
+        <p:txBody>
+          <a:bodyPr anchor="ctr">
+            <a:normAutofit/>
+          </a:bodyPr>
+          <a:lstStyle>
+            <a:lvl1pPr algn="l">
+              <a:defRPr sz="4400" b="0" cap="none"/>
+            </a:lvl1pPr>
+          </a:lstStyle>
+          <a:p>
+            <a:r>
+              <a:rPr lang="hu-HU"/>
+              <a:t>Mintacím szerkesztése</a:t>
+            </a:r>
+            <a:endParaRPr lang="en-US" dirty="0"/>
+          </a:p>
+        </p:txBody>
+      </p:sp>
+      <p:sp>
+        <p:nvSpPr>
+          <p:cNvPr id="3" name="Text Placeholder 2"/>
+          <p:cNvSpPr>
+            <a:spLocks noGrp="1"/>
+          </p:cNvSpPr>
+          <p:nvPr>
+            <p:ph type="body" idx="1"/>
+          </p:nvPr>
+        </p:nvSpPr>
+        <p:spPr>
+          <a:xfrm>
+            <a:off x="677335" y="4470400"/>
+            <a:ext cx="8596668" cy="1570962"/>
+          </a:xfrm>
+        </p:spPr>
+        <p:txBody>
+          <a:bodyPr anchor="ctr">
+            <a:normAutofit/>
+          </a:bodyPr>
+          <a:lstStyle>
+            <a:lvl1pPr marL="0" indent="0" algn="l">
+              <a:buNone/>
+              <a:defRPr sz="1800">
+                <a:solidFill>
+                  <a:schemeClr val="tx1">
+                    <a:lumMod val="75000"/>
+                    <a:lumOff val="25000"/>
+                  </a:schemeClr>
+                </a:solidFill>
+              </a:defRPr>
+            </a:lvl1pPr>
+            <a:lvl2pPr marL="457200" indent="0">
+              <a:buNone/>
+              <a:defRPr sz="1800">
+                <a:solidFill>
+                  <a:schemeClr val="tx1">
+                    <a:tint val="75000"/>
+                  </a:schemeClr>
+                </a:solidFill>
+              </a:defRPr>
+            </a:lvl2pPr>
+            <a:lvl3pPr marL="914400" indent="0">
+              <a:buNone/>
+              <a:defRPr sz="1600">
+                <a:solidFill>
+                  <a:schemeClr val="tx1">
+                    <a:tint val="75000"/>
+                  </a:schemeClr>
+                </a:solidFill>
+              </a:defRPr>
+            </a:lvl3pPr>
+            <a:lvl4pPr marL="1371600" indent="0">
+              <a:buNone/>
+              <a:defRPr sz="1400">
+                <a:solidFill>
+                  <a:schemeClr val="tx1">
+                    <a:tint val="75000"/>
+                  </a:schemeClr>
+                </a:solidFill>
+              </a:defRPr>
+            </a:lvl4pPr>
+            <a:lvl5pPr marL="1828800" indent="0">
+              <a:buNone/>
+              <a:defRPr sz="1400">
+                <a:solidFill>
+                  <a:schemeClr val="tx1">
+                    <a:tint val="75000"/>
+                  </a:schemeClr>
+                </a:solidFill>
+              </a:defRPr>
+            </a:lvl5pPr>
+            <a:lvl6pPr marL="2286000" indent="0">
+              <a:buNone/>
+              <a:defRPr sz="1400">
+                <a:solidFill>
+                  <a:schemeClr val="tx1">
+                    <a:tint val="75000"/>
+                  </a:schemeClr>
+                </a:solidFill>
+              </a:defRPr>
+            </a:lvl6pPr>
+            <a:lvl7pPr marL="2743200" indent="0">
+              <a:buNone/>
+              <a:defRPr sz="1400">
+                <a:solidFill>
+                  <a:schemeClr val="tx1">
+                    <a:tint val="75000"/>
+                  </a:schemeClr>
+                </a:solidFill>
+              </a:defRPr>
+            </a:lvl7pPr>
+            <a:lvl8pPr marL="3200400" indent="0">
+              <a:buNone/>
+              <a:defRPr sz="1400">
+                <a:solidFill>
+                  <a:schemeClr val="tx1">
+                    <a:tint val="75000"/>
+                  </a:schemeClr>
+                </a:solidFill>
+              </a:defRPr>
+            </a:lvl8pPr>
+            <a:lvl9pPr marL="3657600" indent="0">
+              <a:buNone/>
+              <a:defRPr sz="1400">
+                <a:solidFill>
+                  <a:schemeClr val="tx1">
+                    <a:tint val="75000"/>
+                  </a:schemeClr>
+                </a:solidFill>
+              </a:defRPr>
+            </a:lvl9pPr>
+          </a:lstStyle>
+          <a:p>
+            <a:pPr lvl="0"/>
+            <a:r>
+              <a:rPr lang="hu-HU"/>
+              <a:t>Mintaszöveg szerkesztése</a:t>
+            </a:r>
+          </a:p>
+        </p:txBody>
+      </p:sp>
+      <p:sp>
+        <p:nvSpPr>
+          <p:cNvPr id="4" name="Date Placeholder 3"/>
+          <p:cNvSpPr>
+            <a:spLocks noGrp="1"/>
+          </p:cNvSpPr>
+          <p:nvPr>
+            <p:ph type="dt" sz="half" idx="10"/>
+          </p:nvPr>
+        </p:nvSpPr>
+        <p:spPr/>
+        <p:txBody>
+          <a:bodyPr/>
+          <a:lstStyle/>
+          <a:p>
+            <a:fld id="{0D24984B-60F3-4F71-B66E-41FD97B97414}" type="datetimeFigureOut">
+              <a:rPr lang="hu-HU" smtClean="0"/>
+              <a:t>2026. 02. 28.</a:t>
+            </a:fld>
+            <a:endParaRPr lang="hu-HU"/>
+          </a:p>
+        </p:txBody>
+      </p:sp>
+      <p:sp>
+        <p:nvSpPr>
+          <p:cNvPr id="5" name="Footer Placeholder 4"/>
+          <p:cNvSpPr>
+            <a:spLocks noGrp="1"/>
+          </p:cNvSpPr>
+          <p:nvPr>
+            <p:ph type="ftr" sz="quarter" idx="11"/>
+          </p:nvPr>
+        </p:nvSpPr>
+        <p:spPr/>
+        <p:txBody>
+          <a:bodyPr/>
+          <a:lstStyle/>
+          <a:p>
+            <a:endParaRPr lang="hu-HU"/>
+          </a:p>
+        </p:txBody>
+      </p:sp>
+      <p:sp>
+        <p:nvSpPr>
+          <p:cNvPr id="6" name="Slide Number Placeholder 5"/>
+          <p:cNvSpPr>
+            <a:spLocks noGrp="1"/>
+          </p:cNvSpPr>
+          <p:nvPr>
+            <p:ph type="sldNum" sz="quarter" idx="12"/>
+          </p:nvPr>
+        </p:nvSpPr>
+        <p:spPr/>
+        <p:txBody>
+          <a:bodyPr/>
+          <a:lstStyle/>
+          <a:p>
+            <a:fld id="{BEDEDCEB-C399-44F9-8B55-6D9F00D7720B}" type="slidenum">
+              <a:rPr lang="hu-HU" smtClean="0"/>
+              <a:t>‹#›</a:t>
+            </a:fld>
+            <a:endParaRPr lang="hu-HU"/>
+          </a:p>
+        </p:txBody>
+      </p:sp>
+    </p:spTree>
+    <p:extLst>
+      <p:ext uri="{BB962C8B-B14F-4D97-AF65-F5344CB8AC3E}">
+        <p14:creationId xmlns:p14="http://schemas.microsoft.com/office/powerpoint/2010/main" val="3064161606"/>
+      </p:ext>
+    </p:extLst>
+  </p:cSld>
+  <p:clrMapOvr>
+    <a:masterClrMapping/>
+  </p:clrMapOvr>
+</p:sldLayout>
+</file>
+
+<file path=ppt/slideLayouts/slideLayout11.xml><?xml version="1.0" encoding="utf-8"?>
+<p:sldLayout xmlns:a="http://schemas.openxmlformats.org/drawingml/2006/main" xmlns:r="http://schemas.openxmlformats.org/officeDocument/2006/relationships" xmlns:p="http://schemas.openxmlformats.org/presentationml/2006/main" preserve="1">
+  <p:cSld name="Idézet képaláírással">
+    <p:spTree>
+      <p:nvGrpSpPr>
+        <p:cNvPr id="1" name=""/>
+        <p:cNvGrpSpPr/>
+        <p:nvPr/>
+      </p:nvGrpSpPr>
+      <p:grpSpPr>
+        <a:xfrm>
+          <a:off x="0" y="0"/>
+          <a:ext cx="0" cy="0"/>
+          <a:chOff x="0" y="0"/>
+          <a:chExt cx="0" cy="0"/>
+        </a:xfrm>
+      </p:grpSpPr>
+      <p:sp>
+        <p:nvSpPr>
+          <p:cNvPr id="2" name="Title 1"/>
+          <p:cNvSpPr>
+            <a:spLocks noGrp="1"/>
+          </p:cNvSpPr>
+          <p:nvPr>
+            <p:ph type="title"/>
+          </p:nvPr>
+        </p:nvSpPr>
+        <p:spPr>
+          <a:xfrm>
+            <a:off x="931334" y="609600"/>
+            <a:ext cx="8094134" cy="3022600"/>
+          </a:xfrm>
+        </p:spPr>
+        <p:txBody>
+          <a:bodyPr anchor="ctr">
+            <a:normAutofit/>
+          </a:bodyPr>
+          <a:lstStyle>
+            <a:lvl1pPr algn="l">
+              <a:defRPr sz="4400" b="0" cap="none"/>
+            </a:lvl1pPr>
+          </a:lstStyle>
+          <a:p>
+            <a:r>
+              <a:rPr lang="hu-HU"/>
+              <a:t>Mintacím szerkesztése</a:t>
+            </a:r>
+            <a:endParaRPr lang="en-US" dirty="0"/>
+          </a:p>
+        </p:txBody>
+      </p:sp>
+      <p:sp>
+        <p:nvSpPr>
+          <p:cNvPr id="23" name="Text Placeholder 9"/>
+          <p:cNvSpPr>
+            <a:spLocks noGrp="1"/>
+          </p:cNvSpPr>
+          <p:nvPr>
+            <p:ph type="body" sz="quarter" idx="13"/>
+          </p:nvPr>
+        </p:nvSpPr>
+        <p:spPr>
+          <a:xfrm>
+            <a:off x="1366139" y="3632200"/>
+            <a:ext cx="7224524" cy="381000"/>
+          </a:xfrm>
+        </p:spPr>
+        <p:txBody>
+          <a:bodyPr anchor="ctr">
+            <a:noAutofit/>
+          </a:bodyPr>
+          <a:lstStyle>
+            <a:lvl1pPr marL="0" indent="0">
+              <a:buFontTx/>
+              <a:buNone/>
+              <a:defRPr sz="1600">
+                <a:solidFill>
+                  <a:schemeClr val="tx1">
+                    <a:lumMod val="50000"/>
+                    <a:lumOff val="50000"/>
+                  </a:schemeClr>
+                </a:solidFill>
+              </a:defRPr>
+            </a:lvl1pPr>
+            <a:lvl2pPr marL="457200" indent="0">
+              <a:buFontTx/>
+              <a:buNone/>
+              <a:defRPr/>
+            </a:lvl2pPr>
+            <a:lvl3pPr marL="914400" indent="0">
+              <a:buFontTx/>
+              <a:buNone/>
+              <a:defRPr/>
+            </a:lvl3pPr>
+            <a:lvl4pPr marL="1371600" indent="0">
+              <a:buFontTx/>
+              <a:buNone/>
+              <a:defRPr/>
+            </a:lvl4pPr>
+            <a:lvl5pPr marL="1828800" indent="0">
+              <a:buFontTx/>
+              <a:buNone/>
+              <a:defRPr/>
+            </a:lvl5pPr>
+          </a:lstStyle>
+          <a:p>
+            <a:pPr lvl="0"/>
+            <a:r>
+              <a:rPr lang="hu-HU"/>
+              <a:t>Mintaszöveg szerkesztése</a:t>
+            </a:r>
+          </a:p>
+        </p:txBody>
+      </p:sp>
+      <p:sp>
+        <p:nvSpPr>
+          <p:cNvPr id="3" name="Text Placeholder 2"/>
+          <p:cNvSpPr>
+            <a:spLocks noGrp="1"/>
+          </p:cNvSpPr>
+          <p:nvPr>
+            <p:ph type="body" idx="1"/>
+          </p:nvPr>
+        </p:nvSpPr>
+        <p:spPr>
+          <a:xfrm>
+            <a:off x="677335" y="4470400"/>
+            <a:ext cx="8596668" cy="1570962"/>
+          </a:xfrm>
+        </p:spPr>
+        <p:txBody>
+          <a:bodyPr anchor="ctr">
+            <a:normAutofit/>
+          </a:bodyPr>
+          <a:lstStyle>
+            <a:lvl1pPr marL="0" indent="0" algn="l">
+              <a:buNone/>
+              <a:defRPr sz="1800">
+                <a:solidFill>
+                  <a:schemeClr val="tx1">
+                    <a:lumMod val="75000"/>
+                    <a:lumOff val="25000"/>
+                  </a:schemeClr>
+                </a:solidFill>
+              </a:defRPr>
+            </a:lvl1pPr>
+            <a:lvl2pPr marL="457200" indent="0">
+              <a:buNone/>
+              <a:defRPr sz="1800">
+                <a:solidFill>
+                  <a:schemeClr val="tx1">
+                    <a:tint val="75000"/>
+                  </a:schemeClr>
+                </a:solidFill>
+              </a:defRPr>
+            </a:lvl2pPr>
+            <a:lvl3pPr marL="914400" indent="0">
+              <a:buNone/>
+              <a:defRPr sz="1600">
+                <a:solidFill>
+                  <a:schemeClr val="tx1">
+                    <a:tint val="75000"/>
+                  </a:schemeClr>
+                </a:solidFill>
+              </a:defRPr>
+            </a:lvl3pPr>
+            <a:lvl4pPr marL="1371600" indent="0">
+              <a:buNone/>
+              <a:defRPr sz="1400">
+                <a:solidFill>
+                  <a:schemeClr val="tx1">
+                    <a:tint val="75000"/>
+                  </a:schemeClr>
+                </a:solidFill>
+              </a:defRPr>
+            </a:lvl4pPr>
+            <a:lvl5pPr marL="1828800" indent="0">
+              <a:buNone/>
+              <a:defRPr sz="1400">
+                <a:solidFill>
+                  <a:schemeClr val="tx1">
+                    <a:tint val="75000"/>
+                  </a:schemeClr>
+                </a:solidFill>
+              </a:defRPr>
+            </a:lvl5pPr>
+            <a:lvl6pPr marL="2286000" indent="0">
+              <a:buNone/>
+              <a:defRPr sz="1400">
+                <a:solidFill>
+                  <a:schemeClr val="tx1">
+                    <a:tint val="75000"/>
+                  </a:schemeClr>
+                </a:solidFill>
+              </a:defRPr>
+            </a:lvl6pPr>
+            <a:lvl7pPr marL="2743200" indent="0">
+              <a:buNone/>
+              <a:defRPr sz="1400">
+                <a:solidFill>
+                  <a:schemeClr val="tx1">
+                    <a:tint val="75000"/>
+                  </a:schemeClr>
+                </a:solidFill>
+              </a:defRPr>
+            </a:lvl7pPr>
+            <a:lvl8pPr marL="3200400" indent="0">
+              <a:buNone/>
+              <a:defRPr sz="1400">
+                <a:solidFill>
+                  <a:schemeClr val="tx1">
+                    <a:tint val="75000"/>
+                  </a:schemeClr>
+                </a:solidFill>
+              </a:defRPr>
+            </a:lvl8pPr>
+            <a:lvl9pPr marL="3657600" indent="0">
+              <a:buNone/>
+              <a:defRPr sz="1400">
+                <a:solidFill>
+                  <a:schemeClr val="tx1">
+                    <a:tint val="75000"/>
+                  </a:schemeClr>
+                </a:solidFill>
+              </a:defRPr>
+            </a:lvl9pPr>
+          </a:lstStyle>
+          <a:p>
+            <a:pPr lvl="0"/>
+            <a:r>
+              <a:rPr lang="hu-HU"/>
+              <a:t>Mintaszöveg szerkesztése</a:t>
+            </a:r>
+          </a:p>
+        </p:txBody>
+      </p:sp>
+      <p:sp>
+        <p:nvSpPr>
+          <p:cNvPr id="4" name="Date Placeholder 3"/>
+          <p:cNvSpPr>
+            <a:spLocks noGrp="1"/>
+          </p:cNvSpPr>
+          <p:nvPr>
+            <p:ph type="dt" sz="half" idx="10"/>
+          </p:nvPr>
+        </p:nvSpPr>
+        <p:spPr/>
+        <p:txBody>
+          <a:bodyPr/>
+          <a:lstStyle/>
+          <a:p>
+            <a:fld id="{0D24984B-60F3-4F71-B66E-41FD97B97414}" type="datetimeFigureOut">
+              <a:rPr lang="hu-HU" smtClean="0"/>
+              <a:t>2026. 02. 28.</a:t>
+            </a:fld>
+            <a:endParaRPr lang="hu-HU"/>
+          </a:p>
+        </p:txBody>
+      </p:sp>
+      <p:sp>
+        <p:nvSpPr>
+          <p:cNvPr id="5" name="Footer Placeholder 4"/>
+          <p:cNvSpPr>
+            <a:spLocks noGrp="1"/>
+          </p:cNvSpPr>
+          <p:nvPr>
+            <p:ph type="ftr" sz="quarter" idx="11"/>
+          </p:nvPr>
+        </p:nvSpPr>
+        <p:spPr/>
+        <p:txBody>
+          <a:bodyPr/>
+          <a:lstStyle/>
+          <a:p>
+            <a:endParaRPr lang="hu-HU"/>
+          </a:p>
+        </p:txBody>
+      </p:sp>
+      <p:sp>
+        <p:nvSpPr>
+          <p:cNvPr id="6" name="Slide Number Placeholder 5"/>
+          <p:cNvSpPr>
+            <a:spLocks noGrp="1"/>
+          </p:cNvSpPr>
+          <p:nvPr>
+            <p:ph type="sldNum" sz="quarter" idx="12"/>
+          </p:nvPr>
+        </p:nvSpPr>
+        <p:spPr/>
+        <p:txBody>
+          <a:bodyPr/>
+          <a:lstStyle/>
+          <a:p>
+            <a:fld id="{BEDEDCEB-C399-44F9-8B55-6D9F00D7720B}" type="slidenum">
+              <a:rPr lang="hu-HU" smtClean="0"/>
+              <a:t>‹#›</a:t>
+            </a:fld>
+            <a:endParaRPr lang="hu-HU"/>
+          </a:p>
+        </p:txBody>
+      </p:sp>
+      <p:sp>
+        <p:nvSpPr>
+          <p:cNvPr id="24" name="TextBox 23"/>
+          <p:cNvSpPr txBox="1"/>
+          <p:nvPr/>
+        </p:nvSpPr>
+        <p:spPr>
+          <a:xfrm>
+            <a:off x="541870" y="790378"/>
+            <a:ext cx="609600" cy="584776"/>
+          </a:xfrm>
+          <a:prstGeom prst="rect">
+            <a:avLst/>
+          </a:prstGeom>
+        </p:spPr>
+        <p:txBody>
+          <a:bodyPr vert="horz" lIns="91440" tIns="45720" rIns="91440" bIns="45720" rtlCol="0" anchor="ctr">
+            <a:noAutofit/>
+          </a:bodyPr>
+          <a:lstStyle/>
+          <a:p>
+            <a:pPr lvl="0"/>
+            <a:r>
+              <a:rPr lang="en-US" sz="8000" baseline="0" dirty="0">
+                <a:ln w="3175" cmpd="sng">
+                  <a:noFill/>
+                </a:ln>
+                <a:solidFill>
+                  <a:schemeClr val="accent1">
+                    <a:lumMod val="60000"/>
+                    <a:lumOff val="40000"/>
+                  </a:schemeClr>
+                </a:solidFill>
+                <a:effectLst/>
+                <a:latin typeface="Arial"/>
+              </a:rPr>
+              <a:t>“</a:t>
+            </a:r>
+          </a:p>
+        </p:txBody>
+      </p:sp>
+      <p:sp>
+        <p:nvSpPr>
+          <p:cNvPr id="25" name="TextBox 24"/>
+          <p:cNvSpPr txBox="1"/>
+          <p:nvPr/>
+        </p:nvSpPr>
+        <p:spPr>
+          <a:xfrm>
+            <a:off x="8893011" y="2886556"/>
+            <a:ext cx="609600" cy="584776"/>
+          </a:xfrm>
+          <a:prstGeom prst="rect">
+            <a:avLst/>
+          </a:prstGeom>
+        </p:spPr>
+        <p:txBody>
+          <a:bodyPr vert="horz" lIns="91440" tIns="45720" rIns="91440" bIns="45720" rtlCol="0" anchor="ctr">
+            <a:noAutofit/>
+          </a:bodyPr>
+          <a:lstStyle/>
+          <a:p>
+            <a:pPr lvl="0"/>
+            <a:r>
+              <a:rPr lang="en-US" sz="8000" baseline="0" dirty="0">
+                <a:ln w="3175" cmpd="sng">
+                  <a:noFill/>
+                </a:ln>
+                <a:solidFill>
+                  <a:schemeClr val="accent1">
+                    <a:lumMod val="60000"/>
+                    <a:lumOff val="40000"/>
+                  </a:schemeClr>
+                </a:solidFill>
+                <a:effectLst/>
+                <a:latin typeface="Arial"/>
+              </a:rPr>
+              <a:t>”</a:t>
+            </a:r>
+          </a:p>
+        </p:txBody>
+      </p:sp>
+    </p:spTree>
+    <p:extLst>
+      <p:ext uri="{BB962C8B-B14F-4D97-AF65-F5344CB8AC3E}">
+        <p14:creationId xmlns:p14="http://schemas.microsoft.com/office/powerpoint/2010/main" val="3957391230"/>
+      </p:ext>
+    </p:extLst>
+  </p:cSld>
+  <p:clrMapOvr>
+    <a:masterClrMapping/>
+  </p:clrMapOvr>
+</p:sldLayout>
+</file>
+
+<file path=ppt/slideLayouts/slideLayout12.xml><?xml version="1.0" encoding="utf-8"?>
+<p:sldLayout xmlns:a="http://schemas.openxmlformats.org/drawingml/2006/main" xmlns:r="http://schemas.openxmlformats.org/officeDocument/2006/relationships" xmlns:p="http://schemas.openxmlformats.org/presentationml/2006/main" preserve="1">
+  <p:cSld name="Névkártya">
+    <p:spTree>
+      <p:nvGrpSpPr>
+        <p:cNvPr id="1" name=""/>
+        <p:cNvGrpSpPr/>
+        <p:nvPr/>
+      </p:nvGrpSpPr>
+      <p:grpSpPr>
+        <a:xfrm>
+          <a:off x="0" y="0"/>
+          <a:ext cx="0" cy="0"/>
+          <a:chOff x="0" y="0"/>
+          <a:chExt cx="0" cy="0"/>
+        </a:xfrm>
+      </p:grpSpPr>
+      <p:sp>
+        <p:nvSpPr>
+          <p:cNvPr id="2" name="Title 1"/>
+          <p:cNvSpPr>
+            <a:spLocks noGrp="1"/>
+          </p:cNvSpPr>
+          <p:nvPr>
+            <p:ph type="title"/>
+          </p:nvPr>
+        </p:nvSpPr>
+        <p:spPr>
+          <a:xfrm>
+            <a:off x="677335" y="1931988"/>
+            <a:ext cx="8596668" cy="2595460"/>
+          </a:xfrm>
+        </p:spPr>
+        <p:txBody>
+          <a:bodyPr anchor="b">
+            <a:normAutofit/>
+          </a:bodyPr>
+          <a:lstStyle>
+            <a:lvl1pPr algn="l">
+              <a:defRPr sz="4400" b="0" cap="none"/>
+            </a:lvl1pPr>
+          </a:lstStyle>
+          <a:p>
+            <a:r>
+              <a:rPr lang="hu-HU"/>
+              <a:t>Mintacím szerkesztése</a:t>
+            </a:r>
+            <a:endParaRPr lang="en-US" dirty="0"/>
+          </a:p>
+        </p:txBody>
+      </p:sp>
+      <p:sp>
+        <p:nvSpPr>
+          <p:cNvPr id="3" name="Text Placeholder 2"/>
+          <p:cNvSpPr>
+            <a:spLocks noGrp="1"/>
+          </p:cNvSpPr>
+          <p:nvPr>
+            <p:ph type="body" idx="1"/>
+          </p:nvPr>
+        </p:nvSpPr>
+        <p:spPr>
+          <a:xfrm>
+            <a:off x="677335" y="4527448"/>
+            <a:ext cx="8596668" cy="1513914"/>
+          </a:xfrm>
+        </p:spPr>
+        <p:txBody>
+          <a:bodyPr anchor="t">
+            <a:normAutofit/>
+          </a:bodyPr>
+          <a:lstStyle>
+            <a:lvl1pPr marL="0" indent="0" algn="l">
+              <a:buNone/>
+              <a:defRPr sz="1800">
+                <a:solidFill>
+                  <a:schemeClr val="tx1">
+                    <a:lumMod val="75000"/>
+                    <a:lumOff val="25000"/>
+                  </a:schemeClr>
+                </a:solidFill>
+              </a:defRPr>
+            </a:lvl1pPr>
+            <a:lvl2pPr marL="457200" indent="0">
+              <a:buNone/>
+              <a:defRPr sz="1800">
+                <a:solidFill>
+                  <a:schemeClr val="tx1">
+                    <a:tint val="75000"/>
+                  </a:schemeClr>
+                </a:solidFill>
+              </a:defRPr>
+            </a:lvl2pPr>
+            <a:lvl3pPr marL="914400" indent="0">
+              <a:buNone/>
+              <a:defRPr sz="1600">
+                <a:solidFill>
+                  <a:schemeClr val="tx1">
+                    <a:tint val="75000"/>
+                  </a:schemeClr>
+                </a:solidFill>
+              </a:defRPr>
+            </a:lvl3pPr>
+            <a:lvl4pPr marL="1371600" indent="0">
+              <a:buNone/>
+              <a:defRPr sz="1400">
+                <a:solidFill>
+                  <a:schemeClr val="tx1">
+                    <a:tint val="75000"/>
+                  </a:schemeClr>
+                </a:solidFill>
+              </a:defRPr>
+            </a:lvl4pPr>
+            <a:lvl5pPr marL="1828800" indent="0">
+              <a:buNone/>
+              <a:defRPr sz="1400">
+                <a:solidFill>
+                  <a:schemeClr val="tx1">
+                    <a:tint val="75000"/>
+                  </a:schemeClr>
+                </a:solidFill>
+              </a:defRPr>
+            </a:lvl5pPr>
+            <a:lvl6pPr marL="2286000" indent="0">
+              <a:buNone/>
+              <a:defRPr sz="1400">
+                <a:solidFill>
+                  <a:schemeClr val="tx1">
+                    <a:tint val="75000"/>
+                  </a:schemeClr>
+                </a:solidFill>
+              </a:defRPr>
+            </a:lvl6pPr>
+            <a:lvl7pPr marL="2743200" indent="0">
+              <a:buNone/>
+              <a:defRPr sz="1400">
+                <a:solidFill>
+                  <a:schemeClr val="tx1">
+                    <a:tint val="75000"/>
+                  </a:schemeClr>
+                </a:solidFill>
+              </a:defRPr>
+            </a:lvl7pPr>
+            <a:lvl8pPr marL="3200400" indent="0">
+              <a:buNone/>
+              <a:defRPr sz="1400">
+                <a:solidFill>
+                  <a:schemeClr val="tx1">
+                    <a:tint val="75000"/>
+                  </a:schemeClr>
+                </a:solidFill>
+              </a:defRPr>
+            </a:lvl8pPr>
+            <a:lvl9pPr marL="3657600" indent="0">
+              <a:buNone/>
+              <a:defRPr sz="1400">
+                <a:solidFill>
+                  <a:schemeClr val="tx1">
+                    <a:tint val="75000"/>
+                  </a:schemeClr>
+                </a:solidFill>
+              </a:defRPr>
+            </a:lvl9pPr>
+          </a:lstStyle>
+          <a:p>
+            <a:pPr lvl="0"/>
+            <a:r>
+              <a:rPr lang="hu-HU"/>
+              <a:t>Mintaszöveg szerkesztése</a:t>
+            </a:r>
+          </a:p>
+        </p:txBody>
+      </p:sp>
+      <p:sp>
+        <p:nvSpPr>
+          <p:cNvPr id="4" name="Date Placeholder 3"/>
+          <p:cNvSpPr>
+            <a:spLocks noGrp="1"/>
+          </p:cNvSpPr>
+          <p:nvPr>
+            <p:ph type="dt" sz="half" idx="10"/>
+          </p:nvPr>
+        </p:nvSpPr>
+        <p:spPr/>
+        <p:txBody>
+          <a:bodyPr/>
+          <a:lstStyle/>
+          <a:p>
+            <a:fld id="{0D24984B-60F3-4F71-B66E-41FD97B97414}" type="datetimeFigureOut">
+              <a:rPr lang="hu-HU" smtClean="0"/>
+              <a:t>2026. 02. 28.</a:t>
+            </a:fld>
+            <a:endParaRPr lang="hu-HU"/>
+          </a:p>
+        </p:txBody>
+      </p:sp>
+      <p:sp>
+        <p:nvSpPr>
+          <p:cNvPr id="5" name="Footer Placeholder 4"/>
+          <p:cNvSpPr>
+            <a:spLocks noGrp="1"/>
+          </p:cNvSpPr>
+          <p:nvPr>
+            <p:ph type="ftr" sz="quarter" idx="11"/>
+          </p:nvPr>
+        </p:nvSpPr>
+        <p:spPr/>
+        <p:txBody>
+          <a:bodyPr/>
+          <a:lstStyle/>
+          <a:p>
+            <a:endParaRPr lang="hu-HU"/>
+          </a:p>
+        </p:txBody>
+      </p:sp>
+      <p:sp>
+        <p:nvSpPr>
+          <p:cNvPr id="6" name="Slide Number Placeholder 5"/>
+          <p:cNvSpPr>
+            <a:spLocks noGrp="1"/>
+          </p:cNvSpPr>
+          <p:nvPr>
+            <p:ph type="sldNum" sz="quarter" idx="12"/>
+          </p:nvPr>
+        </p:nvSpPr>
+        <p:spPr/>
+        <p:txBody>
+          <a:bodyPr/>
+          <a:lstStyle/>
+          <a:p>
+            <a:fld id="{BEDEDCEB-C399-44F9-8B55-6D9F00D7720B}" type="slidenum">
+              <a:rPr lang="hu-HU" smtClean="0"/>
+              <a:t>‹#›</a:t>
+            </a:fld>
+            <a:endParaRPr lang="hu-HU"/>
+          </a:p>
+        </p:txBody>
+      </p:sp>
+    </p:spTree>
+    <p:extLst>
+      <p:ext uri="{BB962C8B-B14F-4D97-AF65-F5344CB8AC3E}">
+        <p14:creationId xmlns:p14="http://schemas.microsoft.com/office/powerpoint/2010/main" val="190689330"/>
+      </p:ext>
+    </p:extLst>
+  </p:cSld>
+  <p:clrMapOvr>
+    <a:masterClrMapping/>
+  </p:clrMapOvr>
+</p:sldLayout>
+</file>
+
+<file path=ppt/slideLayouts/slideLayout13.xml><?xml version="1.0" encoding="utf-8"?>
+<p:sldLayout xmlns:a="http://schemas.openxmlformats.org/drawingml/2006/main" xmlns:r="http://schemas.openxmlformats.org/officeDocument/2006/relationships" xmlns:p="http://schemas.openxmlformats.org/presentationml/2006/main" preserve="1">
+  <p:cSld name="Névkártya idézettel">
+    <p:spTree>
+      <p:nvGrpSpPr>
+        <p:cNvPr id="1" name=""/>
+        <p:cNvGrpSpPr/>
+        <p:nvPr/>
+      </p:nvGrpSpPr>
+      <p:grpSpPr>
+        <a:xfrm>
+          <a:off x="0" y="0"/>
+          <a:ext cx="0" cy="0"/>
+          <a:chOff x="0" y="0"/>
+          <a:chExt cx="0" cy="0"/>
+        </a:xfrm>
+      </p:grpSpPr>
+      <p:sp>
+        <p:nvSpPr>
+          <p:cNvPr id="2" name="Title 1"/>
+          <p:cNvSpPr>
+            <a:spLocks noGrp="1"/>
+          </p:cNvSpPr>
+          <p:nvPr>
+            <p:ph type="title"/>
+          </p:nvPr>
+        </p:nvSpPr>
+        <p:spPr>
+          <a:xfrm>
+            <a:off x="931334" y="609600"/>
+            <a:ext cx="8094134" cy="3022600"/>
+          </a:xfrm>
+        </p:spPr>
+        <p:txBody>
+          <a:bodyPr anchor="ctr">
+            <a:normAutofit/>
+          </a:bodyPr>
+          <a:lstStyle>
+            <a:lvl1pPr algn="l">
+              <a:defRPr sz="4400" b="0" cap="none"/>
+            </a:lvl1pPr>
+          </a:lstStyle>
+          <a:p>
+            <a:r>
+              <a:rPr lang="hu-HU"/>
+              <a:t>Mintacím szerkesztése</a:t>
+            </a:r>
+            <a:endParaRPr lang="en-US" dirty="0"/>
+          </a:p>
+        </p:txBody>
+      </p:sp>
+      <p:sp>
+        <p:nvSpPr>
+          <p:cNvPr id="23" name="Text Placeholder 9"/>
+          <p:cNvSpPr>
+            <a:spLocks noGrp="1"/>
+          </p:cNvSpPr>
+          <p:nvPr>
+            <p:ph type="body" sz="quarter" idx="13"/>
+          </p:nvPr>
+        </p:nvSpPr>
+        <p:spPr>
+          <a:xfrm>
+            <a:off x="677332" y="4013200"/>
+            <a:ext cx="8596669" cy="514248"/>
+          </a:xfrm>
+        </p:spPr>
+        <p:txBody>
+          <a:bodyPr anchor="b">
+            <a:noAutofit/>
+          </a:bodyPr>
+          <a:lstStyle>
+            <a:lvl1pPr marL="0" indent="0">
+              <a:buFontTx/>
+              <a:buNone/>
+              <a:defRPr sz="2400">
+                <a:solidFill>
+                  <a:schemeClr val="tx1">
+                    <a:lumMod val="75000"/>
+                    <a:lumOff val="25000"/>
+                  </a:schemeClr>
+                </a:solidFill>
+              </a:defRPr>
+            </a:lvl1pPr>
+            <a:lvl2pPr marL="457200" indent="0">
+              <a:buFontTx/>
+              <a:buNone/>
+              <a:defRPr/>
+            </a:lvl2pPr>
+            <a:lvl3pPr marL="914400" indent="0">
+              <a:buFontTx/>
+              <a:buNone/>
+              <a:defRPr/>
+            </a:lvl3pPr>
+            <a:lvl4pPr marL="1371600" indent="0">
+              <a:buFontTx/>
+              <a:buNone/>
+              <a:defRPr/>
+            </a:lvl4pPr>
+            <a:lvl5pPr marL="1828800" indent="0">
+              <a:buFontTx/>
+              <a:buNone/>
+              <a:defRPr/>
+            </a:lvl5pPr>
+          </a:lstStyle>
+          <a:p>
+            <a:pPr lvl="0"/>
+            <a:r>
+              <a:rPr lang="hu-HU"/>
+              <a:t>Mintaszöveg szerkesztése</a:t>
+            </a:r>
+          </a:p>
+        </p:txBody>
+      </p:sp>
+      <p:sp>
+        <p:nvSpPr>
+          <p:cNvPr id="3" name="Text Placeholder 2"/>
+          <p:cNvSpPr>
+            <a:spLocks noGrp="1"/>
+          </p:cNvSpPr>
+          <p:nvPr>
+            <p:ph type="body" idx="1"/>
+          </p:nvPr>
+        </p:nvSpPr>
+        <p:spPr>
+          <a:xfrm>
+            <a:off x="677335" y="4527448"/>
+            <a:ext cx="8596668" cy="1513914"/>
+          </a:xfrm>
+        </p:spPr>
+        <p:txBody>
+          <a:bodyPr anchor="t">
+            <a:normAutofit/>
+          </a:bodyPr>
+          <a:lstStyle>
+            <a:lvl1pPr marL="0" indent="0" algn="l">
+              <a:buNone/>
+              <a:defRPr sz="1800">
+                <a:solidFill>
+                  <a:schemeClr val="tx1">
+                    <a:lumMod val="50000"/>
+                    <a:lumOff val="50000"/>
+                  </a:schemeClr>
+                </a:solidFill>
+              </a:defRPr>
+            </a:lvl1pPr>
+            <a:lvl2pPr marL="457200" indent="0">
+              <a:buNone/>
+              <a:defRPr sz="1800">
+                <a:solidFill>
+                  <a:schemeClr val="tx1">
+                    <a:tint val="75000"/>
+                  </a:schemeClr>
+                </a:solidFill>
+              </a:defRPr>
+            </a:lvl2pPr>
+            <a:lvl3pPr marL="914400" indent="0">
+              <a:buNone/>
+              <a:defRPr sz="1600">
+                <a:solidFill>
+                  <a:schemeClr val="tx1">
+                    <a:tint val="75000"/>
+                  </a:schemeClr>
+                </a:solidFill>
+              </a:defRPr>
+            </a:lvl3pPr>
+            <a:lvl4pPr marL="1371600" indent="0">
+              <a:buNone/>
+              <a:defRPr sz="1400">
+                <a:solidFill>
+                  <a:schemeClr val="tx1">
+                    <a:tint val="75000"/>
+                  </a:schemeClr>
+                </a:solidFill>
+              </a:defRPr>
+            </a:lvl4pPr>
+            <a:lvl5pPr marL="1828800" indent="0">
+              <a:buNone/>
+              <a:defRPr sz="1400">
+                <a:solidFill>
+                  <a:schemeClr val="tx1">
+                    <a:tint val="75000"/>
+                  </a:schemeClr>
+                </a:solidFill>
+              </a:defRPr>
+            </a:lvl5pPr>
+            <a:lvl6pPr marL="2286000" indent="0">
+              <a:buNone/>
+              <a:defRPr sz="1400">
+                <a:solidFill>
+                  <a:schemeClr val="tx1">
+                    <a:tint val="75000"/>
+                  </a:schemeClr>
+                </a:solidFill>
+              </a:defRPr>
+            </a:lvl6pPr>
+            <a:lvl7pPr marL="2743200" indent="0">
+              <a:buNone/>
+              <a:defRPr sz="1400">
+                <a:solidFill>
+                  <a:schemeClr val="tx1">
+                    <a:tint val="75000"/>
+                  </a:schemeClr>
+                </a:solidFill>
+              </a:defRPr>
+            </a:lvl7pPr>
+            <a:lvl8pPr marL="3200400" indent="0">
+              <a:buNone/>
+              <a:defRPr sz="1400">
+                <a:solidFill>
+                  <a:schemeClr val="tx1">
+                    <a:tint val="75000"/>
+                  </a:schemeClr>
+                </a:solidFill>
+              </a:defRPr>
+            </a:lvl8pPr>
+            <a:lvl9pPr marL="3657600" indent="0">
+              <a:buNone/>
+              <a:defRPr sz="1400">
+                <a:solidFill>
+                  <a:schemeClr val="tx1">
+                    <a:tint val="75000"/>
+                  </a:schemeClr>
+                </a:solidFill>
+              </a:defRPr>
+            </a:lvl9pPr>
+          </a:lstStyle>
+          <a:p>
+            <a:pPr lvl="0"/>
+            <a:r>
+              <a:rPr lang="hu-HU"/>
+              <a:t>Mintaszöveg szerkesztése</a:t>
+            </a:r>
+          </a:p>
+        </p:txBody>
+      </p:sp>
+      <p:sp>
+        <p:nvSpPr>
+          <p:cNvPr id="4" name="Date Placeholder 3"/>
+          <p:cNvSpPr>
+            <a:spLocks noGrp="1"/>
+          </p:cNvSpPr>
+          <p:nvPr>
+            <p:ph type="dt" sz="half" idx="10"/>
+          </p:nvPr>
+        </p:nvSpPr>
+        <p:spPr/>
+        <p:txBody>
+          <a:bodyPr/>
+          <a:lstStyle/>
+          <a:p>
+            <a:fld id="{0D24984B-60F3-4F71-B66E-41FD97B97414}" type="datetimeFigureOut">
+              <a:rPr lang="hu-HU" smtClean="0"/>
+              <a:t>2026. 02. 28.</a:t>
+            </a:fld>
+            <a:endParaRPr lang="hu-HU"/>
+          </a:p>
+        </p:txBody>
+      </p:sp>
+      <p:sp>
+        <p:nvSpPr>
+          <p:cNvPr id="5" name="Footer Placeholder 4"/>
+          <p:cNvSpPr>
+            <a:spLocks noGrp="1"/>
+          </p:cNvSpPr>
+          <p:nvPr>
+            <p:ph type="ftr" sz="quarter" idx="11"/>
+          </p:nvPr>
+        </p:nvSpPr>
+        <p:spPr/>
+        <p:txBody>
+          <a:bodyPr/>
+          <a:lstStyle/>
+          <a:p>
+            <a:endParaRPr lang="hu-HU"/>
+          </a:p>
+        </p:txBody>
+      </p:sp>
+      <p:sp>
+        <p:nvSpPr>
+          <p:cNvPr id="6" name="Slide Number Placeholder 5"/>
+          <p:cNvSpPr>
+            <a:spLocks noGrp="1"/>
+          </p:cNvSpPr>
+          <p:nvPr>
+            <p:ph type="sldNum" sz="quarter" idx="12"/>
+          </p:nvPr>
+        </p:nvSpPr>
+        <p:spPr/>
+        <p:txBody>
+          <a:bodyPr/>
+          <a:lstStyle/>
+          <a:p>
+            <a:fld id="{BEDEDCEB-C399-44F9-8B55-6D9F00D7720B}" type="slidenum">
+              <a:rPr lang="hu-HU" smtClean="0"/>
+              <a:t>‹#›</a:t>
+            </a:fld>
+            <a:endParaRPr lang="hu-HU"/>
+          </a:p>
+        </p:txBody>
+      </p:sp>
+      <p:sp>
+        <p:nvSpPr>
+          <p:cNvPr id="24" name="TextBox 23"/>
+          <p:cNvSpPr txBox="1"/>
+          <p:nvPr/>
+        </p:nvSpPr>
+        <p:spPr>
+          <a:xfrm>
+            <a:off x="541870" y="790378"/>
+            <a:ext cx="609600" cy="584776"/>
+          </a:xfrm>
+          <a:prstGeom prst="rect">
+            <a:avLst/>
+          </a:prstGeom>
+        </p:spPr>
+        <p:txBody>
+          <a:bodyPr vert="horz" lIns="91440" tIns="45720" rIns="91440" bIns="45720" rtlCol="0" anchor="ctr">
+            <a:noAutofit/>
+          </a:bodyPr>
+          <a:lstStyle/>
+          <a:p>
+            <a:pPr lvl="0"/>
+            <a:r>
+              <a:rPr lang="en-US" sz="8000" baseline="0" dirty="0">
+                <a:ln w="3175" cmpd="sng">
+                  <a:noFill/>
+                </a:ln>
+                <a:solidFill>
+                  <a:schemeClr val="accent1">
+                    <a:lumMod val="60000"/>
+                    <a:lumOff val="40000"/>
+                  </a:schemeClr>
+                </a:solidFill>
+                <a:effectLst/>
+                <a:latin typeface="Arial"/>
+              </a:rPr>
+              <a:t>“</a:t>
+            </a:r>
+          </a:p>
+        </p:txBody>
+      </p:sp>
+      <p:sp>
+        <p:nvSpPr>
+          <p:cNvPr id="25" name="TextBox 24"/>
+          <p:cNvSpPr txBox="1"/>
+          <p:nvPr/>
+        </p:nvSpPr>
+        <p:spPr>
+          <a:xfrm>
+            <a:off x="8893011" y="2886556"/>
+            <a:ext cx="609600" cy="584776"/>
+          </a:xfrm>
+          <a:prstGeom prst="rect">
+            <a:avLst/>
+          </a:prstGeom>
+        </p:spPr>
+        <p:txBody>
+          <a:bodyPr vert="horz" lIns="91440" tIns="45720" rIns="91440" bIns="45720" rtlCol="0" anchor="ctr">
+            <a:noAutofit/>
+          </a:bodyPr>
+          <a:lstStyle/>
+          <a:p>
+            <a:pPr lvl="0"/>
+            <a:r>
+              <a:rPr lang="en-US" sz="8000" baseline="0" dirty="0">
+                <a:ln w="3175" cmpd="sng">
+                  <a:noFill/>
+                </a:ln>
+                <a:solidFill>
+                  <a:schemeClr val="accent1">
+                    <a:lumMod val="60000"/>
+                    <a:lumOff val="40000"/>
+                  </a:schemeClr>
+                </a:solidFill>
+                <a:effectLst/>
+                <a:latin typeface="Arial"/>
+              </a:rPr>
+              <a:t>”</a:t>
+            </a:r>
+          </a:p>
+        </p:txBody>
+      </p:sp>
+    </p:spTree>
+    <p:extLst>
+      <p:ext uri="{BB962C8B-B14F-4D97-AF65-F5344CB8AC3E}">
+        <p14:creationId xmlns:p14="http://schemas.microsoft.com/office/powerpoint/2010/main" val="3671643979"/>
+      </p:ext>
+    </p:extLst>
+  </p:cSld>
+  <p:clrMapOvr>
+    <a:masterClrMapping/>
+  </p:clrMapOvr>
+</p:sldLayout>
+</file>
+
+<file path=ppt/slideLayouts/slideLayout14.xml><?xml version="1.0" encoding="utf-8"?>
+<p:sldLayout xmlns:a="http://schemas.openxmlformats.org/drawingml/2006/main" xmlns:r="http://schemas.openxmlformats.org/officeDocument/2006/relationships" xmlns:p="http://schemas.openxmlformats.org/presentationml/2006/main" preserve="1">
+  <p:cSld name="Igaz vagy hamis">
+    <p:spTree>
+      <p:nvGrpSpPr>
+        <p:cNvPr id="1" name=""/>
+        <p:cNvGrpSpPr/>
+        <p:nvPr/>
+      </p:nvGrpSpPr>
+      <p:grpSpPr>
+        <a:xfrm>
+          <a:off x="0" y="0"/>
+          <a:ext cx="0" cy="0"/>
+          <a:chOff x="0" y="0"/>
+          <a:chExt cx="0" cy="0"/>
+        </a:xfrm>
+      </p:grpSpPr>
+      <p:sp>
+        <p:nvSpPr>
+          <p:cNvPr id="2" name="Title 1"/>
+          <p:cNvSpPr>
+            <a:spLocks noGrp="1"/>
+          </p:cNvSpPr>
+          <p:nvPr>
+            <p:ph type="title"/>
+          </p:nvPr>
+        </p:nvSpPr>
+        <p:spPr>
+          <a:xfrm>
+            <a:off x="685799" y="609600"/>
+            <a:ext cx="8588203" cy="3022600"/>
+          </a:xfrm>
+        </p:spPr>
+        <p:txBody>
+          <a:bodyPr anchor="ctr">
+            <a:normAutofit/>
+          </a:bodyPr>
+          <a:lstStyle>
+            <a:lvl1pPr algn="l">
+              <a:defRPr sz="4400" b="0" cap="none"/>
+            </a:lvl1pPr>
+          </a:lstStyle>
+          <a:p>
+            <a:r>
+              <a:rPr lang="hu-HU"/>
+              <a:t>Mintacím szerkesztése</a:t>
+            </a:r>
+            <a:endParaRPr lang="en-US" dirty="0"/>
+          </a:p>
+        </p:txBody>
+      </p:sp>
+      <p:sp>
+        <p:nvSpPr>
+          <p:cNvPr id="23" name="Text Placeholder 9"/>
+          <p:cNvSpPr>
+            <a:spLocks noGrp="1"/>
+          </p:cNvSpPr>
+          <p:nvPr>
+            <p:ph type="body" sz="quarter" idx="13"/>
+          </p:nvPr>
+        </p:nvSpPr>
+        <p:spPr>
+          <a:xfrm>
+            <a:off x="677332" y="4013200"/>
+            <a:ext cx="8596669" cy="514248"/>
+          </a:xfrm>
+        </p:spPr>
+        <p:txBody>
+          <a:bodyPr anchor="b">
+            <a:noAutofit/>
+          </a:bodyPr>
+          <a:lstStyle>
+            <a:lvl1pPr marL="0" indent="0">
+              <a:buFontTx/>
+              <a:buNone/>
+              <a:defRPr sz="2400">
+                <a:solidFill>
+                  <a:schemeClr val="accent1"/>
+                </a:solidFill>
+              </a:defRPr>
+            </a:lvl1pPr>
+            <a:lvl2pPr marL="457200" indent="0">
+              <a:buFontTx/>
+              <a:buNone/>
+              <a:defRPr/>
+            </a:lvl2pPr>
+            <a:lvl3pPr marL="914400" indent="0">
+              <a:buFontTx/>
+              <a:buNone/>
+              <a:defRPr/>
+            </a:lvl3pPr>
+            <a:lvl4pPr marL="1371600" indent="0">
+              <a:buFontTx/>
+              <a:buNone/>
+              <a:defRPr/>
+            </a:lvl4pPr>
+            <a:lvl5pPr marL="1828800" indent="0">
+              <a:buFontTx/>
+              <a:buNone/>
+              <a:defRPr/>
+            </a:lvl5pPr>
+          </a:lstStyle>
+          <a:p>
+            <a:pPr lvl="0"/>
+            <a:r>
+              <a:rPr lang="hu-HU"/>
+              <a:t>Mintaszöveg szerkesztése</a:t>
+            </a:r>
+          </a:p>
+        </p:txBody>
+      </p:sp>
+      <p:sp>
+        <p:nvSpPr>
+          <p:cNvPr id="3" name="Text Placeholder 2"/>
+          <p:cNvSpPr>
+            <a:spLocks noGrp="1"/>
+          </p:cNvSpPr>
+          <p:nvPr>
+            <p:ph type="body" idx="1"/>
+          </p:nvPr>
+        </p:nvSpPr>
+        <p:spPr>
+          <a:xfrm>
+            <a:off x="677335" y="4527448"/>
+            <a:ext cx="8596668" cy="1513914"/>
+          </a:xfrm>
+        </p:spPr>
+        <p:txBody>
+          <a:bodyPr anchor="t">
+            <a:normAutofit/>
+          </a:bodyPr>
+          <a:lstStyle>
+            <a:lvl1pPr marL="0" indent="0" algn="l">
+              <a:buNone/>
+              <a:defRPr sz="1800">
+                <a:solidFill>
+                  <a:schemeClr val="tx1">
+                    <a:lumMod val="50000"/>
+                    <a:lumOff val="50000"/>
+                  </a:schemeClr>
+                </a:solidFill>
+              </a:defRPr>
+            </a:lvl1pPr>
+            <a:lvl2pPr marL="457200" indent="0">
+              <a:buNone/>
+              <a:defRPr sz="1800">
+                <a:solidFill>
+                  <a:schemeClr val="tx1">
+                    <a:tint val="75000"/>
+                  </a:schemeClr>
+                </a:solidFill>
+              </a:defRPr>
+            </a:lvl2pPr>
+            <a:lvl3pPr marL="914400" indent="0">
+              <a:buNone/>
+              <a:defRPr sz="1600">
+                <a:solidFill>
+                  <a:schemeClr val="tx1">
+                    <a:tint val="75000"/>
+                  </a:schemeClr>
+                </a:solidFill>
+              </a:defRPr>
+            </a:lvl3pPr>
+            <a:lvl4pPr marL="1371600" indent="0">
+              <a:buNone/>
+              <a:defRPr sz="1400">
+                <a:solidFill>
+                  <a:schemeClr val="tx1">
+                    <a:tint val="75000"/>
+                  </a:schemeClr>
+                </a:solidFill>
+              </a:defRPr>
+            </a:lvl4pPr>
+            <a:lvl5pPr marL="1828800" indent="0">
+              <a:buNone/>
+              <a:defRPr sz="1400">
+                <a:solidFill>
+                  <a:schemeClr val="tx1">
+                    <a:tint val="75000"/>
+                  </a:schemeClr>
+                </a:solidFill>
+              </a:defRPr>
+            </a:lvl5pPr>
+            <a:lvl6pPr marL="2286000" indent="0">
+              <a:buNone/>
+              <a:defRPr sz="1400">
+                <a:solidFill>
+                  <a:schemeClr val="tx1">
+                    <a:tint val="75000"/>
+                  </a:schemeClr>
+                </a:solidFill>
+              </a:defRPr>
+            </a:lvl6pPr>
+            <a:lvl7pPr marL="2743200" indent="0">
+              <a:buNone/>
+              <a:defRPr sz="1400">
+                <a:solidFill>
+                  <a:schemeClr val="tx1">
+                    <a:tint val="75000"/>
+                  </a:schemeClr>
+                </a:solidFill>
+              </a:defRPr>
+            </a:lvl7pPr>
+            <a:lvl8pPr marL="3200400" indent="0">
+              <a:buNone/>
+              <a:defRPr sz="1400">
+                <a:solidFill>
+                  <a:schemeClr val="tx1">
+                    <a:tint val="75000"/>
+                  </a:schemeClr>
+                </a:solidFill>
+              </a:defRPr>
+            </a:lvl8pPr>
+            <a:lvl9pPr marL="3657600" indent="0">
+              <a:buNone/>
+              <a:defRPr sz="1400">
+                <a:solidFill>
+                  <a:schemeClr val="tx1">
+                    <a:tint val="75000"/>
+                  </a:schemeClr>
+                </a:solidFill>
+              </a:defRPr>
+            </a:lvl9pPr>
+          </a:lstStyle>
+          <a:p>
+            <a:pPr lvl="0"/>
+            <a:r>
+              <a:rPr lang="hu-HU"/>
+              <a:t>Mintaszöveg szerkesztése</a:t>
+            </a:r>
+          </a:p>
+        </p:txBody>
+      </p:sp>
+      <p:sp>
+        <p:nvSpPr>
+          <p:cNvPr id="4" name="Date Placeholder 3"/>
+          <p:cNvSpPr>
+            <a:spLocks noGrp="1"/>
+          </p:cNvSpPr>
+          <p:nvPr>
+            <p:ph type="dt" sz="half" idx="10"/>
+          </p:nvPr>
+        </p:nvSpPr>
+        <p:spPr/>
+        <p:txBody>
+          <a:bodyPr/>
+          <a:lstStyle/>
+          <a:p>
+            <a:fld id="{0D24984B-60F3-4F71-B66E-41FD97B97414}" type="datetimeFigureOut">
+              <a:rPr lang="hu-HU" smtClean="0"/>
+              <a:t>2026. 02. 28.</a:t>
+            </a:fld>
+            <a:endParaRPr lang="hu-HU"/>
+          </a:p>
+        </p:txBody>
+      </p:sp>
+      <p:sp>
+        <p:nvSpPr>
+          <p:cNvPr id="5" name="Footer Placeholder 4"/>
+          <p:cNvSpPr>
+            <a:spLocks noGrp="1"/>
+          </p:cNvSpPr>
+          <p:nvPr>
+            <p:ph type="ftr" sz="quarter" idx="11"/>
+          </p:nvPr>
+        </p:nvSpPr>
+        <p:spPr/>
+        <p:txBody>
+          <a:bodyPr/>
+          <a:lstStyle/>
+          <a:p>
+            <a:endParaRPr lang="hu-HU"/>
+          </a:p>
+        </p:txBody>
+      </p:sp>
+      <p:sp>
+        <p:nvSpPr>
+          <p:cNvPr id="6" name="Slide Number Placeholder 5"/>
+          <p:cNvSpPr>
+            <a:spLocks noGrp="1"/>
+          </p:cNvSpPr>
+          <p:nvPr>
+            <p:ph type="sldNum" sz="quarter" idx="12"/>
+          </p:nvPr>
+        </p:nvSpPr>
+        <p:spPr/>
+        <p:txBody>
+          <a:bodyPr/>
+          <a:lstStyle/>
+          <a:p>
+            <a:fld id="{BEDEDCEB-C399-44F9-8B55-6D9F00D7720B}" type="slidenum">
+              <a:rPr lang="hu-HU" smtClean="0"/>
+              <a:t>‹#›</a:t>
+            </a:fld>
+            <a:endParaRPr lang="hu-HU"/>
+          </a:p>
+        </p:txBody>
+      </p:sp>
+    </p:spTree>
+    <p:extLst>
+      <p:ext uri="{BB962C8B-B14F-4D97-AF65-F5344CB8AC3E}">
+        <p14:creationId xmlns:p14="http://schemas.microsoft.com/office/powerpoint/2010/main" val="3970673915"/>
+      </p:ext>
+    </p:extLst>
+  </p:cSld>
+  <p:clrMapOvr>
+    <a:masterClrMapping/>
+  </p:clrMapOvr>
+</p:sldLayout>
+</file>
+
+<file path=ppt/slideLayouts/slideLayout15.xml><?xml version="1.0" encoding="utf-8"?>
 <p:sldLayout xmlns:a="http://schemas.openxmlformats.org/drawingml/2006/main" xmlns:r="http://schemas.openxmlformats.org/officeDocument/2006/relationships" xmlns:p="http://schemas.openxmlformats.org/presentationml/2006/main" type="vertTx" preserve="1">
   <p:cSld name="Cím és függőleges szöveg">
     <p:spTree>
@@ -370,13 +2566,7 @@
       </p:grpSpPr>
       <p:sp>
         <p:nvSpPr>
-          <p:cNvPr id="2" name="Cím 1">
-            <a:extLst>
-              <a:ext uri="{FF2B5EF4-FFF2-40B4-BE49-F238E27FC236}">
-                <a16:creationId xmlns:a16="http://schemas.microsoft.com/office/drawing/2014/main" id="{2E396E27-DD17-698A-7B3D-111AA9490177}"/>
-              </a:ext>
-            </a:extLst>
-          </p:cNvPr>
+          <p:cNvPr id="2" name="Title 1"/>
           <p:cNvSpPr>
             <a:spLocks noGrp="1"/>
           </p:cNvSpPr>
@@ -393,18 +2583,13 @@
               <a:rPr lang="hu-HU"/>
               <a:t>Mintacím szerkesztése</a:t>
             </a:r>
-          </a:p>
-        </p:txBody>
-      </p:sp>
-      <p:sp>
-        <p:nvSpPr>
-          <p:cNvPr id="3" name="Függőleges szöveg helye 2">
-            <a:extLst>
-              <a:ext uri="{FF2B5EF4-FFF2-40B4-BE49-F238E27FC236}">
-                <a16:creationId xmlns:a16="http://schemas.microsoft.com/office/drawing/2014/main" id="{88484E66-0056-8356-5F24-DC101E7A2B5E}"/>
-              </a:ext>
-            </a:extLst>
-          </p:cNvPr>
+            <a:endParaRPr lang="en-US" dirty="0"/>
+          </a:p>
+        </p:txBody>
+      </p:sp>
+      <p:sp>
+        <p:nvSpPr>
+          <p:cNvPr id="3" name="Vertical Text Placeholder 2"/>
           <p:cNvSpPr>
             <a:spLocks noGrp="1"/>
           </p:cNvSpPr>
@@ -450,18 +2635,13 @@
               <a:rPr lang="hu-HU"/>
               <a:t>Ötödik szint</a:t>
             </a:r>
-          </a:p>
-        </p:txBody>
-      </p:sp>
-      <p:sp>
-        <p:nvSpPr>
-          <p:cNvPr id="4" name="Dátum helye 3">
-            <a:extLst>
-              <a:ext uri="{FF2B5EF4-FFF2-40B4-BE49-F238E27FC236}">
-                <a16:creationId xmlns:a16="http://schemas.microsoft.com/office/drawing/2014/main" id="{4E4B8C60-EE34-BBEE-C29A-A06D9C534DE3}"/>
-              </a:ext>
-            </a:extLst>
-          </p:cNvPr>
+            <a:endParaRPr lang="en-US" dirty="0"/>
+          </a:p>
+        </p:txBody>
+      </p:sp>
+      <p:sp>
+        <p:nvSpPr>
+          <p:cNvPr id="4" name="Date Placeholder 3"/>
           <p:cNvSpPr>
             <a:spLocks noGrp="1"/>
           </p:cNvSpPr>
@@ -476,7 +2656,7 @@
           <a:p>
             <a:fld id="{0D24984B-60F3-4F71-B66E-41FD97B97414}" type="datetimeFigureOut">
               <a:rPr lang="hu-HU" smtClean="0"/>
-              <a:t>2026. 02. 22.</a:t>
+              <a:t>2026. 02. 28.</a:t>
             </a:fld>
             <a:endParaRPr lang="hu-HU"/>
           </a:p>
@@ -484,13 +2664,7 @@
       </p:sp>
       <p:sp>
         <p:nvSpPr>
-          <p:cNvPr id="5" name="Élőláb helye 4">
-            <a:extLst>
-              <a:ext uri="{FF2B5EF4-FFF2-40B4-BE49-F238E27FC236}">
-                <a16:creationId xmlns:a16="http://schemas.microsoft.com/office/drawing/2014/main" id="{84A12C80-0A79-9C8E-79DB-504107ED899A}"/>
-              </a:ext>
-            </a:extLst>
-          </p:cNvPr>
+          <p:cNvPr id="5" name="Footer Placeholder 4"/>
           <p:cNvSpPr>
             <a:spLocks noGrp="1"/>
           </p:cNvSpPr>
@@ -509,13 +2683,7 @@
       </p:sp>
       <p:sp>
         <p:nvSpPr>
-          <p:cNvPr id="6" name="Dia számának helye 5">
-            <a:extLst>
-              <a:ext uri="{FF2B5EF4-FFF2-40B4-BE49-F238E27FC236}">
-                <a16:creationId xmlns:a16="http://schemas.microsoft.com/office/drawing/2014/main" id="{D573B2E4-4FED-D762-8820-5D19766137DB}"/>
-              </a:ext>
-            </a:extLst>
-          </p:cNvPr>
+          <p:cNvPr id="6" name="Slide Number Placeholder 5"/>
           <p:cNvSpPr>
             <a:spLocks noGrp="1"/>
           </p:cNvSpPr>
@@ -539,7 +2707,7 @@
     </p:spTree>
     <p:extLst>
       <p:ext uri="{BB962C8B-B14F-4D97-AF65-F5344CB8AC3E}">
-        <p14:creationId xmlns:p14="http://schemas.microsoft.com/office/powerpoint/2010/main" val="1697105289"/>
+        <p14:creationId xmlns:p14="http://schemas.microsoft.com/office/powerpoint/2010/main" val="3100026805"/>
       </p:ext>
     </p:extLst>
   </p:cSld>
@@ -549,7 +2717,7 @@
 </p:sldLayout>
 </file>
 
-<file path=ppt/slideLayouts/slideLayout11.xml><?xml version="1.0" encoding="utf-8"?>
+<file path=ppt/slideLayouts/slideLayout16.xml><?xml version="1.0" encoding="utf-8"?>
 <p:sldLayout xmlns:a="http://schemas.openxmlformats.org/drawingml/2006/main" xmlns:r="http://schemas.openxmlformats.org/officeDocument/2006/relationships" xmlns:p="http://schemas.openxmlformats.org/presentationml/2006/main" type="vertTitleAndTx" preserve="1">
   <p:cSld name="Függőleges cím és szöveg">
     <p:spTree>
@@ -568,13 +2736,7 @@
       </p:grpSpPr>
       <p:sp>
         <p:nvSpPr>
-          <p:cNvPr id="2" name="Függőleges cím 1">
-            <a:extLst>
-              <a:ext uri="{FF2B5EF4-FFF2-40B4-BE49-F238E27FC236}">
-                <a16:creationId xmlns:a16="http://schemas.microsoft.com/office/drawing/2014/main" id="{E55114F3-E60F-3E1E-FF3B-27CC743210C4}"/>
-              </a:ext>
-            </a:extLst>
-          </p:cNvPr>
+          <p:cNvPr id="2" name="Vertical Title 1"/>
           <p:cNvSpPr>
             <a:spLocks noGrp="1"/>
           </p:cNvSpPr>
@@ -584,30 +2746,25 @@
         </p:nvSpPr>
         <p:spPr>
           <a:xfrm>
-            <a:off x="8724900" y="365125"/>
-            <a:ext cx="2628900" cy="5811838"/>
+            <a:off x="7967673" y="609599"/>
+            <a:ext cx="1304743" cy="5251451"/>
           </a:xfrm>
         </p:spPr>
         <p:txBody>
-          <a:bodyPr vert="eaVert"/>
+          <a:bodyPr vert="eaVert" anchor="ctr"/>
           <a:lstStyle/>
           <a:p>
             <a:r>
               <a:rPr lang="hu-HU"/>
               <a:t>Mintacím szerkesztése</a:t>
             </a:r>
-          </a:p>
-        </p:txBody>
-      </p:sp>
-      <p:sp>
-        <p:nvSpPr>
-          <p:cNvPr id="3" name="Függőleges szöveg helye 2">
-            <a:extLst>
-              <a:ext uri="{FF2B5EF4-FFF2-40B4-BE49-F238E27FC236}">
-                <a16:creationId xmlns:a16="http://schemas.microsoft.com/office/drawing/2014/main" id="{D8D67544-49EA-D785-6717-531D361EC0D1}"/>
-              </a:ext>
-            </a:extLst>
-          </p:cNvPr>
+            <a:endParaRPr lang="en-US" dirty="0"/>
+          </a:p>
+        </p:txBody>
+      </p:sp>
+      <p:sp>
+        <p:nvSpPr>
+          <p:cNvPr id="3" name="Vertical Text Placeholder 2"/>
           <p:cNvSpPr>
             <a:spLocks noGrp="1"/>
           </p:cNvSpPr>
@@ -617,8 +2774,8 @@
         </p:nvSpPr>
         <p:spPr>
           <a:xfrm>
-            <a:off x="838200" y="365125"/>
-            <a:ext cx="7734300" cy="5811838"/>
+            <a:off x="677335" y="609600"/>
+            <a:ext cx="7060150" cy="5251450"/>
           </a:xfrm>
         </p:spPr>
         <p:txBody>
@@ -658,18 +2815,13 @@
               <a:rPr lang="hu-HU"/>
               <a:t>Ötödik szint</a:t>
             </a:r>
-          </a:p>
-        </p:txBody>
-      </p:sp>
-      <p:sp>
-        <p:nvSpPr>
-          <p:cNvPr id="4" name="Dátum helye 3">
-            <a:extLst>
-              <a:ext uri="{FF2B5EF4-FFF2-40B4-BE49-F238E27FC236}">
-                <a16:creationId xmlns:a16="http://schemas.microsoft.com/office/drawing/2014/main" id="{43C8AF87-A431-E3CE-C843-78277F068E09}"/>
-              </a:ext>
-            </a:extLst>
-          </p:cNvPr>
+            <a:endParaRPr lang="en-US" dirty="0"/>
+          </a:p>
+        </p:txBody>
+      </p:sp>
+      <p:sp>
+        <p:nvSpPr>
+          <p:cNvPr id="4" name="Date Placeholder 3"/>
           <p:cNvSpPr>
             <a:spLocks noGrp="1"/>
           </p:cNvSpPr>
@@ -684,7 +2836,7 @@
           <a:p>
             <a:fld id="{0D24984B-60F3-4F71-B66E-41FD97B97414}" type="datetimeFigureOut">
               <a:rPr lang="hu-HU" smtClean="0"/>
-              <a:t>2026. 02. 22.</a:t>
+              <a:t>2026. 02. 28.</a:t>
             </a:fld>
             <a:endParaRPr lang="hu-HU"/>
           </a:p>
@@ -692,13 +2844,7 @@
       </p:sp>
       <p:sp>
         <p:nvSpPr>
-          <p:cNvPr id="5" name="Élőláb helye 4">
-            <a:extLst>
-              <a:ext uri="{FF2B5EF4-FFF2-40B4-BE49-F238E27FC236}">
-                <a16:creationId xmlns:a16="http://schemas.microsoft.com/office/drawing/2014/main" id="{B130E2E4-D71F-E736-76F8-CF87CB40E411}"/>
-              </a:ext>
-            </a:extLst>
-          </p:cNvPr>
+          <p:cNvPr id="5" name="Footer Placeholder 4"/>
           <p:cNvSpPr>
             <a:spLocks noGrp="1"/>
           </p:cNvSpPr>
@@ -717,13 +2863,7 @@
       </p:sp>
       <p:sp>
         <p:nvSpPr>
-          <p:cNvPr id="6" name="Dia számának helye 5">
-            <a:extLst>
-              <a:ext uri="{FF2B5EF4-FFF2-40B4-BE49-F238E27FC236}">
-                <a16:creationId xmlns:a16="http://schemas.microsoft.com/office/drawing/2014/main" id="{A82B9990-36DC-8671-2F8E-2C3F9E8904A7}"/>
-              </a:ext>
-            </a:extLst>
-          </p:cNvPr>
+          <p:cNvPr id="6" name="Slide Number Placeholder 5"/>
           <p:cNvSpPr>
             <a:spLocks noGrp="1"/>
           </p:cNvSpPr>
@@ -747,7 +2887,7 @@
     </p:spTree>
     <p:extLst>
       <p:ext uri="{BB962C8B-B14F-4D97-AF65-F5344CB8AC3E}">
-        <p14:creationId xmlns:p14="http://schemas.microsoft.com/office/powerpoint/2010/main" val="1718029963"/>
+        <p14:creationId xmlns:p14="http://schemas.microsoft.com/office/powerpoint/2010/main" val="2242380951"/>
       </p:ext>
     </p:extLst>
   </p:cSld>
@@ -776,13 +2916,7 @@
       </p:grpSpPr>
       <p:sp>
         <p:nvSpPr>
-          <p:cNvPr id="2" name="Cím 1">
-            <a:extLst>
-              <a:ext uri="{FF2B5EF4-FFF2-40B4-BE49-F238E27FC236}">
-                <a16:creationId xmlns:a16="http://schemas.microsoft.com/office/drawing/2014/main" id="{71C6F3B5-07FB-3173-EC03-24C346DF2B44}"/>
-              </a:ext>
-            </a:extLst>
-          </p:cNvPr>
+          <p:cNvPr id="2" name="Title 1"/>
           <p:cNvSpPr>
             <a:spLocks noGrp="1"/>
           </p:cNvSpPr>
@@ -799,18 +2933,13 @@
               <a:rPr lang="hu-HU"/>
               <a:t>Mintacím szerkesztése</a:t>
             </a:r>
-          </a:p>
-        </p:txBody>
-      </p:sp>
-      <p:sp>
-        <p:nvSpPr>
-          <p:cNvPr id="3" name="Tartalom helye 2">
-            <a:extLst>
-              <a:ext uri="{FF2B5EF4-FFF2-40B4-BE49-F238E27FC236}">
-                <a16:creationId xmlns:a16="http://schemas.microsoft.com/office/drawing/2014/main" id="{610F422F-8384-E473-46F5-5DBE0ED76A97}"/>
-              </a:ext>
-            </a:extLst>
-          </p:cNvPr>
+            <a:endParaRPr lang="en-US" dirty="0"/>
+          </a:p>
+        </p:txBody>
+      </p:sp>
+      <p:sp>
+        <p:nvSpPr>
+          <p:cNvPr id="3" name="Content Placeholder 2"/>
           <p:cNvSpPr>
             <a:spLocks noGrp="1"/>
           </p:cNvSpPr>
@@ -856,18 +2985,13 @@
               <a:rPr lang="hu-HU"/>
               <a:t>Ötödik szint</a:t>
             </a:r>
-          </a:p>
-        </p:txBody>
-      </p:sp>
-      <p:sp>
-        <p:nvSpPr>
-          <p:cNvPr id="4" name="Dátum helye 3">
-            <a:extLst>
-              <a:ext uri="{FF2B5EF4-FFF2-40B4-BE49-F238E27FC236}">
-                <a16:creationId xmlns:a16="http://schemas.microsoft.com/office/drawing/2014/main" id="{9915F8E7-1D57-7F11-F57A-6EC6CFA4D295}"/>
-              </a:ext>
-            </a:extLst>
-          </p:cNvPr>
+            <a:endParaRPr lang="en-US" dirty="0"/>
+          </a:p>
+        </p:txBody>
+      </p:sp>
+      <p:sp>
+        <p:nvSpPr>
+          <p:cNvPr id="4" name="Date Placeholder 3"/>
           <p:cNvSpPr>
             <a:spLocks noGrp="1"/>
           </p:cNvSpPr>
@@ -882,7 +3006,7 @@
           <a:p>
             <a:fld id="{0D24984B-60F3-4F71-B66E-41FD97B97414}" type="datetimeFigureOut">
               <a:rPr lang="hu-HU" smtClean="0"/>
-              <a:t>2026. 02. 22.</a:t>
+              <a:t>2026. 02. 28.</a:t>
             </a:fld>
             <a:endParaRPr lang="hu-HU"/>
           </a:p>
@@ -890,13 +3014,7 @@
       </p:sp>
       <p:sp>
         <p:nvSpPr>
-          <p:cNvPr id="5" name="Élőláb helye 4">
-            <a:extLst>
-              <a:ext uri="{FF2B5EF4-FFF2-40B4-BE49-F238E27FC236}">
-                <a16:creationId xmlns:a16="http://schemas.microsoft.com/office/drawing/2014/main" id="{23C55044-8271-5FCC-03D9-5B83249A885B}"/>
-              </a:ext>
-            </a:extLst>
-          </p:cNvPr>
+          <p:cNvPr id="5" name="Footer Placeholder 4"/>
           <p:cNvSpPr>
             <a:spLocks noGrp="1"/>
           </p:cNvSpPr>
@@ -915,13 +3033,7 @@
       </p:sp>
       <p:sp>
         <p:nvSpPr>
-          <p:cNvPr id="6" name="Dia számának helye 5">
-            <a:extLst>
-              <a:ext uri="{FF2B5EF4-FFF2-40B4-BE49-F238E27FC236}">
-                <a16:creationId xmlns:a16="http://schemas.microsoft.com/office/drawing/2014/main" id="{C54B487E-D10C-5F17-D524-858B7CEBAC60}"/>
-              </a:ext>
-            </a:extLst>
-          </p:cNvPr>
+          <p:cNvPr id="6" name="Slide Number Placeholder 5"/>
           <p:cNvSpPr>
             <a:spLocks noGrp="1"/>
           </p:cNvSpPr>
@@ -945,7 +3057,7 @@
     </p:spTree>
     <p:extLst>
       <p:ext uri="{BB962C8B-B14F-4D97-AF65-F5344CB8AC3E}">
-        <p14:creationId xmlns:p14="http://schemas.microsoft.com/office/powerpoint/2010/main" val="3925511203"/>
+        <p14:creationId xmlns:p14="http://schemas.microsoft.com/office/powerpoint/2010/main" val="2331477318"/>
       </p:ext>
     </p:extLst>
   </p:cSld>
@@ -974,13 +3086,7 @@
       </p:grpSpPr>
       <p:sp>
         <p:nvSpPr>
-          <p:cNvPr id="2" name="Cím 1">
-            <a:extLst>
-              <a:ext uri="{FF2B5EF4-FFF2-40B4-BE49-F238E27FC236}">
-                <a16:creationId xmlns:a16="http://schemas.microsoft.com/office/drawing/2014/main" id="{AB2F7ED2-1BB6-ACAB-6DD6-2D081D539472}"/>
-              </a:ext>
-            </a:extLst>
-          </p:cNvPr>
+          <p:cNvPr id="2" name="Title 1"/>
           <p:cNvSpPr>
             <a:spLocks noGrp="1"/>
           </p:cNvSpPr>
@@ -990,15 +3096,15 @@
         </p:nvSpPr>
         <p:spPr>
           <a:xfrm>
-            <a:off x="831850" y="1709738"/>
-            <a:ext cx="10515600" cy="2852737"/>
+            <a:off x="677335" y="2700867"/>
+            <a:ext cx="8596668" cy="1826581"/>
           </a:xfrm>
         </p:spPr>
         <p:txBody>
           <a:bodyPr anchor="b"/>
           <a:lstStyle>
-            <a:lvl1pPr>
-              <a:defRPr sz="6000"/>
+            <a:lvl1pPr algn="l">
+              <a:defRPr sz="4000" b="0" cap="none"/>
             </a:lvl1pPr>
           </a:lstStyle>
           <a:p>
@@ -1006,18 +3112,13 @@
               <a:rPr lang="hu-HU"/>
               <a:t>Mintacím szerkesztése</a:t>
             </a:r>
-          </a:p>
-        </p:txBody>
-      </p:sp>
-      <p:sp>
-        <p:nvSpPr>
-          <p:cNvPr id="3" name="Szöveg helye 2">
-            <a:extLst>
-              <a:ext uri="{FF2B5EF4-FFF2-40B4-BE49-F238E27FC236}">
-                <a16:creationId xmlns:a16="http://schemas.microsoft.com/office/drawing/2014/main" id="{F92484A3-A6A0-DEDB-5474-D453F9926B1B}"/>
-              </a:ext>
-            </a:extLst>
-          </p:cNvPr>
+            <a:endParaRPr lang="en-US" dirty="0"/>
+          </a:p>
+        </p:txBody>
+      </p:sp>
+      <p:sp>
+        <p:nvSpPr>
+          <p:cNvPr id="3" name="Text Placeholder 2"/>
           <p:cNvSpPr>
             <a:spLocks noGrp="1"/>
           </p:cNvSpPr>
@@ -1027,26 +3128,27 @@
         </p:nvSpPr>
         <p:spPr>
           <a:xfrm>
-            <a:off x="831850" y="4589463"/>
-            <a:ext cx="10515600" cy="1500187"/>
+            <a:off x="677335" y="4527448"/>
+            <a:ext cx="8596668" cy="860400"/>
           </a:xfrm>
         </p:spPr>
         <p:txBody>
-          <a:bodyPr/>
+          <a:bodyPr anchor="t"/>
           <a:lstStyle>
-            <a:lvl1pPr marL="0" indent="0">
-              <a:buNone/>
-              <a:defRPr sz="2400">
+            <a:lvl1pPr marL="0" indent="0" algn="l">
+              <a:buNone/>
+              <a:defRPr sz="2000">
                 <a:solidFill>
                   <a:schemeClr val="tx1">
-                    <a:tint val="75000"/>
+                    <a:lumMod val="50000"/>
+                    <a:lumOff val="50000"/>
                   </a:schemeClr>
                 </a:solidFill>
               </a:defRPr>
             </a:lvl1pPr>
             <a:lvl2pPr marL="457200" indent="0">
               <a:buNone/>
-              <a:defRPr sz="2000">
+              <a:defRPr sz="1800">
                 <a:solidFill>
                   <a:schemeClr val="tx1">
                     <a:tint val="75000"/>
@@ -1056,7 +3158,7 @@
             </a:lvl2pPr>
             <a:lvl3pPr marL="914400" indent="0">
               <a:buNone/>
-              <a:defRPr sz="1800">
+              <a:defRPr sz="1600">
                 <a:solidFill>
                   <a:schemeClr val="tx1">
                     <a:tint val="75000"/>
@@ -1066,7 +3168,7 @@
             </a:lvl3pPr>
             <a:lvl4pPr marL="1371600" indent="0">
               <a:buNone/>
-              <a:defRPr sz="1600">
+              <a:defRPr sz="1400">
                 <a:solidFill>
                   <a:schemeClr val="tx1">
                     <a:tint val="75000"/>
@@ -1076,7 +3178,7 @@
             </a:lvl4pPr>
             <a:lvl5pPr marL="1828800" indent="0">
               <a:buNone/>
-              <a:defRPr sz="1600">
+              <a:defRPr sz="1400">
                 <a:solidFill>
                   <a:schemeClr val="tx1">
                     <a:tint val="75000"/>
@@ -1086,7 +3188,7 @@
             </a:lvl5pPr>
             <a:lvl6pPr marL="2286000" indent="0">
               <a:buNone/>
-              <a:defRPr sz="1600">
+              <a:defRPr sz="1400">
                 <a:solidFill>
                   <a:schemeClr val="tx1">
                     <a:tint val="75000"/>
@@ -1096,7 +3198,7 @@
             </a:lvl6pPr>
             <a:lvl7pPr marL="2743200" indent="0">
               <a:buNone/>
-              <a:defRPr sz="1600">
+              <a:defRPr sz="1400">
                 <a:solidFill>
                   <a:schemeClr val="tx1">
                     <a:tint val="75000"/>
@@ -1106,7 +3208,7 @@
             </a:lvl7pPr>
             <a:lvl8pPr marL="3200400" indent="0">
               <a:buNone/>
-              <a:defRPr sz="1600">
+              <a:defRPr sz="1400">
                 <a:solidFill>
                   <a:schemeClr val="tx1">
                     <a:tint val="75000"/>
@@ -1116,7 +3218,7 @@
             </a:lvl8pPr>
             <a:lvl9pPr marL="3657600" indent="0">
               <a:buNone/>
-              <a:defRPr sz="1600">
+              <a:defRPr sz="1400">
                 <a:solidFill>
                   <a:schemeClr val="tx1">
                     <a:tint val="75000"/>
@@ -1136,13 +3238,7 @@
       </p:sp>
       <p:sp>
         <p:nvSpPr>
-          <p:cNvPr id="4" name="Dátum helye 3">
-            <a:extLst>
-              <a:ext uri="{FF2B5EF4-FFF2-40B4-BE49-F238E27FC236}">
-                <a16:creationId xmlns:a16="http://schemas.microsoft.com/office/drawing/2014/main" id="{FEA7A624-7414-6FC4-AFB4-0B392295C370}"/>
-              </a:ext>
-            </a:extLst>
-          </p:cNvPr>
+          <p:cNvPr id="4" name="Date Placeholder 3"/>
           <p:cNvSpPr>
             <a:spLocks noGrp="1"/>
           </p:cNvSpPr>
@@ -1157,7 +3253,7 @@
           <a:p>
             <a:fld id="{0D24984B-60F3-4F71-B66E-41FD97B97414}" type="datetimeFigureOut">
               <a:rPr lang="hu-HU" smtClean="0"/>
-              <a:t>2026. 02. 22.</a:t>
+              <a:t>2026. 02. 28.</a:t>
             </a:fld>
             <a:endParaRPr lang="hu-HU"/>
           </a:p>
@@ -1165,13 +3261,7 @@
       </p:sp>
       <p:sp>
         <p:nvSpPr>
-          <p:cNvPr id="5" name="Élőláb helye 4">
-            <a:extLst>
-              <a:ext uri="{FF2B5EF4-FFF2-40B4-BE49-F238E27FC236}">
-                <a16:creationId xmlns:a16="http://schemas.microsoft.com/office/drawing/2014/main" id="{6011924A-BB3D-DB2F-1A82-F19377112CD3}"/>
-              </a:ext>
-            </a:extLst>
-          </p:cNvPr>
+          <p:cNvPr id="5" name="Footer Placeholder 4"/>
           <p:cNvSpPr>
             <a:spLocks noGrp="1"/>
           </p:cNvSpPr>
@@ -1190,13 +3280,7 @@
       </p:sp>
       <p:sp>
         <p:nvSpPr>
-          <p:cNvPr id="6" name="Dia számának helye 5">
-            <a:extLst>
-              <a:ext uri="{FF2B5EF4-FFF2-40B4-BE49-F238E27FC236}">
-                <a16:creationId xmlns:a16="http://schemas.microsoft.com/office/drawing/2014/main" id="{CF1C2693-AB6C-B31D-2092-61F89D751147}"/>
-              </a:ext>
-            </a:extLst>
-          </p:cNvPr>
+          <p:cNvPr id="6" name="Slide Number Placeholder 5"/>
           <p:cNvSpPr>
             <a:spLocks noGrp="1"/>
           </p:cNvSpPr>
@@ -1220,7 +3304,7 @@
     </p:spTree>
     <p:extLst>
       <p:ext uri="{BB962C8B-B14F-4D97-AF65-F5344CB8AC3E}">
-        <p14:creationId xmlns:p14="http://schemas.microsoft.com/office/powerpoint/2010/main" val="2694289482"/>
+        <p14:creationId xmlns:p14="http://schemas.microsoft.com/office/powerpoint/2010/main" val="2279231618"/>
       </p:ext>
     </p:extLst>
   </p:cSld>
@@ -1249,13 +3333,7 @@
       </p:grpSpPr>
       <p:sp>
         <p:nvSpPr>
-          <p:cNvPr id="2" name="Cím 1">
-            <a:extLst>
-              <a:ext uri="{FF2B5EF4-FFF2-40B4-BE49-F238E27FC236}">
-                <a16:creationId xmlns:a16="http://schemas.microsoft.com/office/drawing/2014/main" id="{1FBCE61A-CB09-A1F6-AE31-3523D6FC1DC2}"/>
-              </a:ext>
-            </a:extLst>
-          </p:cNvPr>
+          <p:cNvPr id="2" name="Title 1"/>
           <p:cNvSpPr>
             <a:spLocks noGrp="1"/>
           </p:cNvSpPr>
@@ -1272,18 +3350,13 @@
               <a:rPr lang="hu-HU"/>
               <a:t>Mintacím szerkesztése</a:t>
             </a:r>
-          </a:p>
-        </p:txBody>
-      </p:sp>
-      <p:sp>
-        <p:nvSpPr>
-          <p:cNvPr id="3" name="Tartalom helye 2">
-            <a:extLst>
-              <a:ext uri="{FF2B5EF4-FFF2-40B4-BE49-F238E27FC236}">
-                <a16:creationId xmlns:a16="http://schemas.microsoft.com/office/drawing/2014/main" id="{77E270F7-CEC6-3B75-586B-ED9C3B73A329}"/>
-              </a:ext>
-            </a:extLst>
-          </p:cNvPr>
+            <a:endParaRPr lang="en-US" dirty="0"/>
+          </a:p>
+        </p:txBody>
+      </p:sp>
+      <p:sp>
+        <p:nvSpPr>
+          <p:cNvPr id="3" name="Content Placeholder 2"/>
           <p:cNvSpPr>
             <a:spLocks noGrp="1"/>
           </p:cNvSpPr>
@@ -1293,8 +3366,8 @@
         </p:nvSpPr>
         <p:spPr>
           <a:xfrm>
-            <a:off x="838200" y="1825625"/>
-            <a:ext cx="5181600" cy="4351338"/>
+            <a:off x="677334" y="2160589"/>
+            <a:ext cx="4184035" cy="3880772"/>
           </a:xfrm>
         </p:spPr>
         <p:txBody>
@@ -1334,18 +3407,13 @@
               <a:rPr lang="hu-HU"/>
               <a:t>Ötödik szint</a:t>
             </a:r>
-          </a:p>
-        </p:txBody>
-      </p:sp>
-      <p:sp>
-        <p:nvSpPr>
-          <p:cNvPr id="4" name="Tartalom helye 3">
-            <a:extLst>
-              <a:ext uri="{FF2B5EF4-FFF2-40B4-BE49-F238E27FC236}">
-                <a16:creationId xmlns:a16="http://schemas.microsoft.com/office/drawing/2014/main" id="{E4E5074B-0944-4A7F-0F8A-2415C8936D3C}"/>
-              </a:ext>
-            </a:extLst>
-          </p:cNvPr>
+            <a:endParaRPr lang="en-US" dirty="0"/>
+          </a:p>
+        </p:txBody>
+      </p:sp>
+      <p:sp>
+        <p:nvSpPr>
+          <p:cNvPr id="4" name="Content Placeholder 3"/>
           <p:cNvSpPr>
             <a:spLocks noGrp="1"/>
           </p:cNvSpPr>
@@ -1355,8 +3423,8 @@
         </p:nvSpPr>
         <p:spPr>
           <a:xfrm>
-            <a:off x="6172200" y="1825625"/>
-            <a:ext cx="5181600" cy="4351338"/>
+            <a:off x="5089970" y="2160589"/>
+            <a:ext cx="4184034" cy="3880773"/>
           </a:xfrm>
         </p:spPr>
         <p:txBody>
@@ -1396,18 +3464,13 @@
               <a:rPr lang="hu-HU"/>
               <a:t>Ötödik szint</a:t>
             </a:r>
-          </a:p>
-        </p:txBody>
-      </p:sp>
-      <p:sp>
-        <p:nvSpPr>
-          <p:cNvPr id="5" name="Dátum helye 4">
-            <a:extLst>
-              <a:ext uri="{FF2B5EF4-FFF2-40B4-BE49-F238E27FC236}">
-                <a16:creationId xmlns:a16="http://schemas.microsoft.com/office/drawing/2014/main" id="{4F8DF2C1-86C1-237D-46D8-094C20B00A58}"/>
-              </a:ext>
-            </a:extLst>
-          </p:cNvPr>
+            <a:endParaRPr lang="en-US" dirty="0"/>
+          </a:p>
+        </p:txBody>
+      </p:sp>
+      <p:sp>
+        <p:nvSpPr>
+          <p:cNvPr id="5" name="Date Placeholder 4"/>
           <p:cNvSpPr>
             <a:spLocks noGrp="1"/>
           </p:cNvSpPr>
@@ -1422,7 +3485,7 @@
           <a:p>
             <a:fld id="{0D24984B-60F3-4F71-B66E-41FD97B97414}" type="datetimeFigureOut">
               <a:rPr lang="hu-HU" smtClean="0"/>
-              <a:t>2026. 02. 22.</a:t>
+              <a:t>2026. 02. 28.</a:t>
             </a:fld>
             <a:endParaRPr lang="hu-HU"/>
           </a:p>
@@ -1430,13 +3493,7 @@
       </p:sp>
       <p:sp>
         <p:nvSpPr>
-          <p:cNvPr id="6" name="Élőláb helye 5">
-            <a:extLst>
-              <a:ext uri="{FF2B5EF4-FFF2-40B4-BE49-F238E27FC236}">
-                <a16:creationId xmlns:a16="http://schemas.microsoft.com/office/drawing/2014/main" id="{32600B24-0044-5882-2B50-647405FC1E1F}"/>
-              </a:ext>
-            </a:extLst>
-          </p:cNvPr>
+          <p:cNvPr id="6" name="Footer Placeholder 5"/>
           <p:cNvSpPr>
             <a:spLocks noGrp="1"/>
           </p:cNvSpPr>
@@ -1455,13 +3512,7 @@
       </p:sp>
       <p:sp>
         <p:nvSpPr>
-          <p:cNvPr id="7" name="Dia számának helye 6">
-            <a:extLst>
-              <a:ext uri="{FF2B5EF4-FFF2-40B4-BE49-F238E27FC236}">
-                <a16:creationId xmlns:a16="http://schemas.microsoft.com/office/drawing/2014/main" id="{B4A6DE41-7DA1-6B83-2278-2F83837B61EE}"/>
-              </a:ext>
-            </a:extLst>
-          </p:cNvPr>
+          <p:cNvPr id="7" name="Slide Number Placeholder 6"/>
           <p:cNvSpPr>
             <a:spLocks noGrp="1"/>
           </p:cNvSpPr>
@@ -1485,7 +3536,7 @@
     </p:spTree>
     <p:extLst>
       <p:ext uri="{BB962C8B-B14F-4D97-AF65-F5344CB8AC3E}">
-        <p14:creationId xmlns:p14="http://schemas.microsoft.com/office/powerpoint/2010/main" val="4034665940"/>
+        <p14:creationId xmlns:p14="http://schemas.microsoft.com/office/powerpoint/2010/main" val="2844999504"/>
       </p:ext>
     </p:extLst>
   </p:cSld>
@@ -1514,65 +3565,55 @@
       </p:grpSpPr>
       <p:sp>
         <p:nvSpPr>
-          <p:cNvPr id="2" name="Cím 1">
-            <a:extLst>
-              <a:ext uri="{FF2B5EF4-FFF2-40B4-BE49-F238E27FC236}">
-                <a16:creationId xmlns:a16="http://schemas.microsoft.com/office/drawing/2014/main" id="{90A68F72-6296-5609-F93E-CB454ECDD5DF}"/>
-              </a:ext>
-            </a:extLst>
-          </p:cNvPr>
+          <p:cNvPr id="2" name="Title 1"/>
           <p:cNvSpPr>
             <a:spLocks noGrp="1"/>
           </p:cNvSpPr>
           <p:nvPr>
             <p:ph type="title"/>
+          </p:nvPr>
+        </p:nvSpPr>
+        <p:spPr/>
+        <p:txBody>
+          <a:bodyPr/>
+          <a:lstStyle>
+            <a:lvl1pPr>
+              <a:defRPr/>
+            </a:lvl1pPr>
+          </a:lstStyle>
+          <a:p>
+            <a:r>
+              <a:rPr lang="hu-HU"/>
+              <a:t>Mintacím szerkesztése</a:t>
+            </a:r>
+            <a:endParaRPr lang="en-US" dirty="0"/>
+          </a:p>
+        </p:txBody>
+      </p:sp>
+      <p:sp>
+        <p:nvSpPr>
+          <p:cNvPr id="3" name="Text Placeholder 2"/>
+          <p:cNvSpPr>
+            <a:spLocks noGrp="1"/>
+          </p:cNvSpPr>
+          <p:nvPr>
+            <p:ph type="body" idx="1"/>
           </p:nvPr>
         </p:nvSpPr>
         <p:spPr>
           <a:xfrm>
-            <a:off x="839788" y="365125"/>
-            <a:ext cx="10515600" cy="1325563"/>
+            <a:off x="675745" y="2160983"/>
+            <a:ext cx="4185623" cy="576262"/>
           </a:xfrm>
         </p:spPr>
         <p:txBody>
-          <a:bodyPr/>
-          <a:lstStyle/>
-          <a:p>
-            <a:r>
-              <a:rPr lang="hu-HU"/>
-              <a:t>Mintacím szerkesztése</a:t>
-            </a:r>
-          </a:p>
-        </p:txBody>
-      </p:sp>
-      <p:sp>
-        <p:nvSpPr>
-          <p:cNvPr id="3" name="Szöveg helye 2">
-            <a:extLst>
-              <a:ext uri="{FF2B5EF4-FFF2-40B4-BE49-F238E27FC236}">
-                <a16:creationId xmlns:a16="http://schemas.microsoft.com/office/drawing/2014/main" id="{2133DF61-80F8-14D2-5BCA-32FC9724415D}"/>
-              </a:ext>
-            </a:extLst>
-          </p:cNvPr>
-          <p:cNvSpPr>
-            <a:spLocks noGrp="1"/>
-          </p:cNvSpPr>
-          <p:nvPr>
-            <p:ph type="body" idx="1"/>
-          </p:nvPr>
-        </p:nvSpPr>
-        <p:spPr>
-          <a:xfrm>
-            <a:off x="839788" y="1681163"/>
-            <a:ext cx="5157787" cy="823912"/>
-          </a:xfrm>
-        </p:spPr>
-        <p:txBody>
-          <a:bodyPr anchor="b"/>
+          <a:bodyPr anchor="b">
+            <a:noAutofit/>
+          </a:bodyPr>
           <a:lstStyle>
             <a:lvl1pPr marL="0" indent="0">
               <a:buNone/>
-              <a:defRPr sz="2400" b="1"/>
+              <a:defRPr sz="2400" b="0"/>
             </a:lvl1pPr>
             <a:lvl2pPr marL="457200" indent="0">
               <a:buNone/>
@@ -1618,13 +3659,7 @@
       </p:sp>
       <p:sp>
         <p:nvSpPr>
-          <p:cNvPr id="4" name="Tartalom helye 3">
-            <a:extLst>
-              <a:ext uri="{FF2B5EF4-FFF2-40B4-BE49-F238E27FC236}">
-                <a16:creationId xmlns:a16="http://schemas.microsoft.com/office/drawing/2014/main" id="{D8716D43-B615-1FB4-B40A-65EB0FBCFEC2}"/>
-              </a:ext>
-            </a:extLst>
-          </p:cNvPr>
+          <p:cNvPr id="4" name="Content Placeholder 3"/>
           <p:cNvSpPr>
             <a:spLocks noGrp="1"/>
           </p:cNvSpPr>
@@ -1634,12 +3669,14 @@
         </p:nvSpPr>
         <p:spPr>
           <a:xfrm>
-            <a:off x="839788" y="2505075"/>
-            <a:ext cx="5157787" cy="3684588"/>
+            <a:off x="675745" y="2737245"/>
+            <a:ext cx="4185623" cy="3304117"/>
           </a:xfrm>
         </p:spPr>
         <p:txBody>
-          <a:bodyPr/>
+          <a:bodyPr>
+            <a:normAutofit/>
+          </a:bodyPr>
           <a:lstStyle/>
           <a:p>
             <a:pPr lvl="0"/>
@@ -1675,18 +3712,13 @@
               <a:rPr lang="hu-HU"/>
               <a:t>Ötödik szint</a:t>
             </a:r>
-          </a:p>
-        </p:txBody>
-      </p:sp>
-      <p:sp>
-        <p:nvSpPr>
-          <p:cNvPr id="5" name="Szöveg helye 4">
-            <a:extLst>
-              <a:ext uri="{FF2B5EF4-FFF2-40B4-BE49-F238E27FC236}">
-                <a16:creationId xmlns:a16="http://schemas.microsoft.com/office/drawing/2014/main" id="{6D1F86E9-6ED7-D558-6451-94EE474E98CD}"/>
-              </a:ext>
-            </a:extLst>
-          </p:cNvPr>
+            <a:endParaRPr lang="en-US" dirty="0"/>
+          </a:p>
+        </p:txBody>
+      </p:sp>
+      <p:sp>
+        <p:nvSpPr>
+          <p:cNvPr id="5" name="Text Placeholder 4"/>
           <p:cNvSpPr>
             <a:spLocks noGrp="1"/>
           </p:cNvSpPr>
@@ -1696,16 +3728,18 @@
         </p:nvSpPr>
         <p:spPr>
           <a:xfrm>
-            <a:off x="6172200" y="1681163"/>
-            <a:ext cx="5183188" cy="823912"/>
+            <a:off x="5088383" y="2160983"/>
+            <a:ext cx="4185618" cy="576262"/>
           </a:xfrm>
         </p:spPr>
         <p:txBody>
-          <a:bodyPr anchor="b"/>
+          <a:bodyPr anchor="b">
+            <a:noAutofit/>
+          </a:bodyPr>
           <a:lstStyle>
             <a:lvl1pPr marL="0" indent="0">
               <a:buNone/>
-              <a:defRPr sz="2400" b="1"/>
+              <a:defRPr sz="2400" b="0"/>
             </a:lvl1pPr>
             <a:lvl2pPr marL="457200" indent="0">
               <a:buNone/>
@@ -1751,13 +3785,7 @@
       </p:sp>
       <p:sp>
         <p:nvSpPr>
-          <p:cNvPr id="6" name="Tartalom helye 5">
-            <a:extLst>
-              <a:ext uri="{FF2B5EF4-FFF2-40B4-BE49-F238E27FC236}">
-                <a16:creationId xmlns:a16="http://schemas.microsoft.com/office/drawing/2014/main" id="{B2AE136D-C5BD-C1D7-FFFD-60DC09EBA502}"/>
-              </a:ext>
-            </a:extLst>
-          </p:cNvPr>
+          <p:cNvPr id="6" name="Content Placeholder 5"/>
           <p:cNvSpPr>
             <a:spLocks noGrp="1"/>
           </p:cNvSpPr>
@@ -1767,12 +3795,14 @@
         </p:nvSpPr>
         <p:spPr>
           <a:xfrm>
-            <a:off x="6172200" y="2505075"/>
-            <a:ext cx="5183188" cy="3684588"/>
+            <a:off x="5088384" y="2737245"/>
+            <a:ext cx="4185617" cy="3304117"/>
           </a:xfrm>
         </p:spPr>
         <p:txBody>
-          <a:bodyPr/>
+          <a:bodyPr>
+            <a:normAutofit/>
+          </a:bodyPr>
           <a:lstStyle/>
           <a:p>
             <a:pPr lvl="0"/>
@@ -1808,18 +3838,13 @@
               <a:rPr lang="hu-HU"/>
               <a:t>Ötödik szint</a:t>
             </a:r>
-          </a:p>
-        </p:txBody>
-      </p:sp>
-      <p:sp>
-        <p:nvSpPr>
-          <p:cNvPr id="7" name="Dátum helye 6">
-            <a:extLst>
-              <a:ext uri="{FF2B5EF4-FFF2-40B4-BE49-F238E27FC236}">
-                <a16:creationId xmlns:a16="http://schemas.microsoft.com/office/drawing/2014/main" id="{7EB76A56-EA21-7EAD-7B13-3C8068937296}"/>
-              </a:ext>
-            </a:extLst>
-          </p:cNvPr>
+            <a:endParaRPr lang="en-US" dirty="0"/>
+          </a:p>
+        </p:txBody>
+      </p:sp>
+      <p:sp>
+        <p:nvSpPr>
+          <p:cNvPr id="7" name="Date Placeholder 6"/>
           <p:cNvSpPr>
             <a:spLocks noGrp="1"/>
           </p:cNvSpPr>
@@ -1834,7 +3859,7 @@
           <a:p>
             <a:fld id="{0D24984B-60F3-4F71-B66E-41FD97B97414}" type="datetimeFigureOut">
               <a:rPr lang="hu-HU" smtClean="0"/>
-              <a:t>2026. 02. 22.</a:t>
+              <a:t>2026. 02. 28.</a:t>
             </a:fld>
             <a:endParaRPr lang="hu-HU"/>
           </a:p>
@@ -1842,13 +3867,7 @@
       </p:sp>
       <p:sp>
         <p:nvSpPr>
-          <p:cNvPr id="8" name="Élőláb helye 7">
-            <a:extLst>
-              <a:ext uri="{FF2B5EF4-FFF2-40B4-BE49-F238E27FC236}">
-                <a16:creationId xmlns:a16="http://schemas.microsoft.com/office/drawing/2014/main" id="{C4EE65CC-C673-9D46-AFE5-4AB7E517C338}"/>
-              </a:ext>
-            </a:extLst>
-          </p:cNvPr>
+          <p:cNvPr id="8" name="Footer Placeholder 7"/>
           <p:cNvSpPr>
             <a:spLocks noGrp="1"/>
           </p:cNvSpPr>
@@ -1867,13 +3886,7 @@
       </p:sp>
       <p:sp>
         <p:nvSpPr>
-          <p:cNvPr id="9" name="Dia számának helye 8">
-            <a:extLst>
-              <a:ext uri="{FF2B5EF4-FFF2-40B4-BE49-F238E27FC236}">
-                <a16:creationId xmlns:a16="http://schemas.microsoft.com/office/drawing/2014/main" id="{3F263AC6-4D6E-C695-B88F-107291A0384D}"/>
-              </a:ext>
-            </a:extLst>
-          </p:cNvPr>
+          <p:cNvPr id="9" name="Slide Number Placeholder 8"/>
           <p:cNvSpPr>
             <a:spLocks noGrp="1"/>
           </p:cNvSpPr>
@@ -1897,7 +3910,7 @@
     </p:spTree>
     <p:extLst>
       <p:ext uri="{BB962C8B-B14F-4D97-AF65-F5344CB8AC3E}">
-        <p14:creationId xmlns:p14="http://schemas.microsoft.com/office/powerpoint/2010/main" val="930922711"/>
+        <p14:creationId xmlns:p14="http://schemas.microsoft.com/office/powerpoint/2010/main" val="3680447871"/>
       </p:ext>
     </p:extLst>
   </p:cSld>
@@ -1926,13 +3939,7 @@
       </p:grpSpPr>
       <p:sp>
         <p:nvSpPr>
-          <p:cNvPr id="2" name="Cím 1">
-            <a:extLst>
-              <a:ext uri="{FF2B5EF4-FFF2-40B4-BE49-F238E27FC236}">
-                <a16:creationId xmlns:a16="http://schemas.microsoft.com/office/drawing/2014/main" id="{9AD50565-5478-C106-D3C0-AE704F069FB4}"/>
-              </a:ext>
-            </a:extLst>
-          </p:cNvPr>
+          <p:cNvPr id="2" name="Title 1"/>
           <p:cNvSpPr>
             <a:spLocks noGrp="1"/>
           </p:cNvSpPr>
@@ -1940,7 +3947,12 @@
             <p:ph type="title"/>
           </p:nvPr>
         </p:nvSpPr>
-        <p:spPr/>
+        <p:spPr>
+          <a:xfrm>
+            <a:off x="677334" y="609600"/>
+            <a:ext cx="8596668" cy="1320800"/>
+          </a:xfrm>
+        </p:spPr>
         <p:txBody>
           <a:bodyPr/>
           <a:lstStyle/>
@@ -1949,18 +3961,13 @@
               <a:rPr lang="hu-HU"/>
               <a:t>Mintacím szerkesztése</a:t>
             </a:r>
-          </a:p>
-        </p:txBody>
-      </p:sp>
-      <p:sp>
-        <p:nvSpPr>
-          <p:cNvPr id="3" name="Dátum helye 2">
-            <a:extLst>
-              <a:ext uri="{FF2B5EF4-FFF2-40B4-BE49-F238E27FC236}">
-                <a16:creationId xmlns:a16="http://schemas.microsoft.com/office/drawing/2014/main" id="{561CF776-EA1D-4A04-67AE-7FA6C7FE44B6}"/>
-              </a:ext>
-            </a:extLst>
-          </p:cNvPr>
+            <a:endParaRPr lang="en-US" dirty="0"/>
+          </a:p>
+        </p:txBody>
+      </p:sp>
+      <p:sp>
+        <p:nvSpPr>
+          <p:cNvPr id="3" name="Date Placeholder 2"/>
           <p:cNvSpPr>
             <a:spLocks noGrp="1"/>
           </p:cNvSpPr>
@@ -1975,7 +3982,7 @@
           <a:p>
             <a:fld id="{0D24984B-60F3-4F71-B66E-41FD97B97414}" type="datetimeFigureOut">
               <a:rPr lang="hu-HU" smtClean="0"/>
-              <a:t>2026. 02. 22.</a:t>
+              <a:t>2026. 02. 28.</a:t>
             </a:fld>
             <a:endParaRPr lang="hu-HU"/>
           </a:p>
@@ -1983,13 +3990,7 @@
       </p:sp>
       <p:sp>
         <p:nvSpPr>
-          <p:cNvPr id="4" name="Élőláb helye 3">
-            <a:extLst>
-              <a:ext uri="{FF2B5EF4-FFF2-40B4-BE49-F238E27FC236}">
-                <a16:creationId xmlns:a16="http://schemas.microsoft.com/office/drawing/2014/main" id="{C086DE7E-06CA-7D5A-4437-0E459C6EB4EC}"/>
-              </a:ext>
-            </a:extLst>
-          </p:cNvPr>
+          <p:cNvPr id="4" name="Footer Placeholder 3"/>
           <p:cNvSpPr>
             <a:spLocks noGrp="1"/>
           </p:cNvSpPr>
@@ -2008,13 +4009,7 @@
       </p:sp>
       <p:sp>
         <p:nvSpPr>
-          <p:cNvPr id="5" name="Dia számának helye 4">
-            <a:extLst>
-              <a:ext uri="{FF2B5EF4-FFF2-40B4-BE49-F238E27FC236}">
-                <a16:creationId xmlns:a16="http://schemas.microsoft.com/office/drawing/2014/main" id="{360B5EE6-07CD-776D-43F0-985042D7EF7F}"/>
-              </a:ext>
-            </a:extLst>
-          </p:cNvPr>
+          <p:cNvPr id="5" name="Slide Number Placeholder 4"/>
           <p:cNvSpPr>
             <a:spLocks noGrp="1"/>
           </p:cNvSpPr>
@@ -2038,7 +4033,7 @@
     </p:spTree>
     <p:extLst>
       <p:ext uri="{BB962C8B-B14F-4D97-AF65-F5344CB8AC3E}">
-        <p14:creationId xmlns:p14="http://schemas.microsoft.com/office/powerpoint/2010/main" val="1125193986"/>
+        <p14:creationId xmlns:p14="http://schemas.microsoft.com/office/powerpoint/2010/main" val="2829396028"/>
       </p:ext>
     </p:extLst>
   </p:cSld>
@@ -2067,13 +4062,7 @@
       </p:grpSpPr>
       <p:sp>
         <p:nvSpPr>
-          <p:cNvPr id="2" name="Dátum helye 1">
-            <a:extLst>
-              <a:ext uri="{FF2B5EF4-FFF2-40B4-BE49-F238E27FC236}">
-                <a16:creationId xmlns:a16="http://schemas.microsoft.com/office/drawing/2014/main" id="{E2E6AF1C-25C6-19C5-34B5-A3E258086B33}"/>
-              </a:ext>
-            </a:extLst>
-          </p:cNvPr>
+          <p:cNvPr id="2" name="Date Placeholder 1"/>
           <p:cNvSpPr>
             <a:spLocks noGrp="1"/>
           </p:cNvSpPr>
@@ -2088,7 +4077,7 @@
           <a:p>
             <a:fld id="{0D24984B-60F3-4F71-B66E-41FD97B97414}" type="datetimeFigureOut">
               <a:rPr lang="hu-HU" smtClean="0"/>
-              <a:t>2026. 02. 22.</a:t>
+              <a:t>2026. 02. 28.</a:t>
             </a:fld>
             <a:endParaRPr lang="hu-HU"/>
           </a:p>
@@ -2096,13 +4085,7 @@
       </p:sp>
       <p:sp>
         <p:nvSpPr>
-          <p:cNvPr id="3" name="Élőláb helye 2">
-            <a:extLst>
-              <a:ext uri="{FF2B5EF4-FFF2-40B4-BE49-F238E27FC236}">
-                <a16:creationId xmlns:a16="http://schemas.microsoft.com/office/drawing/2014/main" id="{AFC4FC15-F98C-F7F8-7875-C0A582FE9DA5}"/>
-              </a:ext>
-            </a:extLst>
-          </p:cNvPr>
+          <p:cNvPr id="3" name="Footer Placeholder 2"/>
           <p:cNvSpPr>
             <a:spLocks noGrp="1"/>
           </p:cNvSpPr>
@@ -2121,13 +4104,7 @@
       </p:sp>
       <p:sp>
         <p:nvSpPr>
-          <p:cNvPr id="4" name="Dia számának helye 3">
-            <a:extLst>
-              <a:ext uri="{FF2B5EF4-FFF2-40B4-BE49-F238E27FC236}">
-                <a16:creationId xmlns:a16="http://schemas.microsoft.com/office/drawing/2014/main" id="{E59970D7-80E7-5DC1-0530-038CEE6F1B36}"/>
-              </a:ext>
-            </a:extLst>
-          </p:cNvPr>
+          <p:cNvPr id="4" name="Slide Number Placeholder 3"/>
           <p:cNvSpPr>
             <a:spLocks noGrp="1"/>
           </p:cNvSpPr>
@@ -2151,7 +4128,7 @@
     </p:spTree>
     <p:extLst>
       <p:ext uri="{BB962C8B-B14F-4D97-AF65-F5344CB8AC3E}">
-        <p14:creationId xmlns:p14="http://schemas.microsoft.com/office/powerpoint/2010/main" val="343018940"/>
+        <p14:creationId xmlns:p14="http://schemas.microsoft.com/office/powerpoint/2010/main" val="2271410285"/>
       </p:ext>
     </p:extLst>
   </p:cSld>
@@ -2180,13 +4157,7 @@
       </p:grpSpPr>
       <p:sp>
         <p:nvSpPr>
-          <p:cNvPr id="2" name="Cím 1">
-            <a:extLst>
-              <a:ext uri="{FF2B5EF4-FFF2-40B4-BE49-F238E27FC236}">
-                <a16:creationId xmlns:a16="http://schemas.microsoft.com/office/drawing/2014/main" id="{BAD6FF96-8F38-557A-DA6C-223F358BCA83}"/>
-              </a:ext>
-            </a:extLst>
-          </p:cNvPr>
+          <p:cNvPr id="2" name="Title 1"/>
           <p:cNvSpPr>
             <a:spLocks noGrp="1"/>
           </p:cNvSpPr>
@@ -2196,15 +4167,17 @@
         </p:nvSpPr>
         <p:spPr>
           <a:xfrm>
-            <a:off x="839788" y="457200"/>
-            <a:ext cx="3932237" cy="1600200"/>
+            <a:off x="677334" y="1498604"/>
+            <a:ext cx="3854528" cy="1278466"/>
           </a:xfrm>
         </p:spPr>
         <p:txBody>
-          <a:bodyPr anchor="b"/>
+          <a:bodyPr anchor="b">
+            <a:normAutofit/>
+          </a:bodyPr>
           <a:lstStyle>
             <a:lvl1pPr>
-              <a:defRPr sz="3200"/>
+              <a:defRPr sz="2000"/>
             </a:lvl1pPr>
           </a:lstStyle>
           <a:p>
@@ -2212,18 +4185,13 @@
               <a:rPr lang="hu-HU"/>
               <a:t>Mintacím szerkesztése</a:t>
             </a:r>
-          </a:p>
-        </p:txBody>
-      </p:sp>
-      <p:sp>
-        <p:nvSpPr>
-          <p:cNvPr id="3" name="Tartalom helye 2">
-            <a:extLst>
-              <a:ext uri="{FF2B5EF4-FFF2-40B4-BE49-F238E27FC236}">
-                <a16:creationId xmlns:a16="http://schemas.microsoft.com/office/drawing/2014/main" id="{8F8F7C06-99AC-A283-E7A1-2113DB199A9A}"/>
-              </a:ext>
-            </a:extLst>
-          </p:cNvPr>
+            <a:endParaRPr lang="en-US" dirty="0"/>
+          </a:p>
+        </p:txBody>
+      </p:sp>
+      <p:sp>
+        <p:nvSpPr>
+          <p:cNvPr id="3" name="Content Placeholder 2"/>
           <p:cNvSpPr>
             <a:spLocks noGrp="1"/>
           </p:cNvSpPr>
@@ -2233,41 +4201,15 @@
         </p:nvSpPr>
         <p:spPr>
           <a:xfrm>
-            <a:off x="5183188" y="987425"/>
-            <a:ext cx="6172200" cy="4873625"/>
+            <a:off x="4760461" y="514924"/>
+            <a:ext cx="4513541" cy="5526437"/>
           </a:xfrm>
         </p:spPr>
         <p:txBody>
-          <a:bodyPr/>
-          <a:lstStyle>
-            <a:lvl1pPr>
-              <a:defRPr sz="3200"/>
-            </a:lvl1pPr>
-            <a:lvl2pPr>
-              <a:defRPr sz="2800"/>
-            </a:lvl2pPr>
-            <a:lvl3pPr>
-              <a:defRPr sz="2400"/>
-            </a:lvl3pPr>
-            <a:lvl4pPr>
-              <a:defRPr sz="2000"/>
-            </a:lvl4pPr>
-            <a:lvl5pPr>
-              <a:defRPr sz="2000"/>
-            </a:lvl5pPr>
-            <a:lvl6pPr>
-              <a:defRPr sz="2000"/>
-            </a:lvl6pPr>
-            <a:lvl7pPr>
-              <a:defRPr sz="2000"/>
-            </a:lvl7pPr>
-            <a:lvl8pPr>
-              <a:defRPr sz="2000"/>
-            </a:lvl8pPr>
-            <a:lvl9pPr>
-              <a:defRPr sz="2000"/>
-            </a:lvl9pPr>
-          </a:lstStyle>
+          <a:bodyPr>
+            <a:normAutofit/>
+          </a:bodyPr>
+          <a:lstStyle/>
           <a:p>
             <a:pPr lvl="0"/>
             <a:r>
@@ -2302,18 +4244,13 @@
               <a:rPr lang="hu-HU"/>
               <a:t>Ötödik szint</a:t>
             </a:r>
-          </a:p>
-        </p:txBody>
-      </p:sp>
-      <p:sp>
-        <p:nvSpPr>
-          <p:cNvPr id="4" name="Szöveg helye 3">
-            <a:extLst>
-              <a:ext uri="{FF2B5EF4-FFF2-40B4-BE49-F238E27FC236}">
-                <a16:creationId xmlns:a16="http://schemas.microsoft.com/office/drawing/2014/main" id="{E1182090-EDD1-B3B1-BD35-BF45200D6036}"/>
-              </a:ext>
-            </a:extLst>
-          </p:cNvPr>
+            <a:endParaRPr lang="en-US" dirty="0"/>
+          </a:p>
+        </p:txBody>
+      </p:sp>
+      <p:sp>
+        <p:nvSpPr>
+          <p:cNvPr id="4" name="Text Placeholder 3"/>
           <p:cNvSpPr>
             <a:spLocks noGrp="1"/>
           </p:cNvSpPr>
@@ -2323,46 +4260,48 @@
         </p:nvSpPr>
         <p:spPr>
           <a:xfrm>
-            <a:off x="839788" y="2057400"/>
-            <a:ext cx="3932237" cy="3811588"/>
+            <a:off x="677334" y="2777069"/>
+            <a:ext cx="3854528" cy="2584449"/>
           </a:xfrm>
         </p:spPr>
         <p:txBody>
-          <a:bodyPr/>
+          <a:bodyPr>
+            <a:normAutofit/>
+          </a:bodyPr>
           <a:lstStyle>
             <a:lvl1pPr marL="0" indent="0">
               <a:buNone/>
-              <a:defRPr sz="1600"/>
+              <a:defRPr sz="1400"/>
             </a:lvl1pPr>
-            <a:lvl2pPr marL="457200" indent="0">
+            <a:lvl2pPr marL="457063" indent="0">
               <a:buNone/>
               <a:defRPr sz="1400"/>
             </a:lvl2pPr>
-            <a:lvl3pPr marL="914400" indent="0">
+            <a:lvl3pPr marL="914126" indent="0">
               <a:buNone/>
               <a:defRPr sz="1200"/>
             </a:lvl3pPr>
-            <a:lvl4pPr marL="1371600" indent="0">
+            <a:lvl4pPr marL="1371189" indent="0">
               <a:buNone/>
               <a:defRPr sz="1000"/>
             </a:lvl4pPr>
-            <a:lvl5pPr marL="1828800" indent="0">
+            <a:lvl5pPr marL="1828251" indent="0">
               <a:buNone/>
               <a:defRPr sz="1000"/>
             </a:lvl5pPr>
-            <a:lvl6pPr marL="2286000" indent="0">
+            <a:lvl6pPr marL="2285314" indent="0">
               <a:buNone/>
               <a:defRPr sz="1000"/>
             </a:lvl6pPr>
-            <a:lvl7pPr marL="2743200" indent="0">
+            <a:lvl7pPr marL="2742377" indent="0">
               <a:buNone/>
               <a:defRPr sz="1000"/>
             </a:lvl7pPr>
-            <a:lvl8pPr marL="3200400" indent="0">
+            <a:lvl8pPr marL="3199440" indent="0">
               <a:buNone/>
               <a:defRPr sz="1000"/>
             </a:lvl8pPr>
-            <a:lvl9pPr marL="3657600" indent="0">
+            <a:lvl9pPr marL="3656503" indent="0">
               <a:buNone/>
               <a:defRPr sz="1000"/>
             </a:lvl9pPr>
@@ -2378,13 +4317,7 @@
       </p:sp>
       <p:sp>
         <p:nvSpPr>
-          <p:cNvPr id="5" name="Dátum helye 4">
-            <a:extLst>
-              <a:ext uri="{FF2B5EF4-FFF2-40B4-BE49-F238E27FC236}">
-                <a16:creationId xmlns:a16="http://schemas.microsoft.com/office/drawing/2014/main" id="{658BBED0-9C10-AE07-72A5-C942F1714C8B}"/>
-              </a:ext>
-            </a:extLst>
-          </p:cNvPr>
+          <p:cNvPr id="5" name="Date Placeholder 4"/>
           <p:cNvSpPr>
             <a:spLocks noGrp="1"/>
           </p:cNvSpPr>
@@ -2399,7 +4332,7 @@
           <a:p>
             <a:fld id="{0D24984B-60F3-4F71-B66E-41FD97B97414}" type="datetimeFigureOut">
               <a:rPr lang="hu-HU" smtClean="0"/>
-              <a:t>2026. 02. 22.</a:t>
+              <a:t>2026. 02. 28.</a:t>
             </a:fld>
             <a:endParaRPr lang="hu-HU"/>
           </a:p>
@@ -2407,13 +4340,7 @@
       </p:sp>
       <p:sp>
         <p:nvSpPr>
-          <p:cNvPr id="6" name="Élőláb helye 5">
-            <a:extLst>
-              <a:ext uri="{FF2B5EF4-FFF2-40B4-BE49-F238E27FC236}">
-                <a16:creationId xmlns:a16="http://schemas.microsoft.com/office/drawing/2014/main" id="{907A64FE-4D0A-7CBC-5FF9-F723F9DE05A2}"/>
-              </a:ext>
-            </a:extLst>
-          </p:cNvPr>
+          <p:cNvPr id="6" name="Footer Placeholder 5"/>
           <p:cNvSpPr>
             <a:spLocks noGrp="1"/>
           </p:cNvSpPr>
@@ -2432,13 +4359,7 @@
       </p:sp>
       <p:sp>
         <p:nvSpPr>
-          <p:cNvPr id="7" name="Dia számának helye 6">
-            <a:extLst>
-              <a:ext uri="{FF2B5EF4-FFF2-40B4-BE49-F238E27FC236}">
-                <a16:creationId xmlns:a16="http://schemas.microsoft.com/office/drawing/2014/main" id="{94EFF344-1754-4259-7EC5-24C7CC14312D}"/>
-              </a:ext>
-            </a:extLst>
-          </p:cNvPr>
+          <p:cNvPr id="7" name="Slide Number Placeholder 6"/>
           <p:cNvSpPr>
             <a:spLocks noGrp="1"/>
           </p:cNvSpPr>
@@ -2462,7 +4383,7 @@
     </p:spTree>
     <p:extLst>
       <p:ext uri="{BB962C8B-B14F-4D97-AF65-F5344CB8AC3E}">
-        <p14:creationId xmlns:p14="http://schemas.microsoft.com/office/powerpoint/2010/main" val="3193930150"/>
+        <p14:creationId xmlns:p14="http://schemas.microsoft.com/office/powerpoint/2010/main" val="3931546347"/>
       </p:ext>
     </p:extLst>
   </p:cSld>
@@ -2491,13 +4412,7 @@
       </p:grpSpPr>
       <p:sp>
         <p:nvSpPr>
-          <p:cNvPr id="2" name="Cím 1">
-            <a:extLst>
-              <a:ext uri="{FF2B5EF4-FFF2-40B4-BE49-F238E27FC236}">
-                <a16:creationId xmlns:a16="http://schemas.microsoft.com/office/drawing/2014/main" id="{7AFA2C7F-CE24-F637-7969-40F2B6F24E44}"/>
-              </a:ext>
-            </a:extLst>
-          </p:cNvPr>
+          <p:cNvPr id="2" name="Title 1"/>
           <p:cNvSpPr>
             <a:spLocks noGrp="1"/>
           </p:cNvSpPr>
@@ -2507,15 +4422,17 @@
         </p:nvSpPr>
         <p:spPr>
           <a:xfrm>
-            <a:off x="839788" y="457200"/>
-            <a:ext cx="3932237" cy="1600200"/>
+            <a:off x="677334" y="4800600"/>
+            <a:ext cx="8596667" cy="566738"/>
           </a:xfrm>
         </p:spPr>
         <p:txBody>
-          <a:bodyPr anchor="b"/>
+          <a:bodyPr anchor="b">
+            <a:normAutofit/>
+          </a:bodyPr>
           <a:lstStyle>
-            <a:lvl1pPr>
-              <a:defRPr sz="3200"/>
+            <a:lvl1pPr algn="l">
+              <a:defRPr sz="2400" b="0"/>
             </a:lvl1pPr>
           </a:lstStyle>
           <a:p>
@@ -2523,20 +4440,15 @@
               <a:rPr lang="hu-HU"/>
               <a:t>Mintacím szerkesztése</a:t>
             </a:r>
-          </a:p>
-        </p:txBody>
-      </p:sp>
-      <p:sp>
-        <p:nvSpPr>
-          <p:cNvPr id="3" name="Kép helye 2">
-            <a:extLst>
-              <a:ext uri="{FF2B5EF4-FFF2-40B4-BE49-F238E27FC236}">
-                <a16:creationId xmlns:a16="http://schemas.microsoft.com/office/drawing/2014/main" id="{D39C935B-97E6-2248-F3F1-A143424B5B1D}"/>
-              </a:ext>
-            </a:extLst>
-          </p:cNvPr>
-          <p:cNvSpPr>
-            <a:spLocks noGrp="1"/>
+            <a:endParaRPr lang="en-US" dirty="0"/>
+          </a:p>
+        </p:txBody>
+      </p:sp>
+      <p:sp>
+        <p:nvSpPr>
+          <p:cNvPr id="3" name="Picture Placeholder 2"/>
+          <p:cNvSpPr>
+            <a:spLocks noGrp="1" noChangeAspect="1"/>
           </p:cNvSpPr>
           <p:nvPr>
             <p:ph type="pic" idx="1"/>
@@ -2544,118 +4456,120 @@
         </p:nvSpPr>
         <p:spPr>
           <a:xfrm>
-            <a:off x="5183188" y="987425"/>
-            <a:ext cx="6172200" cy="4873625"/>
+            <a:off x="677334" y="609600"/>
+            <a:ext cx="8596668" cy="3845718"/>
           </a:xfrm>
         </p:spPr>
         <p:txBody>
-          <a:bodyPr/>
+          <a:bodyPr anchor="t">
+            <a:normAutofit/>
+          </a:bodyPr>
           <a:lstStyle>
-            <a:lvl1pPr marL="0" indent="0">
-              <a:buNone/>
-              <a:defRPr sz="3200"/>
-            </a:lvl1pPr>
-            <a:lvl2pPr marL="457200" indent="0">
-              <a:buNone/>
-              <a:defRPr sz="2800"/>
-            </a:lvl2pPr>
-            <a:lvl3pPr marL="914400" indent="0">
-              <a:buNone/>
-              <a:defRPr sz="2400"/>
-            </a:lvl3pPr>
-            <a:lvl4pPr marL="1371600" indent="0">
-              <a:buNone/>
-              <a:defRPr sz="2000"/>
-            </a:lvl4pPr>
-            <a:lvl5pPr marL="1828800" indent="0">
-              <a:buNone/>
-              <a:defRPr sz="2000"/>
-            </a:lvl5pPr>
-            <a:lvl6pPr marL="2286000" indent="0">
-              <a:buNone/>
-              <a:defRPr sz="2000"/>
-            </a:lvl6pPr>
-            <a:lvl7pPr marL="2743200" indent="0">
-              <a:buNone/>
-              <a:defRPr sz="2000"/>
-            </a:lvl7pPr>
-            <a:lvl8pPr marL="3200400" indent="0">
-              <a:buNone/>
-              <a:defRPr sz="2000"/>
-            </a:lvl8pPr>
-            <a:lvl9pPr marL="3657600" indent="0">
-              <a:buNone/>
-              <a:defRPr sz="2000"/>
-            </a:lvl9pPr>
-          </a:lstStyle>
-          <a:p>
-            <a:endParaRPr lang="hu-HU"/>
-          </a:p>
-        </p:txBody>
-      </p:sp>
-      <p:sp>
-        <p:nvSpPr>
-          <p:cNvPr id="4" name="Szöveg helye 3">
-            <a:extLst>
-              <a:ext uri="{FF2B5EF4-FFF2-40B4-BE49-F238E27FC236}">
-                <a16:creationId xmlns:a16="http://schemas.microsoft.com/office/drawing/2014/main" id="{0D37BAA8-D189-F5E9-EFD0-B8FBCC5A71EF}"/>
-              </a:ext>
-            </a:extLst>
-          </p:cNvPr>
-          <p:cNvSpPr>
-            <a:spLocks noGrp="1"/>
-          </p:cNvSpPr>
-          <p:nvPr>
-            <p:ph type="body" sz="half" idx="2"/>
-          </p:nvPr>
-        </p:nvSpPr>
-        <p:spPr>
-          <a:xfrm>
-            <a:off x="839788" y="2057400"/>
-            <a:ext cx="3932237" cy="3811588"/>
-          </a:xfrm>
-        </p:spPr>
-        <p:txBody>
-          <a:bodyPr/>
-          <a:lstStyle>
-            <a:lvl1pPr marL="0" indent="0">
+            <a:lvl1pPr marL="0" indent="0" algn="ctr">
               <a:buNone/>
               <a:defRPr sz="1600"/>
             </a:lvl1pPr>
             <a:lvl2pPr marL="457200" indent="0">
               <a:buNone/>
-              <a:defRPr sz="1400"/>
+              <a:defRPr sz="1600"/>
             </a:lvl2pPr>
             <a:lvl3pPr marL="914400" indent="0">
               <a:buNone/>
-              <a:defRPr sz="1200"/>
+              <a:defRPr sz="1600"/>
             </a:lvl3pPr>
             <a:lvl4pPr marL="1371600" indent="0">
               <a:buNone/>
-              <a:defRPr sz="1000"/>
+              <a:defRPr sz="1600"/>
             </a:lvl4pPr>
             <a:lvl5pPr marL="1828800" indent="0">
               <a:buNone/>
-              <a:defRPr sz="1000"/>
+              <a:defRPr sz="1600"/>
             </a:lvl5pPr>
             <a:lvl6pPr marL="2286000" indent="0">
               <a:buNone/>
-              <a:defRPr sz="1000"/>
+              <a:defRPr sz="1600"/>
             </a:lvl6pPr>
             <a:lvl7pPr marL="2743200" indent="0">
               <a:buNone/>
-              <a:defRPr sz="1000"/>
+              <a:defRPr sz="1600"/>
             </a:lvl7pPr>
             <a:lvl8pPr marL="3200400" indent="0">
               <a:buNone/>
-              <a:defRPr sz="1000"/>
+              <a:defRPr sz="1600"/>
             </a:lvl8pPr>
             <a:lvl9pPr marL="3657600" indent="0">
               <a:buNone/>
-              <a:defRPr sz="1000"/>
+              <a:defRPr sz="1600"/>
             </a:lvl9pPr>
           </a:lstStyle>
           <a:p>
+            <a:r>
+              <a:rPr lang="hu-HU"/>
+              <a:t>Kép beszúrásához kattintson az ikonra</a:t>
+            </a:r>
+            <a:endParaRPr lang="en-US" dirty="0"/>
+          </a:p>
+        </p:txBody>
+      </p:sp>
+      <p:sp>
+        <p:nvSpPr>
+          <p:cNvPr id="4" name="Text Placeholder 3"/>
+          <p:cNvSpPr>
+            <a:spLocks noGrp="1"/>
+          </p:cNvSpPr>
+          <p:nvPr>
+            <p:ph type="body" sz="half" idx="2"/>
+          </p:nvPr>
+        </p:nvSpPr>
+        <p:spPr>
+          <a:xfrm>
+            <a:off x="677334" y="5367338"/>
+            <a:ext cx="8596667" cy="674024"/>
+          </a:xfrm>
+        </p:spPr>
+        <p:txBody>
+          <a:bodyPr>
+            <a:normAutofit/>
+          </a:bodyPr>
+          <a:lstStyle>
+            <a:lvl1pPr marL="0" indent="0">
+              <a:buNone/>
+              <a:defRPr sz="1200"/>
+            </a:lvl1pPr>
+            <a:lvl2pPr marL="457200" indent="0">
+              <a:buNone/>
+              <a:defRPr sz="1200"/>
+            </a:lvl2pPr>
+            <a:lvl3pPr marL="914400" indent="0">
+              <a:buNone/>
+              <a:defRPr sz="1000"/>
+            </a:lvl3pPr>
+            <a:lvl4pPr marL="1371600" indent="0">
+              <a:buNone/>
+              <a:defRPr sz="900"/>
+            </a:lvl4pPr>
+            <a:lvl5pPr marL="1828800" indent="0">
+              <a:buNone/>
+              <a:defRPr sz="900"/>
+            </a:lvl5pPr>
+            <a:lvl6pPr marL="2286000" indent="0">
+              <a:buNone/>
+              <a:defRPr sz="900"/>
+            </a:lvl6pPr>
+            <a:lvl7pPr marL="2743200" indent="0">
+              <a:buNone/>
+              <a:defRPr sz="900"/>
+            </a:lvl7pPr>
+            <a:lvl8pPr marL="3200400" indent="0">
+              <a:buNone/>
+              <a:defRPr sz="900"/>
+            </a:lvl8pPr>
+            <a:lvl9pPr marL="3657600" indent="0">
+              <a:buNone/>
+              <a:defRPr sz="900"/>
+            </a:lvl9pPr>
+          </a:lstStyle>
+          <a:p>
             <a:pPr lvl="0"/>
             <a:r>
               <a:rPr lang="hu-HU"/>
@@ -2666,18 +4580,12 @@
       </p:sp>
       <p:sp>
         <p:nvSpPr>
-          <p:cNvPr id="5" name="Dátum helye 4">
-            <a:extLst>
-              <a:ext uri="{FF2B5EF4-FFF2-40B4-BE49-F238E27FC236}">
-                <a16:creationId xmlns:a16="http://schemas.microsoft.com/office/drawing/2014/main" id="{36E68D03-6F16-3B81-A5D2-17D808C379D5}"/>
-              </a:ext>
-            </a:extLst>
-          </p:cNvPr>
-          <p:cNvSpPr>
-            <a:spLocks noGrp="1"/>
-          </p:cNvSpPr>
-          <p:nvPr>
-            <p:ph type="dt" sz="half" idx="10"/>
+          <p:cNvPr id="6" name="Footer Placeholder 5"/>
+          <p:cNvSpPr>
+            <a:spLocks noGrp="1"/>
+          </p:cNvSpPr>
+          <p:nvPr>
+            <p:ph type="ftr" sz="quarter" idx="11"/>
           </p:nvPr>
         </p:nvSpPr>
         <p:spPr/>
@@ -2685,48 +4593,13 @@
           <a:bodyPr/>
           <a:lstStyle/>
           <a:p>
-            <a:fld id="{0D24984B-60F3-4F71-B66E-41FD97B97414}" type="datetimeFigureOut">
-              <a:rPr lang="hu-HU" smtClean="0"/>
-              <a:t>2026. 02. 22.</a:t>
-            </a:fld>
             <a:endParaRPr lang="hu-HU"/>
           </a:p>
         </p:txBody>
       </p:sp>
       <p:sp>
         <p:nvSpPr>
-          <p:cNvPr id="6" name="Élőláb helye 5">
-            <a:extLst>
-              <a:ext uri="{FF2B5EF4-FFF2-40B4-BE49-F238E27FC236}">
-                <a16:creationId xmlns:a16="http://schemas.microsoft.com/office/drawing/2014/main" id="{FB62B1E2-4EC6-5D8A-E7AA-4082A8999AA7}"/>
-              </a:ext>
-            </a:extLst>
-          </p:cNvPr>
-          <p:cNvSpPr>
-            <a:spLocks noGrp="1"/>
-          </p:cNvSpPr>
-          <p:nvPr>
-            <p:ph type="ftr" sz="quarter" idx="11"/>
-          </p:nvPr>
-        </p:nvSpPr>
-        <p:spPr/>
-        <p:txBody>
-          <a:bodyPr/>
-          <a:lstStyle/>
-          <a:p>
-            <a:endParaRPr lang="hu-HU"/>
-          </a:p>
-        </p:txBody>
-      </p:sp>
-      <p:sp>
-        <p:nvSpPr>
-          <p:cNvPr id="7" name="Dia számának helye 6">
-            <a:extLst>
-              <a:ext uri="{FF2B5EF4-FFF2-40B4-BE49-F238E27FC236}">
-                <a16:creationId xmlns:a16="http://schemas.microsoft.com/office/drawing/2014/main" id="{08978ABF-6B0B-4BC7-66AA-4D7701B90177}"/>
-              </a:ext>
-            </a:extLst>
-          </p:cNvPr>
+          <p:cNvPr id="7" name="Slide Number Placeholder 6"/>
           <p:cNvSpPr>
             <a:spLocks noGrp="1"/>
           </p:cNvSpPr>
@@ -2747,10 +4620,33 @@
           </a:p>
         </p:txBody>
       </p:sp>
+      <p:sp>
+        <p:nvSpPr>
+          <p:cNvPr id="5" name="Date Placeholder 4"/>
+          <p:cNvSpPr>
+            <a:spLocks noGrp="1"/>
+          </p:cNvSpPr>
+          <p:nvPr>
+            <p:ph type="dt" sz="half" idx="10"/>
+          </p:nvPr>
+        </p:nvSpPr>
+        <p:spPr/>
+        <p:txBody>
+          <a:bodyPr/>
+          <a:lstStyle/>
+          <a:p>
+            <a:fld id="{0D24984B-60F3-4F71-B66E-41FD97B97414}" type="datetimeFigureOut">
+              <a:rPr lang="hu-HU" smtClean="0"/>
+              <a:t>2026. 02. 28.</a:t>
+            </a:fld>
+            <a:endParaRPr lang="hu-HU"/>
+          </a:p>
+        </p:txBody>
+      </p:sp>
     </p:spTree>
     <p:extLst>
       <p:ext uri="{BB962C8B-B14F-4D97-AF65-F5344CB8AC3E}">
-        <p14:creationId xmlns:p14="http://schemas.microsoft.com/office/powerpoint/2010/main" val="4196259910"/>
+        <p14:creationId xmlns:p14="http://schemas.microsoft.com/office/powerpoint/2010/main" val="272650014"/>
       </p:ext>
     </p:extLst>
   </p:cSld>
@@ -2782,15 +4678,540 @@
           <a:chExt cx="0" cy="0"/>
         </a:xfrm>
       </p:grpSpPr>
-      <p:sp>
-        <p:nvSpPr>
-          <p:cNvPr id="2" name="Cím helye 1">
-            <a:extLst>
-              <a:ext uri="{FF2B5EF4-FFF2-40B4-BE49-F238E27FC236}">
-                <a16:creationId xmlns:a16="http://schemas.microsoft.com/office/drawing/2014/main" id="{630EA28E-1BCB-B569-FCB5-9940D1732C79}"/>
-              </a:ext>
-            </a:extLst>
-          </p:cNvPr>
+      <p:grpSp>
+        <p:nvGrpSpPr>
+          <p:cNvPr id="44" name="Group 43"/>
+          <p:cNvGrpSpPr/>
+          <p:nvPr/>
+        </p:nvGrpSpPr>
+        <p:grpSpPr>
+          <a:xfrm>
+            <a:off x="0" y="-8467"/>
+            <a:ext cx="12192000" cy="6866467"/>
+            <a:chOff x="0" y="-8467"/>
+            <a:chExt cx="12192000" cy="6866467"/>
+          </a:xfrm>
+        </p:grpSpPr>
+        <p:cxnSp>
+          <p:nvCxnSpPr>
+            <p:cNvPr id="20" name="Straight Connector 19"/>
+            <p:cNvCxnSpPr/>
+            <p:nvPr/>
+          </p:nvCxnSpPr>
+          <p:spPr>
+            <a:xfrm>
+              <a:off x="9371012" y="0"/>
+              <a:ext cx="1219200" cy="6858000"/>
+            </a:xfrm>
+            <a:prstGeom prst="line">
+              <a:avLst/>
+            </a:prstGeom>
+            <a:ln w="9525">
+              <a:solidFill>
+                <a:schemeClr val="accent1">
+                  <a:alpha val="70000"/>
+                </a:schemeClr>
+              </a:solidFill>
+            </a:ln>
+          </p:spPr>
+          <p:style>
+            <a:lnRef idx="2">
+              <a:schemeClr val="accent1"/>
+            </a:lnRef>
+            <a:fillRef idx="0">
+              <a:schemeClr val="accent1"/>
+            </a:fillRef>
+            <a:effectRef idx="1">
+              <a:schemeClr val="accent1"/>
+            </a:effectRef>
+            <a:fontRef idx="minor">
+              <a:schemeClr val="tx1"/>
+            </a:fontRef>
+          </p:style>
+        </p:cxnSp>
+        <p:cxnSp>
+          <p:nvCxnSpPr>
+            <p:cNvPr id="21" name="Straight Connector 20"/>
+            <p:cNvCxnSpPr/>
+            <p:nvPr/>
+          </p:nvCxnSpPr>
+          <p:spPr>
+            <a:xfrm flipH="1">
+              <a:off x="7425267" y="3681413"/>
+              <a:ext cx="4763558" cy="3176587"/>
+            </a:xfrm>
+            <a:prstGeom prst="line">
+              <a:avLst/>
+            </a:prstGeom>
+            <a:ln w="9525">
+              <a:solidFill>
+                <a:schemeClr val="accent1">
+                  <a:alpha val="70000"/>
+                </a:schemeClr>
+              </a:solidFill>
+            </a:ln>
+          </p:spPr>
+          <p:style>
+            <a:lnRef idx="2">
+              <a:schemeClr val="accent1"/>
+            </a:lnRef>
+            <a:fillRef idx="0">
+              <a:schemeClr val="accent1"/>
+            </a:fillRef>
+            <a:effectRef idx="1">
+              <a:schemeClr val="accent1"/>
+            </a:effectRef>
+            <a:fontRef idx="minor">
+              <a:schemeClr val="tx1"/>
+            </a:fontRef>
+          </p:style>
+        </p:cxnSp>
+        <p:sp>
+          <p:nvSpPr>
+            <p:cNvPr id="22" name="Rectangle 23"/>
+            <p:cNvSpPr/>
+            <p:nvPr/>
+          </p:nvSpPr>
+          <p:spPr>
+            <a:xfrm>
+              <a:off x="9181476" y="-8467"/>
+              <a:ext cx="3007349" cy="6866467"/>
+            </a:xfrm>
+            <a:custGeom>
+              <a:avLst/>
+              <a:gdLst/>
+              <a:ahLst/>
+              <a:cxnLst/>
+              <a:rect l="l" t="t" r="r" b="b"/>
+              <a:pathLst>
+                <a:path w="3007349" h="6866467">
+                  <a:moveTo>
+                    <a:pt x="2045532" y="0"/>
+                  </a:moveTo>
+                  <a:lnTo>
+                    <a:pt x="3007349" y="0"/>
+                  </a:lnTo>
+                  <a:lnTo>
+                    <a:pt x="3007349" y="6866467"/>
+                  </a:lnTo>
+                  <a:lnTo>
+                    <a:pt x="0" y="6866467"/>
+                  </a:lnTo>
+                  <a:lnTo>
+                    <a:pt x="2045532" y="0"/>
+                  </a:lnTo>
+                  <a:close/>
+                </a:path>
+              </a:pathLst>
+            </a:custGeom>
+            <a:solidFill>
+              <a:schemeClr val="accent1">
+                <a:alpha val="36000"/>
+              </a:schemeClr>
+            </a:solidFill>
+            <a:ln>
+              <a:noFill/>
+            </a:ln>
+            <a:effectLst/>
+          </p:spPr>
+          <p:style>
+            <a:lnRef idx="1">
+              <a:schemeClr val="accent1"/>
+            </a:lnRef>
+            <a:fillRef idx="3">
+              <a:schemeClr val="accent1"/>
+            </a:fillRef>
+            <a:effectRef idx="2">
+              <a:schemeClr val="accent1"/>
+            </a:effectRef>
+            <a:fontRef idx="minor">
+              <a:schemeClr val="lt1"/>
+            </a:fontRef>
+          </p:style>
+        </p:sp>
+        <p:sp>
+          <p:nvSpPr>
+            <p:cNvPr id="23" name="Rectangle 25"/>
+            <p:cNvSpPr/>
+            <p:nvPr/>
+          </p:nvSpPr>
+          <p:spPr>
+            <a:xfrm>
+              <a:off x="9603442" y="-8467"/>
+              <a:ext cx="2588558" cy="6866467"/>
+            </a:xfrm>
+            <a:custGeom>
+              <a:avLst/>
+              <a:gdLst/>
+              <a:ahLst/>
+              <a:cxnLst/>
+              <a:rect l="l" t="t" r="r" b="b"/>
+              <a:pathLst>
+                <a:path w="2573311" h="6866467">
+                  <a:moveTo>
+                    <a:pt x="0" y="0"/>
+                  </a:moveTo>
+                  <a:lnTo>
+                    <a:pt x="2573311" y="0"/>
+                  </a:lnTo>
+                  <a:lnTo>
+                    <a:pt x="2573311" y="6866467"/>
+                  </a:lnTo>
+                  <a:lnTo>
+                    <a:pt x="1202336" y="6866467"/>
+                  </a:lnTo>
+                  <a:lnTo>
+                    <a:pt x="0" y="0"/>
+                  </a:lnTo>
+                  <a:close/>
+                </a:path>
+              </a:pathLst>
+            </a:custGeom>
+            <a:solidFill>
+              <a:schemeClr val="accent1">
+                <a:alpha val="20000"/>
+              </a:schemeClr>
+            </a:solidFill>
+            <a:ln>
+              <a:noFill/>
+            </a:ln>
+            <a:effectLst/>
+          </p:spPr>
+          <p:style>
+            <a:lnRef idx="1">
+              <a:schemeClr val="accent1"/>
+            </a:lnRef>
+            <a:fillRef idx="3">
+              <a:schemeClr val="accent1"/>
+            </a:fillRef>
+            <a:effectRef idx="2">
+              <a:schemeClr val="accent1"/>
+            </a:effectRef>
+            <a:fontRef idx="minor">
+              <a:schemeClr val="lt1"/>
+            </a:fontRef>
+          </p:style>
+        </p:sp>
+        <p:sp>
+          <p:nvSpPr>
+            <p:cNvPr id="24" name="Isosceles Triangle 23"/>
+            <p:cNvSpPr/>
+            <p:nvPr/>
+          </p:nvSpPr>
+          <p:spPr>
+            <a:xfrm>
+              <a:off x="8932333" y="3048000"/>
+              <a:ext cx="3259667" cy="3810000"/>
+            </a:xfrm>
+            <a:prstGeom prst="triangle">
+              <a:avLst>
+                <a:gd name="adj" fmla="val 100000"/>
+              </a:avLst>
+            </a:prstGeom>
+            <a:solidFill>
+              <a:schemeClr val="accent1">
+                <a:lumMod val="75000"/>
+                <a:alpha val="66000"/>
+              </a:schemeClr>
+            </a:solidFill>
+            <a:ln>
+              <a:noFill/>
+            </a:ln>
+            <a:effectLst/>
+          </p:spPr>
+          <p:style>
+            <a:lnRef idx="1">
+              <a:schemeClr val="accent1"/>
+            </a:lnRef>
+            <a:fillRef idx="3">
+              <a:schemeClr val="accent1"/>
+            </a:fillRef>
+            <a:effectRef idx="2">
+              <a:schemeClr val="accent1"/>
+            </a:effectRef>
+            <a:fontRef idx="minor">
+              <a:schemeClr val="lt1"/>
+            </a:fontRef>
+          </p:style>
+        </p:sp>
+        <p:sp>
+          <p:nvSpPr>
+            <p:cNvPr id="25" name="Rectangle 27"/>
+            <p:cNvSpPr/>
+            <p:nvPr/>
+          </p:nvSpPr>
+          <p:spPr>
+            <a:xfrm>
+              <a:off x="9334500" y="-8467"/>
+              <a:ext cx="2854326" cy="6866467"/>
+            </a:xfrm>
+            <a:custGeom>
+              <a:avLst/>
+              <a:gdLst/>
+              <a:ahLst/>
+              <a:cxnLst/>
+              <a:rect l="l" t="t" r="r" b="b"/>
+              <a:pathLst>
+                <a:path w="2858013" h="6866467">
+                  <a:moveTo>
+                    <a:pt x="0" y="0"/>
+                  </a:moveTo>
+                  <a:lnTo>
+                    <a:pt x="2858013" y="0"/>
+                  </a:lnTo>
+                  <a:lnTo>
+                    <a:pt x="2858013" y="6866467"/>
+                  </a:lnTo>
+                  <a:lnTo>
+                    <a:pt x="2473942" y="6866467"/>
+                  </a:lnTo>
+                  <a:lnTo>
+                    <a:pt x="0" y="0"/>
+                  </a:lnTo>
+                  <a:close/>
+                </a:path>
+              </a:pathLst>
+            </a:custGeom>
+            <a:solidFill>
+              <a:schemeClr val="accent1">
+                <a:lumMod val="75000"/>
+                <a:alpha val="50000"/>
+              </a:schemeClr>
+            </a:solidFill>
+            <a:ln>
+              <a:noFill/>
+            </a:ln>
+            <a:effectLst/>
+          </p:spPr>
+          <p:style>
+            <a:lnRef idx="1">
+              <a:schemeClr val="accent1"/>
+            </a:lnRef>
+            <a:fillRef idx="3">
+              <a:schemeClr val="accent1"/>
+            </a:fillRef>
+            <a:effectRef idx="2">
+              <a:schemeClr val="accent1"/>
+            </a:effectRef>
+            <a:fontRef idx="minor">
+              <a:schemeClr val="lt1"/>
+            </a:fontRef>
+          </p:style>
+        </p:sp>
+        <p:sp>
+          <p:nvSpPr>
+            <p:cNvPr id="26" name="Rectangle 28"/>
+            <p:cNvSpPr/>
+            <p:nvPr/>
+          </p:nvSpPr>
+          <p:spPr>
+            <a:xfrm>
+              <a:off x="10898730" y="-8467"/>
+              <a:ext cx="1290094" cy="6866467"/>
+            </a:xfrm>
+            <a:custGeom>
+              <a:avLst/>
+              <a:gdLst/>
+              <a:ahLst/>
+              <a:cxnLst/>
+              <a:rect l="l" t="t" r="r" b="b"/>
+              <a:pathLst>
+                <a:path w="1290094" h="6858000">
+                  <a:moveTo>
+                    <a:pt x="1019735" y="0"/>
+                  </a:moveTo>
+                  <a:lnTo>
+                    <a:pt x="1290094" y="0"/>
+                  </a:lnTo>
+                  <a:lnTo>
+                    <a:pt x="1290094" y="6858000"/>
+                  </a:lnTo>
+                  <a:lnTo>
+                    <a:pt x="0" y="6858000"/>
+                  </a:lnTo>
+                  <a:lnTo>
+                    <a:pt x="1019735" y="0"/>
+                  </a:lnTo>
+                  <a:close/>
+                </a:path>
+              </a:pathLst>
+            </a:custGeom>
+            <a:solidFill>
+              <a:schemeClr val="accent2">
+                <a:alpha val="70000"/>
+              </a:schemeClr>
+            </a:solidFill>
+            <a:ln>
+              <a:noFill/>
+            </a:ln>
+            <a:effectLst/>
+          </p:spPr>
+          <p:style>
+            <a:lnRef idx="1">
+              <a:schemeClr val="accent1"/>
+            </a:lnRef>
+            <a:fillRef idx="3">
+              <a:schemeClr val="accent1"/>
+            </a:fillRef>
+            <a:effectRef idx="2">
+              <a:schemeClr val="accent1"/>
+            </a:effectRef>
+            <a:fontRef idx="minor">
+              <a:schemeClr val="lt1"/>
+            </a:fontRef>
+          </p:style>
+        </p:sp>
+        <p:sp>
+          <p:nvSpPr>
+            <p:cNvPr id="27" name="Rectangle 29"/>
+            <p:cNvSpPr/>
+            <p:nvPr/>
+          </p:nvSpPr>
+          <p:spPr>
+            <a:xfrm>
+              <a:off x="10938999" y="-8467"/>
+              <a:ext cx="1249825" cy="6866467"/>
+            </a:xfrm>
+            <a:custGeom>
+              <a:avLst/>
+              <a:gdLst/>
+              <a:ahLst/>
+              <a:cxnLst/>
+              <a:rect l="l" t="t" r="r" b="b"/>
+              <a:pathLst>
+                <a:path w="1249825" h="6858000">
+                  <a:moveTo>
+                    <a:pt x="0" y="0"/>
+                  </a:moveTo>
+                  <a:lnTo>
+                    <a:pt x="1249825" y="0"/>
+                  </a:lnTo>
+                  <a:lnTo>
+                    <a:pt x="1249825" y="6858000"/>
+                  </a:lnTo>
+                  <a:lnTo>
+                    <a:pt x="1109382" y="6858000"/>
+                  </a:lnTo>
+                  <a:lnTo>
+                    <a:pt x="0" y="0"/>
+                  </a:lnTo>
+                  <a:close/>
+                </a:path>
+              </a:pathLst>
+            </a:custGeom>
+            <a:solidFill>
+              <a:schemeClr val="accent2">
+                <a:lumMod val="75000"/>
+                <a:alpha val="80000"/>
+              </a:schemeClr>
+            </a:solidFill>
+            <a:ln>
+              <a:noFill/>
+            </a:ln>
+            <a:effectLst/>
+          </p:spPr>
+          <p:style>
+            <a:lnRef idx="1">
+              <a:schemeClr val="accent1"/>
+            </a:lnRef>
+            <a:fillRef idx="3">
+              <a:schemeClr val="accent1"/>
+            </a:fillRef>
+            <a:effectRef idx="2">
+              <a:schemeClr val="accent1"/>
+            </a:effectRef>
+            <a:fontRef idx="minor">
+              <a:schemeClr val="lt1"/>
+            </a:fontRef>
+          </p:style>
+        </p:sp>
+        <p:sp>
+          <p:nvSpPr>
+            <p:cNvPr id="28" name="Isosceles Triangle 27"/>
+            <p:cNvSpPr/>
+            <p:nvPr/>
+          </p:nvSpPr>
+          <p:spPr>
+            <a:xfrm>
+              <a:off x="10371666" y="3589867"/>
+              <a:ext cx="1817159" cy="3268133"/>
+            </a:xfrm>
+            <a:prstGeom prst="triangle">
+              <a:avLst>
+                <a:gd name="adj" fmla="val 100000"/>
+              </a:avLst>
+            </a:prstGeom>
+            <a:solidFill>
+              <a:schemeClr val="accent1">
+                <a:lumMod val="75000"/>
+                <a:alpha val="66000"/>
+              </a:schemeClr>
+            </a:solidFill>
+            <a:ln>
+              <a:noFill/>
+            </a:ln>
+            <a:effectLst/>
+          </p:spPr>
+          <p:style>
+            <a:lnRef idx="1">
+              <a:schemeClr val="accent1"/>
+            </a:lnRef>
+            <a:fillRef idx="3">
+              <a:schemeClr val="accent1"/>
+            </a:fillRef>
+            <a:effectRef idx="2">
+              <a:schemeClr val="accent1"/>
+            </a:effectRef>
+            <a:fontRef idx="minor">
+              <a:schemeClr val="lt1"/>
+            </a:fontRef>
+          </p:style>
+        </p:sp>
+        <p:sp>
+          <p:nvSpPr>
+            <p:cNvPr id="19" name="Isosceles Triangle 18"/>
+            <p:cNvSpPr/>
+            <p:nvPr/>
+          </p:nvSpPr>
+          <p:spPr>
+            <a:xfrm>
+              <a:off x="0" y="4013200"/>
+              <a:ext cx="448733" cy="2844800"/>
+            </a:xfrm>
+            <a:prstGeom prst="triangle">
+              <a:avLst>
+                <a:gd name="adj" fmla="val 0"/>
+              </a:avLst>
+            </a:prstGeom>
+            <a:solidFill>
+              <a:schemeClr val="accent1">
+                <a:alpha val="70000"/>
+              </a:schemeClr>
+            </a:solidFill>
+            <a:ln>
+              <a:noFill/>
+            </a:ln>
+            <a:effectLst/>
+          </p:spPr>
+          <p:style>
+            <a:lnRef idx="1">
+              <a:schemeClr val="accent1"/>
+            </a:lnRef>
+            <a:fillRef idx="3">
+              <a:schemeClr val="accent1"/>
+            </a:fillRef>
+            <a:effectRef idx="2">
+              <a:schemeClr val="accent1"/>
+            </a:effectRef>
+            <a:fontRef idx="minor">
+              <a:schemeClr val="lt1"/>
+            </a:fontRef>
+          </p:style>
+        </p:sp>
+      </p:grpSp>
+      <p:sp>
+        <p:nvSpPr>
+          <p:cNvPr id="2" name="Title Placeholder 1"/>
           <p:cNvSpPr>
             <a:spLocks noGrp="1"/>
           </p:cNvSpPr>
@@ -2800,15 +5221,15 @@
         </p:nvSpPr>
         <p:spPr>
           <a:xfrm>
-            <a:off x="838200" y="365125"/>
-            <a:ext cx="10515600" cy="1325563"/>
+            <a:off x="677334" y="609600"/>
+            <a:ext cx="8596668" cy="1320800"/>
           </a:xfrm>
           <a:prstGeom prst="rect">
             <a:avLst/>
           </a:prstGeom>
         </p:spPr>
         <p:txBody>
-          <a:bodyPr vert="horz" lIns="91440" tIns="45720" rIns="91440" bIns="45720" rtlCol="0" anchor="ctr">
+          <a:bodyPr vert="horz" lIns="91440" tIns="45720" rIns="91440" bIns="45720" rtlCol="0" anchor="t">
             <a:normAutofit/>
           </a:bodyPr>
           <a:lstStyle/>
@@ -2817,18 +5238,13 @@
               <a:rPr lang="hu-HU"/>
               <a:t>Mintacím szerkesztése</a:t>
             </a:r>
-          </a:p>
-        </p:txBody>
-      </p:sp>
-      <p:sp>
-        <p:nvSpPr>
-          <p:cNvPr id="3" name="Szöveg helye 2">
-            <a:extLst>
-              <a:ext uri="{FF2B5EF4-FFF2-40B4-BE49-F238E27FC236}">
-                <a16:creationId xmlns:a16="http://schemas.microsoft.com/office/drawing/2014/main" id="{7A9C3A9E-4971-A225-D404-A81E5177B660}"/>
-              </a:ext>
-            </a:extLst>
-          </p:cNvPr>
+            <a:endParaRPr lang="en-US" dirty="0"/>
+          </a:p>
+        </p:txBody>
+      </p:sp>
+      <p:sp>
+        <p:nvSpPr>
+          <p:cNvPr id="3" name="Text Placeholder 2"/>
           <p:cNvSpPr>
             <a:spLocks noGrp="1"/>
           </p:cNvSpPr>
@@ -2838,8 +5254,8 @@
         </p:nvSpPr>
         <p:spPr>
           <a:xfrm>
-            <a:off x="838200" y="1825625"/>
-            <a:ext cx="10515600" cy="4351338"/>
+            <a:off x="677334" y="2160589"/>
+            <a:ext cx="8596668" cy="3880773"/>
           </a:xfrm>
           <a:prstGeom prst="rect">
             <a:avLst/>
@@ -2884,18 +5300,13 @@
               <a:rPr lang="hu-HU"/>
               <a:t>Ötödik szint</a:t>
             </a:r>
-          </a:p>
-        </p:txBody>
-      </p:sp>
-      <p:sp>
-        <p:nvSpPr>
-          <p:cNvPr id="4" name="Dátum helye 3">
-            <a:extLst>
-              <a:ext uri="{FF2B5EF4-FFF2-40B4-BE49-F238E27FC236}">
-                <a16:creationId xmlns:a16="http://schemas.microsoft.com/office/drawing/2014/main" id="{C62B99F6-8977-CD9F-FF6E-A43D8221BAE8}"/>
-              </a:ext>
-            </a:extLst>
-          </p:cNvPr>
+            <a:endParaRPr lang="en-US" dirty="0"/>
+          </a:p>
+        </p:txBody>
+      </p:sp>
+      <p:sp>
+        <p:nvSpPr>
+          <p:cNvPr id="4" name="Date Placeholder 3"/>
           <p:cNvSpPr>
             <a:spLocks noGrp="1"/>
           </p:cNvSpPr>
@@ -2905,8 +5316,8 @@
         </p:nvSpPr>
         <p:spPr>
           <a:xfrm>
-            <a:off x="838200" y="6356350"/>
-            <a:ext cx="2743200" cy="365125"/>
+            <a:off x="7205133" y="6041362"/>
+            <a:ext cx="911939" cy="365125"/>
           </a:xfrm>
           <a:prstGeom prst="rect">
             <a:avLst/>
@@ -2915,8 +5326,8 @@
         <p:txBody>
           <a:bodyPr vert="horz" lIns="91440" tIns="45720" rIns="91440" bIns="45720" rtlCol="0" anchor="ctr"/>
           <a:lstStyle>
-            <a:lvl1pPr algn="l">
-              <a:defRPr sz="1200">
+            <a:lvl1pPr algn="r">
+              <a:defRPr sz="900">
                 <a:solidFill>
                   <a:schemeClr val="tx1">
                     <a:tint val="75000"/>
@@ -2928,7 +5339,7 @@
           <a:p>
             <a:fld id="{0D24984B-60F3-4F71-B66E-41FD97B97414}" type="datetimeFigureOut">
               <a:rPr lang="hu-HU" smtClean="0"/>
-              <a:t>2026. 02. 22.</a:t>
+              <a:t>2026. 02. 28.</a:t>
             </a:fld>
             <a:endParaRPr lang="hu-HU"/>
           </a:p>
@@ -2936,13 +5347,7 @@
       </p:sp>
       <p:sp>
         <p:nvSpPr>
-          <p:cNvPr id="5" name="Élőláb helye 4">
-            <a:extLst>
-              <a:ext uri="{FF2B5EF4-FFF2-40B4-BE49-F238E27FC236}">
-                <a16:creationId xmlns:a16="http://schemas.microsoft.com/office/drawing/2014/main" id="{BE233E69-5555-B64D-066E-08F6D8FC909A}"/>
-              </a:ext>
-            </a:extLst>
-          </p:cNvPr>
+          <p:cNvPr id="5" name="Footer Placeholder 4"/>
           <p:cNvSpPr>
             <a:spLocks noGrp="1"/>
           </p:cNvSpPr>
@@ -2952,8 +5357,8 @@
         </p:nvSpPr>
         <p:spPr>
           <a:xfrm>
-            <a:off x="4038600" y="6356350"/>
-            <a:ext cx="4114800" cy="365125"/>
+            <a:off x="677334" y="6041362"/>
+            <a:ext cx="6297612" cy="365125"/>
           </a:xfrm>
           <a:prstGeom prst="rect">
             <a:avLst/>
@@ -2962,8 +5367,8 @@
         <p:txBody>
           <a:bodyPr vert="horz" lIns="91440" tIns="45720" rIns="91440" bIns="45720" rtlCol="0" anchor="ctr"/>
           <a:lstStyle>
-            <a:lvl1pPr algn="ctr">
-              <a:defRPr sz="1200">
+            <a:lvl1pPr algn="l">
+              <a:defRPr sz="900">
                 <a:solidFill>
                   <a:schemeClr val="tx1">
                     <a:tint val="75000"/>
@@ -2979,13 +5384,7 @@
       </p:sp>
       <p:sp>
         <p:nvSpPr>
-          <p:cNvPr id="6" name="Dia számának helye 5">
-            <a:extLst>
-              <a:ext uri="{FF2B5EF4-FFF2-40B4-BE49-F238E27FC236}">
-                <a16:creationId xmlns:a16="http://schemas.microsoft.com/office/drawing/2014/main" id="{EDA8F553-E732-04A9-848C-05585EBA60A1}"/>
-              </a:ext>
-            </a:extLst>
-          </p:cNvPr>
+          <p:cNvPr id="6" name="Slide Number Placeholder 5"/>
           <p:cNvSpPr>
             <a:spLocks noGrp="1"/>
           </p:cNvSpPr>
@@ -2995,8 +5394,8 @@
         </p:nvSpPr>
         <p:spPr>
           <a:xfrm>
-            <a:off x="8610600" y="6356350"/>
-            <a:ext cx="2743200" cy="365125"/>
+            <a:off x="8590663" y="6041362"/>
+            <a:ext cx="683339" cy="365125"/>
           </a:xfrm>
           <a:prstGeom prst="rect">
             <a:avLst/>
@@ -3006,11 +5405,9 @@
           <a:bodyPr vert="horz" lIns="91440" tIns="45720" rIns="91440" bIns="45720" rtlCol="0" anchor="ctr"/>
           <a:lstStyle>
             <a:lvl1pPr algn="r">
-              <a:defRPr sz="1200">
+              <a:defRPr sz="900">
                 <a:solidFill>
-                  <a:schemeClr val="tx1">
-                    <a:tint val="75000"/>
-                  </a:schemeClr>
+                  <a:schemeClr val="accent1"/>
                 </a:solidFill>
               </a:defRPr>
             </a:lvl1pPr>
@@ -3027,55 +5424,335 @@
     </p:spTree>
     <p:extLst>
       <p:ext uri="{BB962C8B-B14F-4D97-AF65-F5344CB8AC3E}">
-        <p14:creationId xmlns:p14="http://schemas.microsoft.com/office/powerpoint/2010/main" val="534128283"/>
+        <p14:creationId xmlns:p14="http://schemas.microsoft.com/office/powerpoint/2010/main" val="2647264662"/>
       </p:ext>
     </p:extLst>
   </p:cSld>
   <p:clrMap bg1="lt1" tx1="dk1" bg2="lt2" tx2="dk2" accent1="accent1" accent2="accent2" accent3="accent3" accent4="accent4" accent5="accent5" accent6="accent6" hlink="hlink" folHlink="folHlink"/>
   <p:sldLayoutIdLst>
-    <p:sldLayoutId id="2147483649" r:id="rId1"/>
-    <p:sldLayoutId id="2147483650" r:id="rId2"/>
-    <p:sldLayoutId id="2147483651" r:id="rId3"/>
-    <p:sldLayoutId id="2147483652" r:id="rId4"/>
-    <p:sldLayoutId id="2147483653" r:id="rId5"/>
-    <p:sldLayoutId id="2147483654" r:id="rId6"/>
-    <p:sldLayoutId id="2147483655" r:id="rId7"/>
-    <p:sldLayoutId id="2147483656" r:id="rId8"/>
-    <p:sldLayoutId id="2147483657" r:id="rId9"/>
-    <p:sldLayoutId id="2147483658" r:id="rId10"/>
-    <p:sldLayoutId id="2147483659" r:id="rId11"/>
+    <p:sldLayoutId id="2147483714" r:id="rId1"/>
+    <p:sldLayoutId id="2147483715" r:id="rId2"/>
+    <p:sldLayoutId id="2147483716" r:id="rId3"/>
+    <p:sldLayoutId id="2147483717" r:id="rId4"/>
+    <p:sldLayoutId id="2147483718" r:id="rId5"/>
+    <p:sldLayoutId id="2147483719" r:id="rId6"/>
+    <p:sldLayoutId id="2147483720" r:id="rId7"/>
+    <p:sldLayoutId id="2147483721" r:id="rId8"/>
+    <p:sldLayoutId id="2147483722" r:id="rId9"/>
+    <p:sldLayoutId id="2147483723" r:id="rId10"/>
+    <p:sldLayoutId id="2147483724" r:id="rId11"/>
+    <p:sldLayoutId id="2147483725" r:id="rId12"/>
+    <p:sldLayoutId id="2147483726" r:id="rId13"/>
+    <p:sldLayoutId id="2147483727" r:id="rId14"/>
+    <p:sldLayoutId id="2147483728" r:id="rId15"/>
+    <p:sldLayoutId id="2147483729" r:id="rId16"/>
   </p:sldLayoutIdLst>
   <p:txStyles>
     <p:titleStyle>
-      <a:lvl1pPr algn="l" defTabSz="914400" rtl="0" eaLnBrk="1" latinLnBrk="0" hangingPunct="1">
-        <a:lnSpc>
-          <a:spcPct val="90000"/>
-        </a:lnSpc>
+      <a:lvl1pPr algn="l" defTabSz="457200" rtl="0" eaLnBrk="1" latinLnBrk="0" hangingPunct="1">
         <a:spcBef>
           <a:spcPct val="0"/>
         </a:spcBef>
         <a:buNone/>
-        <a:defRPr sz="4400" kern="1200">
+        <a:defRPr sz="3600" kern="1200">
           <a:solidFill>
-            <a:schemeClr val="tx1"/>
+            <a:schemeClr val="accent1"/>
           </a:solidFill>
           <a:latin typeface="+mj-lt"/>
           <a:ea typeface="+mj-ea"/>
           <a:cs typeface="+mj-cs"/>
         </a:defRPr>
       </a:lvl1pPr>
+      <a:lvl2pPr eaLnBrk="1" hangingPunct="1">
+        <a:defRPr>
+          <a:solidFill>
+            <a:schemeClr val="tx2"/>
+          </a:solidFill>
+        </a:defRPr>
+      </a:lvl2pPr>
+      <a:lvl3pPr eaLnBrk="1" hangingPunct="1">
+        <a:defRPr>
+          <a:solidFill>
+            <a:schemeClr val="tx2"/>
+          </a:solidFill>
+        </a:defRPr>
+      </a:lvl3pPr>
+      <a:lvl4pPr eaLnBrk="1" hangingPunct="1">
+        <a:defRPr>
+          <a:solidFill>
+            <a:schemeClr val="tx2"/>
+          </a:solidFill>
+        </a:defRPr>
+      </a:lvl4pPr>
+      <a:lvl5pPr eaLnBrk="1" hangingPunct="1">
+        <a:defRPr>
+          <a:solidFill>
+            <a:schemeClr val="tx2"/>
+          </a:solidFill>
+        </a:defRPr>
+      </a:lvl5pPr>
+      <a:lvl6pPr eaLnBrk="1" hangingPunct="1">
+        <a:defRPr>
+          <a:solidFill>
+            <a:schemeClr val="tx2"/>
+          </a:solidFill>
+        </a:defRPr>
+      </a:lvl6pPr>
+      <a:lvl7pPr eaLnBrk="1" hangingPunct="1">
+        <a:defRPr>
+          <a:solidFill>
+            <a:schemeClr val="tx2"/>
+          </a:solidFill>
+        </a:defRPr>
+      </a:lvl7pPr>
+      <a:lvl8pPr eaLnBrk="1" hangingPunct="1">
+        <a:defRPr>
+          <a:solidFill>
+            <a:schemeClr val="tx2"/>
+          </a:solidFill>
+        </a:defRPr>
+      </a:lvl8pPr>
+      <a:lvl9pPr eaLnBrk="1" hangingPunct="1">
+        <a:defRPr>
+          <a:solidFill>
+            <a:schemeClr val="tx2"/>
+          </a:solidFill>
+        </a:defRPr>
+      </a:lvl9pPr>
     </p:titleStyle>
     <p:bodyStyle>
-      <a:lvl1pPr marL="228600" indent="-228600" algn="l" defTabSz="914400" rtl="0" eaLnBrk="1" latinLnBrk="0" hangingPunct="1">
-        <a:lnSpc>
-          <a:spcPct val="90000"/>
-        </a:lnSpc>
+      <a:lvl1pPr marL="342900" indent="-342900" algn="l" defTabSz="457200" rtl="0" eaLnBrk="1" latinLnBrk="0" hangingPunct="1">
         <a:spcBef>
           <a:spcPts val="1000"/>
         </a:spcBef>
-        <a:buFont typeface="Arial" panose="020B0604020202020204" pitchFamily="34" charset="0"/>
-        <a:buChar char="•"/>
-        <a:defRPr sz="2800" kern="1200">
+        <a:spcAft>
+          <a:spcPts val="0"/>
+        </a:spcAft>
+        <a:buClr>
+          <a:schemeClr val="accent1"/>
+        </a:buClr>
+        <a:buSzPct val="80000"/>
+        <a:buFont typeface="Wingdings 3" charset="2"/>
+        <a:buChar char=""/>
+        <a:defRPr sz="1800" kern="1200">
+          <a:solidFill>
+            <a:schemeClr val="tx1">
+              <a:lumMod val="75000"/>
+              <a:lumOff val="25000"/>
+            </a:schemeClr>
+          </a:solidFill>
+          <a:latin typeface="+mn-lt"/>
+          <a:ea typeface="+mn-ea"/>
+          <a:cs typeface="+mn-cs"/>
+        </a:defRPr>
+      </a:lvl1pPr>
+      <a:lvl2pPr marL="742950" indent="-285750" algn="l" defTabSz="457200" rtl="0" eaLnBrk="1" latinLnBrk="0" hangingPunct="1">
+        <a:spcBef>
+          <a:spcPts val="1000"/>
+        </a:spcBef>
+        <a:spcAft>
+          <a:spcPts val="0"/>
+        </a:spcAft>
+        <a:buClr>
+          <a:schemeClr val="accent1"/>
+        </a:buClr>
+        <a:buSzPct val="80000"/>
+        <a:buFont typeface="Wingdings 3" charset="2"/>
+        <a:buChar char=""/>
+        <a:defRPr sz="1600" kern="1200">
+          <a:solidFill>
+            <a:schemeClr val="tx1">
+              <a:lumMod val="75000"/>
+              <a:lumOff val="25000"/>
+            </a:schemeClr>
+          </a:solidFill>
+          <a:latin typeface="+mn-lt"/>
+          <a:ea typeface="+mn-ea"/>
+          <a:cs typeface="+mn-cs"/>
+        </a:defRPr>
+      </a:lvl2pPr>
+      <a:lvl3pPr marL="1143000" indent="-228600" algn="l" defTabSz="457200" rtl="0" eaLnBrk="1" latinLnBrk="0" hangingPunct="1">
+        <a:spcBef>
+          <a:spcPts val="1000"/>
+        </a:spcBef>
+        <a:spcAft>
+          <a:spcPts val="0"/>
+        </a:spcAft>
+        <a:buClr>
+          <a:schemeClr val="accent1"/>
+        </a:buClr>
+        <a:buSzPct val="80000"/>
+        <a:buFont typeface="Wingdings 3" charset="2"/>
+        <a:buChar char=""/>
+        <a:defRPr sz="1400" kern="1200">
+          <a:solidFill>
+            <a:schemeClr val="tx1">
+              <a:lumMod val="75000"/>
+              <a:lumOff val="25000"/>
+            </a:schemeClr>
+          </a:solidFill>
+          <a:latin typeface="+mn-lt"/>
+          <a:ea typeface="+mn-ea"/>
+          <a:cs typeface="+mn-cs"/>
+        </a:defRPr>
+      </a:lvl3pPr>
+      <a:lvl4pPr marL="1600200" indent="-228600" algn="l" defTabSz="457200" rtl="0" eaLnBrk="1" latinLnBrk="0" hangingPunct="1">
+        <a:spcBef>
+          <a:spcPts val="1000"/>
+        </a:spcBef>
+        <a:spcAft>
+          <a:spcPts val="0"/>
+        </a:spcAft>
+        <a:buClr>
+          <a:schemeClr val="accent1"/>
+        </a:buClr>
+        <a:buSzPct val="80000"/>
+        <a:buFont typeface="Wingdings 3" charset="2"/>
+        <a:buChar char=""/>
+        <a:defRPr sz="1200" kern="1200">
+          <a:solidFill>
+            <a:schemeClr val="tx1">
+              <a:lumMod val="75000"/>
+              <a:lumOff val="25000"/>
+            </a:schemeClr>
+          </a:solidFill>
+          <a:latin typeface="+mn-lt"/>
+          <a:ea typeface="+mn-ea"/>
+          <a:cs typeface="+mn-cs"/>
+        </a:defRPr>
+      </a:lvl4pPr>
+      <a:lvl5pPr marL="2057400" indent="-228600" algn="l" defTabSz="457200" rtl="0" eaLnBrk="1" latinLnBrk="0" hangingPunct="1">
+        <a:spcBef>
+          <a:spcPts val="1000"/>
+        </a:spcBef>
+        <a:spcAft>
+          <a:spcPts val="0"/>
+        </a:spcAft>
+        <a:buClr>
+          <a:schemeClr val="accent1"/>
+        </a:buClr>
+        <a:buSzPct val="80000"/>
+        <a:buFont typeface="Wingdings 3" charset="2"/>
+        <a:buChar char=""/>
+        <a:defRPr sz="1200" kern="1200">
+          <a:solidFill>
+            <a:schemeClr val="tx1">
+              <a:lumMod val="75000"/>
+              <a:lumOff val="25000"/>
+            </a:schemeClr>
+          </a:solidFill>
+          <a:latin typeface="+mn-lt"/>
+          <a:ea typeface="+mn-ea"/>
+          <a:cs typeface="+mn-cs"/>
+        </a:defRPr>
+      </a:lvl5pPr>
+      <a:lvl6pPr marL="2514600" indent="-228600" algn="l" defTabSz="457200" rtl="0" eaLnBrk="1" latinLnBrk="0" hangingPunct="1">
+        <a:spcBef>
+          <a:spcPts val="1000"/>
+        </a:spcBef>
+        <a:spcAft>
+          <a:spcPts val="0"/>
+        </a:spcAft>
+        <a:buClr>
+          <a:schemeClr val="accent1"/>
+        </a:buClr>
+        <a:buSzPct val="80000"/>
+        <a:buFont typeface="Wingdings 3" charset="2"/>
+        <a:buChar char=""/>
+        <a:defRPr sz="1200" kern="1200">
+          <a:solidFill>
+            <a:schemeClr val="tx1">
+              <a:lumMod val="75000"/>
+              <a:lumOff val="25000"/>
+            </a:schemeClr>
+          </a:solidFill>
+          <a:latin typeface="+mn-lt"/>
+          <a:ea typeface="+mn-ea"/>
+          <a:cs typeface="+mn-cs"/>
+        </a:defRPr>
+      </a:lvl6pPr>
+      <a:lvl7pPr marL="2971800" indent="-228600" algn="l" defTabSz="457200" rtl="0" eaLnBrk="1" latinLnBrk="0" hangingPunct="1">
+        <a:spcBef>
+          <a:spcPts val="1000"/>
+        </a:spcBef>
+        <a:spcAft>
+          <a:spcPts val="0"/>
+        </a:spcAft>
+        <a:buClr>
+          <a:schemeClr val="accent1"/>
+        </a:buClr>
+        <a:buSzPct val="80000"/>
+        <a:buFont typeface="Wingdings 3" charset="2"/>
+        <a:buChar char=""/>
+        <a:defRPr sz="1200" kern="1200">
+          <a:solidFill>
+            <a:schemeClr val="tx1">
+              <a:lumMod val="75000"/>
+              <a:lumOff val="25000"/>
+            </a:schemeClr>
+          </a:solidFill>
+          <a:latin typeface="+mn-lt"/>
+          <a:ea typeface="+mn-ea"/>
+          <a:cs typeface="+mn-cs"/>
+        </a:defRPr>
+      </a:lvl7pPr>
+      <a:lvl8pPr marL="3429000" indent="-228600" algn="l" defTabSz="457200" rtl="0" eaLnBrk="1" latinLnBrk="0" hangingPunct="1">
+        <a:spcBef>
+          <a:spcPts val="1000"/>
+        </a:spcBef>
+        <a:spcAft>
+          <a:spcPts val="0"/>
+        </a:spcAft>
+        <a:buClr>
+          <a:schemeClr val="accent1"/>
+        </a:buClr>
+        <a:buSzPct val="80000"/>
+        <a:buFont typeface="Wingdings 3" charset="2"/>
+        <a:buChar char=""/>
+        <a:defRPr sz="1200" kern="1200">
+          <a:solidFill>
+            <a:schemeClr val="tx1">
+              <a:lumMod val="75000"/>
+              <a:lumOff val="25000"/>
+            </a:schemeClr>
+          </a:solidFill>
+          <a:latin typeface="+mn-lt"/>
+          <a:ea typeface="+mn-ea"/>
+          <a:cs typeface="+mn-cs"/>
+        </a:defRPr>
+      </a:lvl8pPr>
+      <a:lvl9pPr marL="3886200" indent="-228600" algn="l" defTabSz="457200" rtl="0" eaLnBrk="1" latinLnBrk="0" hangingPunct="1">
+        <a:spcBef>
+          <a:spcPts val="1000"/>
+        </a:spcBef>
+        <a:spcAft>
+          <a:spcPts val="0"/>
+        </a:spcAft>
+        <a:buClr>
+          <a:schemeClr val="accent1"/>
+        </a:buClr>
+        <a:buSzPct val="80000"/>
+        <a:buFont typeface="Wingdings 3" charset="2"/>
+        <a:buChar char=""/>
+        <a:defRPr sz="1200" kern="1200">
+          <a:solidFill>
+            <a:schemeClr val="tx1">
+              <a:lumMod val="75000"/>
+              <a:lumOff val="25000"/>
+            </a:schemeClr>
+          </a:solidFill>
+          <a:latin typeface="+mn-lt"/>
+          <a:ea typeface="+mn-ea"/>
+          <a:cs typeface="+mn-cs"/>
+        </a:defRPr>
+      </a:lvl9pPr>
+    </p:bodyStyle>
+    <p:otherStyle>
+      <a:defPPr>
+        <a:defRPr lang="en-US"/>
+      </a:defPPr>
+      <a:lvl1pPr marL="0" algn="l" defTabSz="457200" rtl="0" eaLnBrk="1" latinLnBrk="0" hangingPunct="1">
+        <a:defRPr sz="1800" kern="1200">
           <a:solidFill>
             <a:schemeClr val="tx1"/>
           </a:solidFill>
@@ -3084,16 +5761,8 @@
           <a:cs typeface="+mn-cs"/>
         </a:defRPr>
       </a:lvl1pPr>
-      <a:lvl2pPr marL="685800" indent="-228600" algn="l" defTabSz="914400" rtl="0" eaLnBrk="1" latinLnBrk="0" hangingPunct="1">
-        <a:lnSpc>
-          <a:spcPct val="90000"/>
-        </a:lnSpc>
-        <a:spcBef>
-          <a:spcPts val="500"/>
-        </a:spcBef>
-        <a:buFont typeface="Arial" panose="020B0604020202020204" pitchFamily="34" charset="0"/>
-        <a:buChar char="•"/>
-        <a:defRPr sz="2400" kern="1200">
+      <a:lvl2pPr marL="457200" algn="l" defTabSz="457200" rtl="0" eaLnBrk="1" latinLnBrk="0" hangingPunct="1">
+        <a:defRPr sz="1800" kern="1200">
           <a:solidFill>
             <a:schemeClr val="tx1"/>
           </a:solidFill>
@@ -3102,16 +5771,8 @@
           <a:cs typeface="+mn-cs"/>
         </a:defRPr>
       </a:lvl2pPr>
-      <a:lvl3pPr marL="1143000" indent="-228600" algn="l" defTabSz="914400" rtl="0" eaLnBrk="1" latinLnBrk="0" hangingPunct="1">
-        <a:lnSpc>
-          <a:spcPct val="90000"/>
-        </a:lnSpc>
-        <a:spcBef>
-          <a:spcPts val="500"/>
-        </a:spcBef>
-        <a:buFont typeface="Arial" panose="020B0604020202020204" pitchFamily="34" charset="0"/>
-        <a:buChar char="•"/>
-        <a:defRPr sz="2000" kern="1200">
+      <a:lvl3pPr marL="914400" algn="l" defTabSz="457200" rtl="0" eaLnBrk="1" latinLnBrk="0" hangingPunct="1">
+        <a:defRPr sz="1800" kern="1200">
           <a:solidFill>
             <a:schemeClr val="tx1"/>
           </a:solidFill>
@@ -3120,15 +5781,7 @@
           <a:cs typeface="+mn-cs"/>
         </a:defRPr>
       </a:lvl3pPr>
-      <a:lvl4pPr marL="1600200" indent="-228600" algn="l" defTabSz="914400" rtl="0" eaLnBrk="1" latinLnBrk="0" hangingPunct="1">
-        <a:lnSpc>
-          <a:spcPct val="90000"/>
-        </a:lnSpc>
-        <a:spcBef>
-          <a:spcPts val="500"/>
-        </a:spcBef>
-        <a:buFont typeface="Arial" panose="020B0604020202020204" pitchFamily="34" charset="0"/>
-        <a:buChar char="•"/>
+      <a:lvl4pPr marL="1371600" algn="l" defTabSz="457200" rtl="0" eaLnBrk="1" latinLnBrk="0" hangingPunct="1">
         <a:defRPr sz="1800" kern="1200">
           <a:solidFill>
             <a:schemeClr val="tx1"/>
@@ -3138,15 +5791,7 @@
           <a:cs typeface="+mn-cs"/>
         </a:defRPr>
       </a:lvl4pPr>
-      <a:lvl5pPr marL="2057400" indent="-228600" algn="l" defTabSz="914400" rtl="0" eaLnBrk="1" latinLnBrk="0" hangingPunct="1">
-        <a:lnSpc>
-          <a:spcPct val="90000"/>
-        </a:lnSpc>
-        <a:spcBef>
-          <a:spcPts val="500"/>
-        </a:spcBef>
-        <a:buFont typeface="Arial" panose="020B0604020202020204" pitchFamily="34" charset="0"/>
-        <a:buChar char="•"/>
+      <a:lvl5pPr marL="1828800" algn="l" defTabSz="457200" rtl="0" eaLnBrk="1" latinLnBrk="0" hangingPunct="1">
         <a:defRPr sz="1800" kern="1200">
           <a:solidFill>
             <a:schemeClr val="tx1"/>
@@ -3156,15 +5801,7 @@
           <a:cs typeface="+mn-cs"/>
         </a:defRPr>
       </a:lvl5pPr>
-      <a:lvl6pPr marL="2514600" indent="-228600" algn="l" defTabSz="914400" rtl="0" eaLnBrk="1" latinLnBrk="0" hangingPunct="1">
-        <a:lnSpc>
-          <a:spcPct val="90000"/>
-        </a:lnSpc>
-        <a:spcBef>
-          <a:spcPts val="500"/>
-        </a:spcBef>
-        <a:buFont typeface="Arial" panose="020B0604020202020204" pitchFamily="34" charset="0"/>
-        <a:buChar char="•"/>
+      <a:lvl6pPr marL="2286000" algn="l" defTabSz="457200" rtl="0" eaLnBrk="1" latinLnBrk="0" hangingPunct="1">
         <a:defRPr sz="1800" kern="1200">
           <a:solidFill>
             <a:schemeClr val="tx1"/>
@@ -3174,15 +5811,7 @@
           <a:cs typeface="+mn-cs"/>
         </a:defRPr>
       </a:lvl6pPr>
-      <a:lvl7pPr marL="2971800" indent="-228600" algn="l" defTabSz="914400" rtl="0" eaLnBrk="1" latinLnBrk="0" hangingPunct="1">
-        <a:lnSpc>
-          <a:spcPct val="90000"/>
-        </a:lnSpc>
-        <a:spcBef>
-          <a:spcPts val="500"/>
-        </a:spcBef>
-        <a:buFont typeface="Arial" panose="020B0604020202020204" pitchFamily="34" charset="0"/>
-        <a:buChar char="•"/>
+      <a:lvl7pPr marL="2743200" algn="l" defTabSz="457200" rtl="0" eaLnBrk="1" latinLnBrk="0" hangingPunct="1">
         <a:defRPr sz="1800" kern="1200">
           <a:solidFill>
             <a:schemeClr val="tx1"/>
@@ -3192,15 +5821,7 @@
           <a:cs typeface="+mn-cs"/>
         </a:defRPr>
       </a:lvl7pPr>
-      <a:lvl8pPr marL="3429000" indent="-228600" algn="l" defTabSz="914400" rtl="0" eaLnBrk="1" latinLnBrk="0" hangingPunct="1">
-        <a:lnSpc>
-          <a:spcPct val="90000"/>
-        </a:lnSpc>
-        <a:spcBef>
-          <a:spcPts val="500"/>
-        </a:spcBef>
-        <a:buFont typeface="Arial" panose="020B0604020202020204" pitchFamily="34" charset="0"/>
-        <a:buChar char="•"/>
+      <a:lvl8pPr marL="3200400" algn="l" defTabSz="457200" rtl="0" eaLnBrk="1" latinLnBrk="0" hangingPunct="1">
         <a:defRPr sz="1800" kern="1200">
           <a:solidFill>
             <a:schemeClr val="tx1"/>
@@ -3210,110 +5831,7 @@
           <a:cs typeface="+mn-cs"/>
         </a:defRPr>
       </a:lvl8pPr>
-      <a:lvl9pPr marL="3886200" indent="-228600" algn="l" defTabSz="914400" rtl="0" eaLnBrk="1" latinLnBrk="0" hangingPunct="1">
-        <a:lnSpc>
-          <a:spcPct val="90000"/>
-        </a:lnSpc>
-        <a:spcBef>
-          <a:spcPts val="500"/>
-        </a:spcBef>
-        <a:buFont typeface="Arial" panose="020B0604020202020204" pitchFamily="34" charset="0"/>
-        <a:buChar char="•"/>
-        <a:defRPr sz="1800" kern="1200">
-          <a:solidFill>
-            <a:schemeClr val="tx1"/>
-          </a:solidFill>
-          <a:latin typeface="+mn-lt"/>
-          <a:ea typeface="+mn-ea"/>
-          <a:cs typeface="+mn-cs"/>
-        </a:defRPr>
-      </a:lvl9pPr>
-    </p:bodyStyle>
-    <p:otherStyle>
-      <a:defPPr>
-        <a:defRPr lang="hu-HU"/>
-      </a:defPPr>
-      <a:lvl1pPr marL="0" algn="l" defTabSz="914400" rtl="0" eaLnBrk="1" latinLnBrk="0" hangingPunct="1">
-        <a:defRPr sz="1800" kern="1200">
-          <a:solidFill>
-            <a:schemeClr val="tx1"/>
-          </a:solidFill>
-          <a:latin typeface="+mn-lt"/>
-          <a:ea typeface="+mn-ea"/>
-          <a:cs typeface="+mn-cs"/>
-        </a:defRPr>
-      </a:lvl1pPr>
-      <a:lvl2pPr marL="457200" algn="l" defTabSz="914400" rtl="0" eaLnBrk="1" latinLnBrk="0" hangingPunct="1">
-        <a:defRPr sz="1800" kern="1200">
-          <a:solidFill>
-            <a:schemeClr val="tx1"/>
-          </a:solidFill>
-          <a:latin typeface="+mn-lt"/>
-          <a:ea typeface="+mn-ea"/>
-          <a:cs typeface="+mn-cs"/>
-        </a:defRPr>
-      </a:lvl2pPr>
-      <a:lvl3pPr marL="914400" algn="l" defTabSz="914400" rtl="0" eaLnBrk="1" latinLnBrk="0" hangingPunct="1">
-        <a:defRPr sz="1800" kern="1200">
-          <a:solidFill>
-            <a:schemeClr val="tx1"/>
-          </a:solidFill>
-          <a:latin typeface="+mn-lt"/>
-          <a:ea typeface="+mn-ea"/>
-          <a:cs typeface="+mn-cs"/>
-        </a:defRPr>
-      </a:lvl3pPr>
-      <a:lvl4pPr marL="1371600" algn="l" defTabSz="914400" rtl="0" eaLnBrk="1" latinLnBrk="0" hangingPunct="1">
-        <a:defRPr sz="1800" kern="1200">
-          <a:solidFill>
-            <a:schemeClr val="tx1"/>
-          </a:solidFill>
-          <a:latin typeface="+mn-lt"/>
-          <a:ea typeface="+mn-ea"/>
-          <a:cs typeface="+mn-cs"/>
-        </a:defRPr>
-      </a:lvl4pPr>
-      <a:lvl5pPr marL="1828800" algn="l" defTabSz="914400" rtl="0" eaLnBrk="1" latinLnBrk="0" hangingPunct="1">
-        <a:defRPr sz="1800" kern="1200">
-          <a:solidFill>
-            <a:schemeClr val="tx1"/>
-          </a:solidFill>
-          <a:latin typeface="+mn-lt"/>
-          <a:ea typeface="+mn-ea"/>
-          <a:cs typeface="+mn-cs"/>
-        </a:defRPr>
-      </a:lvl5pPr>
-      <a:lvl6pPr marL="2286000" algn="l" defTabSz="914400" rtl="0" eaLnBrk="1" latinLnBrk="0" hangingPunct="1">
-        <a:defRPr sz="1800" kern="1200">
-          <a:solidFill>
-            <a:schemeClr val="tx1"/>
-          </a:solidFill>
-          <a:latin typeface="+mn-lt"/>
-          <a:ea typeface="+mn-ea"/>
-          <a:cs typeface="+mn-cs"/>
-        </a:defRPr>
-      </a:lvl6pPr>
-      <a:lvl7pPr marL="2743200" algn="l" defTabSz="914400" rtl="0" eaLnBrk="1" latinLnBrk="0" hangingPunct="1">
-        <a:defRPr sz="1800" kern="1200">
-          <a:solidFill>
-            <a:schemeClr val="tx1"/>
-          </a:solidFill>
-          <a:latin typeface="+mn-lt"/>
-          <a:ea typeface="+mn-ea"/>
-          <a:cs typeface="+mn-cs"/>
-        </a:defRPr>
-      </a:lvl7pPr>
-      <a:lvl8pPr marL="3200400" algn="l" defTabSz="914400" rtl="0" eaLnBrk="1" latinLnBrk="0" hangingPunct="1">
-        <a:defRPr sz="1800" kern="1200">
-          <a:solidFill>
-            <a:schemeClr val="tx1"/>
-          </a:solidFill>
-          <a:latin typeface="+mn-lt"/>
-          <a:ea typeface="+mn-ea"/>
-          <a:cs typeface="+mn-cs"/>
-        </a:defRPr>
-      </a:lvl8pPr>
-      <a:lvl9pPr marL="3657600" algn="l" defTabSz="914400" rtl="0" eaLnBrk="1" latinLnBrk="0" hangingPunct="1">
+      <a:lvl9pPr marL="3657600" algn="l" defTabSz="457200" rtl="0" eaLnBrk="1" latinLnBrk="0" hangingPunct="1">
         <a:defRPr sz="1800" kern="1200">
           <a:solidFill>
             <a:schemeClr val="tx1"/>
@@ -3325,6 +5843,11 @@
       </a:lvl9pPr>
     </p:otherStyle>
   </p:txStyles>
+  <p:extLst>
+    <p:ext uri="{27BBF7A9-308A-43DC-89C8-2F10F3537804}">
+      <p15:sldGuideLst xmlns:p15="http://schemas.microsoft.com/office/powerpoint/2012/main"/>
+    </p:ext>
+  </p:extLst>
 </p:sldMaster>
 </file>
 
@@ -4018,8 +6541,8 @@
         </p:blipFill>
         <p:spPr>
           <a:xfrm>
-            <a:off x="6533337" y="3148553"/>
-            <a:ext cx="5658662" cy="3709448"/>
+            <a:off x="6575854" y="3148553"/>
+            <a:ext cx="5658661" cy="3709447"/>
           </a:xfrm>
         </p:spPr>
       </p:pic>
@@ -4186,8 +6709,8 @@
         </p:blipFill>
         <p:spPr>
           <a:xfrm>
-            <a:off x="6124944" y="3618000"/>
-            <a:ext cx="6067056" cy="3240000"/>
+            <a:off x="6057532" y="3582000"/>
+            <a:ext cx="6134468" cy="3276000"/>
           </a:xfrm>
         </p:spPr>
       </p:pic>
@@ -4219,8 +6742,8 @@
         </p:blipFill>
         <p:spPr>
           <a:xfrm>
-            <a:off x="6911" y="3618000"/>
-            <a:ext cx="6060146" cy="3240000"/>
+            <a:off x="0" y="3582000"/>
+            <a:ext cx="6127481" cy="3276000"/>
           </a:xfrm>
           <a:prstGeom prst="rect">
             <a:avLst/>
@@ -4316,15 +6839,14 @@
               </a:ext>
             </a:extLst>
           </a:blip>
-          <a:srcRect/>
           <a:stretch>
             <a:fillRect/>
           </a:stretch>
         </p:blipFill>
         <p:spPr bwMode="auto">
           <a:xfrm>
-            <a:off x="2709745" y="1825625"/>
-            <a:ext cx="6772510" cy="4351338"/>
+            <a:off x="3075426" y="1930400"/>
+            <a:ext cx="6041147" cy="3881437"/>
           </a:xfrm>
           <a:prstGeom prst="rect">
             <a:avLst/>
@@ -4752,8 +7274,8 @@
         </p:blipFill>
         <p:spPr>
           <a:xfrm>
-            <a:off x="1093995" y="1825625"/>
-            <a:ext cx="10004009" cy="4351338"/>
+            <a:off x="1797844" y="2231783"/>
+            <a:ext cx="8596312" cy="3739046"/>
           </a:xfrm>
         </p:spPr>
       </p:pic>
@@ -4895,7 +7417,7 @@
         </p:blipFill>
         <p:spPr>
           <a:xfrm>
-            <a:off x="3819207" y="2114365"/>
+            <a:off x="2978606" y="1629000"/>
             <a:ext cx="6234787" cy="3600000"/>
           </a:xfrm>
           <a:prstGeom prst="rect">
@@ -5041,7 +7563,7 @@
         </p:blipFill>
         <p:spPr>
           <a:xfrm>
-            <a:off x="3557221" y="2095314"/>
+            <a:off x="2669565" y="1629000"/>
             <a:ext cx="6852869" cy="3600000"/>
           </a:xfrm>
           <a:prstGeom prst="rect">
@@ -5145,12 +7667,15 @@
                 <a:latin typeface="Times New Roman" panose="02020603050405020304" pitchFamily="18" charset="0"/>
                 <a:cs typeface="Times New Roman" panose="02020603050405020304" pitchFamily="18" charset="0"/>
               </a:rPr>
-              <a:t>Static and Dynamic Network Address Translation (NAT, PAT)</a:t>
-            </a:r>
-            <a:endParaRPr lang="hu-HU" dirty="0">
-              <a:latin typeface="Times New Roman" panose="02020603050405020304" pitchFamily="18" charset="0"/>
-              <a:cs typeface="Times New Roman" panose="02020603050405020304" pitchFamily="18" charset="0"/>
-            </a:endParaRPr>
+              <a:t>Dynamic Network Address Translation (NAT</a:t>
+            </a:r>
+            <a:r>
+              <a:rPr lang="hu-HU" dirty="0">
+                <a:latin typeface="Times New Roman" panose="02020603050405020304" pitchFamily="18" charset="0"/>
+                <a:cs typeface="Times New Roman" panose="02020603050405020304" pitchFamily="18" charset="0"/>
+              </a:rPr>
+              <a:t>)</a:t>
+            </a:r>
           </a:p>
           <a:p>
             <a:r>
@@ -5200,7 +7725,7 @@
         </p:blipFill>
         <p:spPr>
           <a:xfrm>
-            <a:off x="6567207" y="2892875"/>
+            <a:off x="5596246" y="1930400"/>
             <a:ext cx="4786593" cy="3600000"/>
           </a:xfrm>
           <a:prstGeom prst="rect">
@@ -5337,7 +7862,7 @@
         </p:blipFill>
         <p:spPr>
           <a:xfrm>
-            <a:off x="5342780" y="1496963"/>
+            <a:off x="3777931" y="1361362"/>
             <a:ext cx="5866116" cy="4680000"/>
           </a:xfrm>
           <a:prstGeom prst="rect">
@@ -5437,11 +7962,52 @@
           </a:p>
           <a:p>
             <a:r>
+              <a:rPr lang="hu-HU" dirty="0" err="1">
+                <a:latin typeface="Times New Roman" panose="02020603050405020304" pitchFamily="18" charset="0"/>
+                <a:cs typeface="Times New Roman" panose="02020603050405020304" pitchFamily="18" charset="0"/>
+              </a:rPr>
+              <a:t>Firewall</a:t>
+            </a:r>
+            <a:endParaRPr lang="hu-HU" dirty="0">
+              <a:latin typeface="Times New Roman" panose="02020603050405020304" pitchFamily="18" charset="0"/>
+              <a:cs typeface="Times New Roman" panose="02020603050405020304" pitchFamily="18" charset="0"/>
+            </a:endParaRPr>
+          </a:p>
+          <a:p>
+            <a:r>
+              <a:rPr lang="hu-HU" dirty="0" err="1">
+                <a:latin typeface="Times New Roman" panose="02020603050405020304" pitchFamily="18" charset="0"/>
+                <a:cs typeface="Times New Roman" panose="02020603050405020304" pitchFamily="18" charset="0"/>
+              </a:rPr>
+              <a:t>Static</a:t>
+            </a:r>
+            <a:r>
+              <a:rPr lang="hu-HU">
+                <a:latin typeface="Times New Roman" panose="02020603050405020304" pitchFamily="18" charset="0"/>
+                <a:cs typeface="Times New Roman" panose="02020603050405020304" pitchFamily="18" charset="0"/>
+              </a:rPr>
+              <a:t> </a:t>
+            </a:r>
+            <a:r>
+              <a:rPr lang="en-US">
+                <a:latin typeface="Times New Roman" panose="02020603050405020304" pitchFamily="18" charset="0"/>
+                <a:cs typeface="Times New Roman" panose="02020603050405020304" pitchFamily="18" charset="0"/>
+              </a:rPr>
+              <a:t>Network </a:t>
+            </a:r>
+            <a:r>
+              <a:rPr lang="en-US" dirty="0">
+                <a:latin typeface="Times New Roman" panose="02020603050405020304" pitchFamily="18" charset="0"/>
+                <a:cs typeface="Times New Roman" panose="02020603050405020304" pitchFamily="18" charset="0"/>
+              </a:rPr>
+              <a:t>Address Translation (NAT</a:t>
+            </a:r>
+            <a:r>
               <a:rPr lang="hu-HU" dirty="0">
                 <a:latin typeface="Times New Roman" panose="02020603050405020304" pitchFamily="18" charset="0"/>
                 <a:cs typeface="Times New Roman" panose="02020603050405020304" pitchFamily="18" charset="0"/>
               </a:rPr>
-              <a:t>Firewall</a:t>
+              <a:t>)</a:t>
             </a:r>
           </a:p>
           <a:p>
@@ -5483,8 +8049,8 @@
         </p:blipFill>
         <p:spPr>
           <a:xfrm>
-            <a:off x="5301192" y="1856963"/>
-            <a:ext cx="6413805" cy="4320000"/>
+            <a:off x="5197464" y="2160589"/>
+            <a:ext cx="4810365" cy="3240000"/>
           </a:xfrm>
           <a:prstGeom prst="rect">
             <a:avLst/>
@@ -5505,9 +8071,9 @@
 </file>
 
 <file path=ppt/theme/theme1.xml><?xml version="1.0" encoding="utf-8"?>
-<a:theme xmlns:a="http://schemas.openxmlformats.org/drawingml/2006/main" name="Office-téma">
+<a:theme xmlns:a="http://schemas.openxmlformats.org/drawingml/2006/main" name="Dimenzió">
   <a:themeElements>
-    <a:clrScheme name="Office">
+    <a:clrScheme name="Dimenzió">
       <a:dk1>
         <a:sysClr val="windowText" lastClr="000000"/>
       </a:dk1>
@@ -5515,52 +8081,52 @@
         <a:sysClr val="window" lastClr="FFFFFF"/>
       </a:lt1>
       <a:dk2>
-        <a:srgbClr val="44546A"/>
+        <a:srgbClr val="2C3C43"/>
       </a:dk2>
       <a:lt2>
-        <a:srgbClr val="E7E6E6"/>
+        <a:srgbClr val="EBEBEB"/>
       </a:lt2>
       <a:accent1>
-        <a:srgbClr val="4472C4"/>
+        <a:srgbClr val="5FCBEF"/>
       </a:accent1>
       <a:accent2>
-        <a:srgbClr val="ED7D31"/>
+        <a:srgbClr val="2E83C3"/>
       </a:accent2>
       <a:accent3>
-        <a:srgbClr val="A5A5A5"/>
+        <a:srgbClr val="42D0A2"/>
       </a:accent3>
       <a:accent4>
-        <a:srgbClr val="FFC000"/>
+        <a:srgbClr val="2E946B"/>
       </a:accent4>
       <a:accent5>
-        <a:srgbClr val="5B9BD5"/>
+        <a:srgbClr val="42B051"/>
       </a:accent5>
       <a:accent6>
-        <a:srgbClr val="70AD47"/>
+        <a:srgbClr val="96D141"/>
       </a:accent6>
       <a:hlink>
-        <a:srgbClr val="0563C1"/>
+        <a:srgbClr val="3FCDE7"/>
       </a:hlink>
       <a:folHlink>
-        <a:srgbClr val="954F72"/>
+        <a:srgbClr val="A9D3E1"/>
       </a:folHlink>
     </a:clrScheme>
-    <a:fontScheme name="Office">
+    <a:fontScheme name="Dimenzió">
       <a:majorFont>
-        <a:latin typeface="Calibri Light" panose="020F0302020204030204"/>
+        <a:latin typeface="Trebuchet MS" panose="020B0603020202020204"/>
         <a:ea typeface=""/>
         <a:cs typeface=""/>
-        <a:font script="Jpan" typeface="游ゴシック Light"/>
+        <a:font script="Jpan" typeface="メイリオ"/>
         <a:font script="Hang" typeface="맑은 고딕"/>
-        <a:font script="Hans" typeface="等线 Light"/>
-        <a:font script="Hant" typeface="新細明體"/>
-        <a:font script="Arab" typeface="Times New Roman"/>
-        <a:font script="Hebr" typeface="Times New Roman"/>
-        <a:font script="Thai" typeface="Angsana New"/>
+        <a:font script="Hans" typeface="方正姚体"/>
+        <a:font script="Hant" typeface="微軟正黑體"/>
+        <a:font script="Arab" typeface="Tahoma"/>
+        <a:font script="Hebr" typeface="Arial"/>
+        <a:font script="Thai" typeface="Cordia New"/>
         <a:font script="Ethi" typeface="Nyala"/>
         <a:font script="Beng" typeface="Vrinda"/>
         <a:font script="Gujr" typeface="Shruti"/>
-        <a:font script="Khmr" typeface="MoolBoran"/>
+        <a:font script="Khmr" typeface="DaunPenh"/>
         <a:font script="Knda" typeface="Tunga"/>
         <a:font script="Guru" typeface="Raavi"/>
         <a:font script="Cans" typeface="Euphemia"/>
@@ -5577,38 +8143,21 @@
         <a:font script="Laoo" typeface="DokChampa"/>
         <a:font script="Sinh" typeface="Iskoola Pota"/>
         <a:font script="Mong" typeface="Mongolian Baiti"/>
-        <a:font script="Viet" typeface="Times New Roman"/>
+        <a:font script="Viet" typeface="Tahoma"/>
         <a:font script="Uigh" typeface="Microsoft Uighur"/>
         <a:font script="Geor" typeface="Sylfaen"/>
-        <a:font script="Armn" typeface="Arial"/>
-        <a:font script="Bugi" typeface="Leelawadee UI"/>
-        <a:font script="Bopo" typeface="Microsoft JhengHei"/>
-        <a:font script="Java" typeface="Javanese Text"/>
-        <a:font script="Lisu" typeface="Segoe UI"/>
-        <a:font script="Mymr" typeface="Myanmar Text"/>
-        <a:font script="Nkoo" typeface="Ebrima"/>
-        <a:font script="Olck" typeface="Nirmala UI"/>
-        <a:font script="Osma" typeface="Ebrima"/>
-        <a:font script="Phag" typeface="Phagspa"/>
-        <a:font script="Syrn" typeface="Estrangelo Edessa"/>
-        <a:font script="Syrj" typeface="Estrangelo Edessa"/>
-        <a:font script="Syre" typeface="Estrangelo Edessa"/>
-        <a:font script="Sora" typeface="Nirmala UI"/>
-        <a:font script="Tale" typeface="Microsoft Tai Le"/>
-        <a:font script="Talu" typeface="Microsoft New Tai Lue"/>
-        <a:font script="Tfng" typeface="Ebrima"/>
       </a:majorFont>
       <a:minorFont>
-        <a:latin typeface="Calibri" panose="020F0502020204030204"/>
+        <a:latin typeface="Trebuchet MS" panose="020B0603020202020204"/>
         <a:ea typeface=""/>
         <a:cs typeface=""/>
-        <a:font script="Jpan" typeface="游ゴシック"/>
-        <a:font script="Hang" typeface="맑은 고딕"/>
-        <a:font script="Hans" typeface="等线"/>
-        <a:font script="Hant" typeface="新細明體"/>
-        <a:font script="Arab" typeface="Arial"/>
-        <a:font script="Hebr" typeface="Arial"/>
-        <a:font script="Thai" typeface="Cordia New"/>
+        <a:font script="Jpan" typeface="メイリオ"/>
+        <a:font script="Hang" typeface="HY그래픽M"/>
+        <a:font script="Hans" typeface="华文新魏"/>
+        <a:font script="Hant" typeface="微軟正黑體"/>
+        <a:font script="Arab" typeface="Tahoma"/>
+        <a:font script="Hebr" typeface="Gisha"/>
+        <a:font script="Thai" typeface="IrisUPC"/>
         <a:font script="Ethi" typeface="Nyala"/>
         <a:font script="Beng" typeface="Vrinda"/>
         <a:font script="Gujr" typeface="Shruti"/>
@@ -5632,26 +8181,9 @@
         <a:font script="Viet" typeface="Arial"/>
         <a:font script="Uigh" typeface="Microsoft Uighur"/>
         <a:font script="Geor" typeface="Sylfaen"/>
-        <a:font script="Armn" typeface="Arial"/>
-        <a:font script="Bugi" typeface="Leelawadee UI"/>
-        <a:font script="Bopo" typeface="Microsoft JhengHei"/>
-        <a:font script="Java" typeface="Javanese Text"/>
-        <a:font script="Lisu" typeface="Segoe UI"/>
-        <a:font script="Mymr" typeface="Myanmar Text"/>
-        <a:font script="Nkoo" typeface="Ebrima"/>
-        <a:font script="Olck" typeface="Nirmala UI"/>
-        <a:font script="Osma" typeface="Ebrima"/>
-        <a:font script="Phag" typeface="Phagspa"/>
-        <a:font script="Syrn" typeface="Estrangelo Edessa"/>
-        <a:font script="Syrj" typeface="Estrangelo Edessa"/>
-        <a:font script="Syre" typeface="Estrangelo Edessa"/>
-        <a:font script="Sora" typeface="Nirmala UI"/>
-        <a:font script="Tale" typeface="Microsoft Tai Le"/>
-        <a:font script="Talu" typeface="Microsoft New Tai Lue"/>
-        <a:font script="Tfng" typeface="Ebrima"/>
       </a:minorFont>
     </a:fontScheme>
-    <a:fmtScheme name="Office">
+    <a:fmtScheme name="Dimenzió">
       <a:fillStyleLst>
         <a:solidFill>
           <a:schemeClr val="phClr"/>
@@ -5660,23 +8192,13 @@
           <a:gsLst>
             <a:gs pos="0">
               <a:schemeClr val="phClr">
+                <a:tint val="65000"/>
                 <a:lumMod val="110000"/>
-                <a:satMod val="105000"/>
-                <a:tint val="67000"/>
               </a:schemeClr>
             </a:gs>
-            <a:gs pos="50000">
+            <a:gs pos="88000">
               <a:schemeClr val="phClr">
-                <a:lumMod val="105000"/>
-                <a:satMod val="103000"/>
-                <a:tint val="73000"/>
-              </a:schemeClr>
-            </a:gs>
-            <a:gs pos="100000">
-              <a:schemeClr val="phClr">
-                <a:lumMod val="105000"/>
-                <a:satMod val="109000"/>
-                <a:tint val="81000"/>
+                <a:tint val="90000"/>
               </a:schemeClr>
             </a:gs>
           </a:gsLst>
@@ -5686,23 +8208,14 @@
           <a:gsLst>
             <a:gs pos="0">
               <a:schemeClr val="phClr">
-                <a:satMod val="103000"/>
-                <a:lumMod val="102000"/>
-                <a:tint val="94000"/>
+                <a:tint val="96000"/>
+                <a:lumMod val="100000"/>
               </a:schemeClr>
             </a:gs>
-            <a:gs pos="50000">
+            <a:gs pos="78000">
               <a:schemeClr val="phClr">
-                <a:satMod val="110000"/>
-                <a:lumMod val="100000"/>
-                <a:shade val="100000"/>
-              </a:schemeClr>
-            </a:gs>
-            <a:gs pos="100000">
-              <a:schemeClr val="phClr">
-                <a:lumMod val="99000"/>
-                <a:satMod val="120000"/>
-                <a:shade val="78000"/>
+                <a:shade val="94000"/>
+                <a:lumMod val="94000"/>
               </a:schemeClr>
             </a:gs>
           </a:gsLst>
@@ -5710,26 +8223,23 @@
         </a:gradFill>
       </a:fillStyleLst>
       <a:lnStyleLst>
-        <a:ln w="6350" cap="flat" cmpd="sng" algn="ctr">
+        <a:ln w="12700" cap="rnd" cmpd="sng" algn="ctr">
           <a:solidFill>
             <a:schemeClr val="phClr"/>
           </a:solidFill>
           <a:prstDash val="solid"/>
-          <a:miter lim="800000"/>
         </a:ln>
-        <a:ln w="12700" cap="flat" cmpd="sng" algn="ctr">
+        <a:ln w="19050" cap="rnd" cmpd="sng" algn="ctr">
           <a:solidFill>
             <a:schemeClr val="phClr"/>
           </a:solidFill>
           <a:prstDash val="solid"/>
-          <a:miter lim="800000"/>
         </a:ln>
-        <a:ln w="19050" cap="flat" cmpd="sng" algn="ctr">
+        <a:ln w="25400" cap="rnd" cmpd="sng" algn="ctr">
           <a:solidFill>
             <a:schemeClr val="phClr"/>
           </a:solidFill>
           <a:prstDash val="solid"/>
-          <a:miter lim="800000"/>
         </a:ln>
       </a:lnStyleLst>
       <a:effectStyleLst>
@@ -5737,54 +8247,72 @@
           <a:effectLst/>
         </a:effectStyle>
         <a:effectStyle>
-          <a:effectLst/>
+          <a:effectLst>
+            <a:outerShdw blurRad="38100" dist="25400" dir="5400000" rotWithShape="0">
+              <a:srgbClr val="000000">
+                <a:alpha val="35000"/>
+              </a:srgbClr>
+            </a:outerShdw>
+          </a:effectLst>
         </a:effectStyle>
         <a:effectStyle>
           <a:effectLst>
-            <a:outerShdw blurRad="57150" dist="19050" dir="5400000" algn="ctr" rotWithShape="0">
+            <a:outerShdw blurRad="50800" dist="38100" dir="5400000" rotWithShape="0">
               <a:srgbClr val="000000">
-                <a:alpha val="63000"/>
+                <a:alpha val="35000"/>
               </a:srgbClr>
             </a:outerShdw>
           </a:effectLst>
+          <a:scene3d>
+            <a:camera prst="orthographicFront">
+              <a:rot lat="0" lon="0" rev="0"/>
+            </a:camera>
+            <a:lightRig rig="threePt" dir="tl"/>
+          </a:scene3d>
+          <a:sp3d prstMaterial="plastic">
+            <a:bevelT w="0" h="0"/>
+          </a:sp3d>
         </a:effectStyle>
       </a:effectStyleLst>
       <a:bgFillStyleLst>
         <a:solidFill>
           <a:schemeClr val="phClr"/>
         </a:solidFill>
-        <a:solidFill>
-          <a:schemeClr val="phClr">
-            <a:tint val="95000"/>
-            <a:satMod val="170000"/>
-          </a:schemeClr>
-        </a:solidFill>
         <a:gradFill rotWithShape="1">
           <a:gsLst>
             <a:gs pos="0">
               <a:schemeClr val="phClr">
-                <a:tint val="93000"/>
-                <a:satMod val="150000"/>
-                <a:shade val="98000"/>
-                <a:lumMod val="102000"/>
+                <a:tint val="90000"/>
+                <a:lumMod val="104000"/>
               </a:schemeClr>
             </a:gs>
-            <a:gs pos="50000">
+            <a:gs pos="94000">
               <a:schemeClr val="phClr">
-                <a:tint val="98000"/>
-                <a:satMod val="130000"/>
-                <a:shade val="90000"/>
-                <a:lumMod val="103000"/>
+                <a:shade val="96000"/>
+                <a:lumMod val="82000"/>
+              </a:schemeClr>
+            </a:gs>
+          </a:gsLst>
+          <a:lin ang="5400000" scaled="0"/>
+        </a:gradFill>
+        <a:gradFill rotWithShape="1">
+          <a:gsLst>
+            <a:gs pos="0">
+              <a:schemeClr val="phClr">
+                <a:tint val="90000"/>
+                <a:lumMod val="110000"/>
               </a:schemeClr>
             </a:gs>
             <a:gs pos="100000">
               <a:schemeClr val="phClr">
-                <a:shade val="63000"/>
-                <a:satMod val="120000"/>
+                <a:shade val="94000"/>
+                <a:lumMod val="96000"/>
               </a:schemeClr>
             </a:gs>
           </a:gsLst>
-          <a:lin ang="5400000" scaled="0"/>
+          <a:path path="circle">
+            <a:fillToRect l="50000" t="50000" r="100000" b="100000"/>
+          </a:path>
         </a:gradFill>
       </a:bgFillStyleLst>
     </a:fmtScheme>
@@ -5793,7 +8321,7 @@
   <a:extraClrSchemeLst/>
   <a:extLst>
     <a:ext uri="{05A4C25C-085E-4340-85A3-A5531E510DB2}">
-      <thm15:themeFamily xmlns:thm15="http://schemas.microsoft.com/office/thememl/2012/main" name="Office Theme" id="{62F939B6-93AF-4DB8-9C6B-D6C7DFDC589F}" vid="{4A3C46E8-61CC-4603-A589-7422A47A8E4A}"/>
+      <thm15:themeFamily xmlns:thm15="http://schemas.microsoft.com/office/thememl/2012/main" name="Facet" id="{C0C680CD-088A-49FC-A102-D699147F32B2}" vid="{0B5AB586-D108-4FC1-8368-649FE654B894}"/>
     </a:ext>
   </a:extLst>
 </a:theme>
